--- a/gakkyu/tegami/pptx/Y2.pptx
+++ b/gakkyu/tegami/pptx/Y2.pptx
@@ -3622,6 +3622,7 @@
               <a:srgbClr val="6AA7A7"/>
             </a:solidFill>
           </a:ln>
+          <a:effectLst/>
         </p:spPr>
         <p:style>
           <a:lnRef idx="2">
@@ -3630,7 +3631,7 @@
           <a:fillRef idx="0">
             <a:schemeClr val="accent1"/>
           </a:fillRef>
-          <a:effectRef idx="1">
+          <a:effectRef idx="0">
             <a:schemeClr val="accent1"/>
           </a:effectRef>
           <a:fontRef idx="minor">
@@ -3681,7 +3682,7 @@
             <a:fillRef idx="3">
               <a:schemeClr val="accent1"/>
             </a:fillRef>
-            <a:effectRef idx="2">
+            <a:effectRef idx="0">
               <a:schemeClr val="accent1"/>
             </a:effectRef>
             <a:fontRef idx="minor">
@@ -3715,15 +3716,16 @@
                 <a:srgbClr val="8FBFBF"/>
               </a:solidFill>
             </a:ln>
-          </p:spPr>
-          <p:style>
-            <a:lnRef idx="2">
-              <a:schemeClr val="accent1"/>
-            </a:lnRef>
-            <a:fillRef idx="0">
-              <a:schemeClr val="accent1"/>
-            </a:fillRef>
-            <a:effectRef idx="1">
+            <a:effectLst/>
+          </p:spPr>
+          <p:style>
+            <a:lnRef idx="2">
+              <a:schemeClr val="accent1"/>
+            </a:lnRef>
+            <a:fillRef idx="0">
+              <a:schemeClr val="accent1"/>
+            </a:fillRef>
+            <a:effectRef idx="0">
               <a:schemeClr val="accent1"/>
             </a:effectRef>
             <a:fontRef idx="minor">
@@ -3750,15 +3752,16 @@
                 <a:srgbClr val="8FBFBF"/>
               </a:solidFill>
             </a:ln>
-          </p:spPr>
-          <p:style>
-            <a:lnRef idx="2">
-              <a:schemeClr val="accent1"/>
-            </a:lnRef>
-            <a:fillRef idx="0">
-              <a:schemeClr val="accent1"/>
-            </a:fillRef>
-            <a:effectRef idx="1">
+            <a:effectLst/>
+          </p:spPr>
+          <p:style>
+            <a:lnRef idx="2">
+              <a:schemeClr val="accent1"/>
+            </a:lnRef>
+            <a:fillRef idx="0">
+              <a:schemeClr val="accent1"/>
+            </a:fillRef>
+            <a:effectRef idx="0">
               <a:schemeClr val="accent1"/>
             </a:effectRef>
             <a:fontRef idx="minor">
@@ -3785,15 +3788,16 @@
                 <a:srgbClr val="8FBFBF"/>
               </a:solidFill>
             </a:ln>
-          </p:spPr>
-          <p:style>
-            <a:lnRef idx="2">
-              <a:schemeClr val="accent1"/>
-            </a:lnRef>
-            <a:fillRef idx="0">
-              <a:schemeClr val="accent1"/>
-            </a:fillRef>
-            <a:effectRef idx="1">
+            <a:effectLst/>
+          </p:spPr>
+          <p:style>
+            <a:lnRef idx="2">
+              <a:schemeClr val="accent1"/>
+            </a:lnRef>
+            <a:fillRef idx="0">
+              <a:schemeClr val="accent1"/>
+            </a:fillRef>
+            <a:effectRef idx="0">
               <a:schemeClr val="accent1"/>
             </a:effectRef>
             <a:fontRef idx="minor">
@@ -3820,15 +3824,16 @@
                 <a:srgbClr val="8FBFBF"/>
               </a:solidFill>
             </a:ln>
-          </p:spPr>
-          <p:style>
-            <a:lnRef idx="2">
-              <a:schemeClr val="accent1"/>
-            </a:lnRef>
-            <a:fillRef idx="0">
-              <a:schemeClr val="accent1"/>
-            </a:fillRef>
-            <a:effectRef idx="1">
+            <a:effectLst/>
+          </p:spPr>
+          <p:style>
+            <a:lnRef idx="2">
+              <a:schemeClr val="accent1"/>
+            </a:lnRef>
+            <a:fillRef idx="0">
+              <a:schemeClr val="accent1"/>
+            </a:fillRef>
+            <a:effectRef idx="0">
               <a:schemeClr val="accent1"/>
             </a:effectRef>
             <a:fontRef idx="minor">
@@ -3855,15 +3860,16 @@
                 <a:srgbClr val="8FBFBF"/>
               </a:solidFill>
             </a:ln>
-          </p:spPr>
-          <p:style>
-            <a:lnRef idx="2">
-              <a:schemeClr val="accent1"/>
-            </a:lnRef>
-            <a:fillRef idx="0">
-              <a:schemeClr val="accent1"/>
-            </a:fillRef>
-            <a:effectRef idx="1">
+            <a:effectLst/>
+          </p:spPr>
+          <p:style>
+            <a:lnRef idx="2">
+              <a:schemeClr val="accent1"/>
+            </a:lnRef>
+            <a:fillRef idx="0">
+              <a:schemeClr val="accent1"/>
+            </a:fillRef>
+            <a:effectRef idx="0">
               <a:schemeClr val="accent1"/>
             </a:effectRef>
             <a:fontRef idx="minor">
@@ -3890,15 +3896,16 @@
                 <a:srgbClr val="8FBFBF"/>
               </a:solidFill>
             </a:ln>
-          </p:spPr>
-          <p:style>
-            <a:lnRef idx="2">
-              <a:schemeClr val="accent1"/>
-            </a:lnRef>
-            <a:fillRef idx="0">
-              <a:schemeClr val="accent1"/>
-            </a:fillRef>
-            <a:effectRef idx="1">
+            <a:effectLst/>
+          </p:spPr>
+          <p:style>
+            <a:lnRef idx="2">
+              <a:schemeClr val="accent1"/>
+            </a:lnRef>
+            <a:fillRef idx="0">
+              <a:schemeClr val="accent1"/>
+            </a:fillRef>
+            <a:effectRef idx="0">
               <a:schemeClr val="accent1"/>
             </a:effectRef>
             <a:fontRef idx="minor">
@@ -3925,15 +3932,16 @@
                 <a:srgbClr val="8FBFBF"/>
               </a:solidFill>
             </a:ln>
-          </p:spPr>
-          <p:style>
-            <a:lnRef idx="2">
-              <a:schemeClr val="accent1"/>
-            </a:lnRef>
-            <a:fillRef idx="0">
-              <a:schemeClr val="accent1"/>
-            </a:fillRef>
-            <a:effectRef idx="1">
+            <a:effectLst/>
+          </p:spPr>
+          <p:style>
+            <a:lnRef idx="2">
+              <a:schemeClr val="accent1"/>
+            </a:lnRef>
+            <a:fillRef idx="0">
+              <a:schemeClr val="accent1"/>
+            </a:fillRef>
+            <a:effectRef idx="0">
               <a:schemeClr val="accent1"/>
             </a:effectRef>
             <a:fontRef idx="minor">
@@ -3960,15 +3968,16 @@
                 <a:srgbClr val="8FBFBF"/>
               </a:solidFill>
             </a:ln>
-          </p:spPr>
-          <p:style>
-            <a:lnRef idx="2">
-              <a:schemeClr val="accent1"/>
-            </a:lnRef>
-            <a:fillRef idx="0">
-              <a:schemeClr val="accent1"/>
-            </a:fillRef>
-            <a:effectRef idx="1">
+            <a:effectLst/>
+          </p:spPr>
+          <p:style>
+            <a:lnRef idx="2">
+              <a:schemeClr val="accent1"/>
+            </a:lnRef>
+            <a:fillRef idx="0">
+              <a:schemeClr val="accent1"/>
+            </a:fillRef>
+            <a:effectRef idx="0">
               <a:schemeClr val="accent1"/>
             </a:effectRef>
             <a:fontRef idx="minor">
@@ -3995,15 +4004,16 @@
                 <a:srgbClr val="8FBFBF"/>
               </a:solidFill>
             </a:ln>
-          </p:spPr>
-          <p:style>
-            <a:lnRef idx="2">
-              <a:schemeClr val="accent1"/>
-            </a:lnRef>
-            <a:fillRef idx="0">
-              <a:schemeClr val="accent1"/>
-            </a:fillRef>
-            <a:effectRef idx="1">
+            <a:effectLst/>
+          </p:spPr>
+          <p:style>
+            <a:lnRef idx="2">
+              <a:schemeClr val="accent1"/>
+            </a:lnRef>
+            <a:fillRef idx="0">
+              <a:schemeClr val="accent1"/>
+            </a:fillRef>
+            <a:effectRef idx="0">
               <a:schemeClr val="accent1"/>
             </a:effectRef>
             <a:fontRef idx="minor">
@@ -4030,15 +4040,16 @@
                 <a:srgbClr val="8FBFBF"/>
               </a:solidFill>
             </a:ln>
-          </p:spPr>
-          <p:style>
-            <a:lnRef idx="2">
-              <a:schemeClr val="accent1"/>
-            </a:lnRef>
-            <a:fillRef idx="0">
-              <a:schemeClr val="accent1"/>
-            </a:fillRef>
-            <a:effectRef idx="1">
+            <a:effectLst/>
+          </p:spPr>
+          <p:style>
+            <a:lnRef idx="2">
+              <a:schemeClr val="accent1"/>
+            </a:lnRef>
+            <a:fillRef idx="0">
+              <a:schemeClr val="accent1"/>
+            </a:fillRef>
+            <a:effectRef idx="0">
               <a:schemeClr val="accent1"/>
             </a:effectRef>
             <a:fontRef idx="minor">
@@ -4065,15 +4076,16 @@
                 <a:srgbClr val="8FBFBF"/>
               </a:solidFill>
             </a:ln>
-          </p:spPr>
-          <p:style>
-            <a:lnRef idx="2">
-              <a:schemeClr val="accent1"/>
-            </a:lnRef>
-            <a:fillRef idx="0">
-              <a:schemeClr val="accent1"/>
-            </a:fillRef>
-            <a:effectRef idx="1">
+            <a:effectLst/>
+          </p:spPr>
+          <p:style>
+            <a:lnRef idx="2">
+              <a:schemeClr val="accent1"/>
+            </a:lnRef>
+            <a:fillRef idx="0">
+              <a:schemeClr val="accent1"/>
+            </a:fillRef>
+            <a:effectRef idx="0">
               <a:schemeClr val="accent1"/>
             </a:effectRef>
             <a:fontRef idx="minor">
@@ -4100,15 +4112,16 @@
                 <a:srgbClr val="8FBFBF"/>
               </a:solidFill>
             </a:ln>
-          </p:spPr>
-          <p:style>
-            <a:lnRef idx="2">
-              <a:schemeClr val="accent1"/>
-            </a:lnRef>
-            <a:fillRef idx="0">
-              <a:schemeClr val="accent1"/>
-            </a:fillRef>
-            <a:effectRef idx="1">
+            <a:effectLst/>
+          </p:spPr>
+          <p:style>
+            <a:lnRef idx="2">
+              <a:schemeClr val="accent1"/>
+            </a:lnRef>
+            <a:fillRef idx="0">
+              <a:schemeClr val="accent1"/>
+            </a:fillRef>
+            <a:effectRef idx="0">
               <a:schemeClr val="accent1"/>
             </a:effectRef>
             <a:fontRef idx="minor">
@@ -4135,15 +4148,16 @@
                 <a:srgbClr val="8FBFBF"/>
               </a:solidFill>
             </a:ln>
-          </p:spPr>
-          <p:style>
-            <a:lnRef idx="2">
-              <a:schemeClr val="accent1"/>
-            </a:lnRef>
-            <a:fillRef idx="0">
-              <a:schemeClr val="accent1"/>
-            </a:fillRef>
-            <a:effectRef idx="1">
+            <a:effectLst/>
+          </p:spPr>
+          <p:style>
+            <a:lnRef idx="2">
+              <a:schemeClr val="accent1"/>
+            </a:lnRef>
+            <a:fillRef idx="0">
+              <a:schemeClr val="accent1"/>
+            </a:fillRef>
+            <a:effectRef idx="0">
               <a:schemeClr val="accent1"/>
             </a:effectRef>
             <a:fontRef idx="minor">
@@ -4170,15 +4184,16 @@
                 <a:srgbClr val="8FBFBF"/>
               </a:solidFill>
             </a:ln>
-          </p:spPr>
-          <p:style>
-            <a:lnRef idx="2">
-              <a:schemeClr val="accent1"/>
-            </a:lnRef>
-            <a:fillRef idx="0">
-              <a:schemeClr val="accent1"/>
-            </a:fillRef>
-            <a:effectRef idx="1">
+            <a:effectLst/>
+          </p:spPr>
+          <p:style>
+            <a:lnRef idx="2">
+              <a:schemeClr val="accent1"/>
+            </a:lnRef>
+            <a:fillRef idx="0">
+              <a:schemeClr val="accent1"/>
+            </a:fillRef>
+            <a:effectRef idx="0">
               <a:schemeClr val="accent1"/>
             </a:effectRef>
             <a:fontRef idx="minor">
@@ -4230,7 +4245,7 @@
             <a:fillRef idx="3">
               <a:schemeClr val="accent1"/>
             </a:fillRef>
-            <a:effectRef idx="2">
+            <a:effectRef idx="0">
               <a:schemeClr val="accent1"/>
             </a:effectRef>
             <a:fontRef idx="minor">
@@ -4264,15 +4279,16 @@
                 <a:srgbClr val="8FBFBF"/>
               </a:solidFill>
             </a:ln>
-          </p:spPr>
-          <p:style>
-            <a:lnRef idx="2">
-              <a:schemeClr val="accent1"/>
-            </a:lnRef>
-            <a:fillRef idx="0">
-              <a:schemeClr val="accent1"/>
-            </a:fillRef>
-            <a:effectRef idx="1">
+            <a:effectLst/>
+          </p:spPr>
+          <p:style>
+            <a:lnRef idx="2">
+              <a:schemeClr val="accent1"/>
+            </a:lnRef>
+            <a:fillRef idx="0">
+              <a:schemeClr val="accent1"/>
+            </a:fillRef>
+            <a:effectRef idx="0">
               <a:schemeClr val="accent1"/>
             </a:effectRef>
             <a:fontRef idx="minor">
@@ -4299,15 +4315,16 @@
                 <a:srgbClr val="8FBFBF"/>
               </a:solidFill>
             </a:ln>
-          </p:spPr>
-          <p:style>
-            <a:lnRef idx="2">
-              <a:schemeClr val="accent1"/>
-            </a:lnRef>
-            <a:fillRef idx="0">
-              <a:schemeClr val="accent1"/>
-            </a:fillRef>
-            <a:effectRef idx="1">
+            <a:effectLst/>
+          </p:spPr>
+          <p:style>
+            <a:lnRef idx="2">
+              <a:schemeClr val="accent1"/>
+            </a:lnRef>
+            <a:fillRef idx="0">
+              <a:schemeClr val="accent1"/>
+            </a:fillRef>
+            <a:effectRef idx="0">
               <a:schemeClr val="accent1"/>
             </a:effectRef>
             <a:fontRef idx="minor">
@@ -4334,15 +4351,16 @@
                 <a:srgbClr val="8FBFBF"/>
               </a:solidFill>
             </a:ln>
-          </p:spPr>
-          <p:style>
-            <a:lnRef idx="2">
-              <a:schemeClr val="accent1"/>
-            </a:lnRef>
-            <a:fillRef idx="0">
-              <a:schemeClr val="accent1"/>
-            </a:fillRef>
-            <a:effectRef idx="1">
+            <a:effectLst/>
+          </p:spPr>
+          <p:style>
+            <a:lnRef idx="2">
+              <a:schemeClr val="accent1"/>
+            </a:lnRef>
+            <a:fillRef idx="0">
+              <a:schemeClr val="accent1"/>
+            </a:fillRef>
+            <a:effectRef idx="0">
               <a:schemeClr val="accent1"/>
             </a:effectRef>
             <a:fontRef idx="minor">
@@ -4369,15 +4387,16 @@
                 <a:srgbClr val="8FBFBF"/>
               </a:solidFill>
             </a:ln>
-          </p:spPr>
-          <p:style>
-            <a:lnRef idx="2">
-              <a:schemeClr val="accent1"/>
-            </a:lnRef>
-            <a:fillRef idx="0">
-              <a:schemeClr val="accent1"/>
-            </a:fillRef>
-            <a:effectRef idx="1">
+            <a:effectLst/>
+          </p:spPr>
+          <p:style>
+            <a:lnRef idx="2">
+              <a:schemeClr val="accent1"/>
+            </a:lnRef>
+            <a:fillRef idx="0">
+              <a:schemeClr val="accent1"/>
+            </a:fillRef>
+            <a:effectRef idx="0">
               <a:schemeClr val="accent1"/>
             </a:effectRef>
             <a:fontRef idx="minor">
@@ -4404,15 +4423,16 @@
                 <a:srgbClr val="8FBFBF"/>
               </a:solidFill>
             </a:ln>
-          </p:spPr>
-          <p:style>
-            <a:lnRef idx="2">
-              <a:schemeClr val="accent1"/>
-            </a:lnRef>
-            <a:fillRef idx="0">
-              <a:schemeClr val="accent1"/>
-            </a:fillRef>
-            <a:effectRef idx="1">
+            <a:effectLst/>
+          </p:spPr>
+          <p:style>
+            <a:lnRef idx="2">
+              <a:schemeClr val="accent1"/>
+            </a:lnRef>
+            <a:fillRef idx="0">
+              <a:schemeClr val="accent1"/>
+            </a:fillRef>
+            <a:effectRef idx="0">
               <a:schemeClr val="accent1"/>
             </a:effectRef>
             <a:fontRef idx="minor">
@@ -4439,15 +4459,16 @@
                 <a:srgbClr val="8FBFBF"/>
               </a:solidFill>
             </a:ln>
-          </p:spPr>
-          <p:style>
-            <a:lnRef idx="2">
-              <a:schemeClr val="accent1"/>
-            </a:lnRef>
-            <a:fillRef idx="0">
-              <a:schemeClr val="accent1"/>
-            </a:fillRef>
-            <a:effectRef idx="1">
+            <a:effectLst/>
+          </p:spPr>
+          <p:style>
+            <a:lnRef idx="2">
+              <a:schemeClr val="accent1"/>
+            </a:lnRef>
+            <a:fillRef idx="0">
+              <a:schemeClr val="accent1"/>
+            </a:fillRef>
+            <a:effectRef idx="0">
               <a:schemeClr val="accent1"/>
             </a:effectRef>
             <a:fontRef idx="minor">
@@ -4474,15 +4495,16 @@
                 <a:srgbClr val="8FBFBF"/>
               </a:solidFill>
             </a:ln>
-          </p:spPr>
-          <p:style>
-            <a:lnRef idx="2">
-              <a:schemeClr val="accent1"/>
-            </a:lnRef>
-            <a:fillRef idx="0">
-              <a:schemeClr val="accent1"/>
-            </a:fillRef>
-            <a:effectRef idx="1">
+            <a:effectLst/>
+          </p:spPr>
+          <p:style>
+            <a:lnRef idx="2">
+              <a:schemeClr val="accent1"/>
+            </a:lnRef>
+            <a:fillRef idx="0">
+              <a:schemeClr val="accent1"/>
+            </a:fillRef>
+            <a:effectRef idx="0">
               <a:schemeClr val="accent1"/>
             </a:effectRef>
             <a:fontRef idx="minor">
@@ -4509,15 +4531,16 @@
                 <a:srgbClr val="8FBFBF"/>
               </a:solidFill>
             </a:ln>
-          </p:spPr>
-          <p:style>
-            <a:lnRef idx="2">
-              <a:schemeClr val="accent1"/>
-            </a:lnRef>
-            <a:fillRef idx="0">
-              <a:schemeClr val="accent1"/>
-            </a:fillRef>
-            <a:effectRef idx="1">
+            <a:effectLst/>
+          </p:spPr>
+          <p:style>
+            <a:lnRef idx="2">
+              <a:schemeClr val="accent1"/>
+            </a:lnRef>
+            <a:fillRef idx="0">
+              <a:schemeClr val="accent1"/>
+            </a:fillRef>
+            <a:effectRef idx="0">
               <a:schemeClr val="accent1"/>
             </a:effectRef>
             <a:fontRef idx="minor">
@@ -4544,15 +4567,16 @@
                 <a:srgbClr val="8FBFBF"/>
               </a:solidFill>
             </a:ln>
-          </p:spPr>
-          <p:style>
-            <a:lnRef idx="2">
-              <a:schemeClr val="accent1"/>
-            </a:lnRef>
-            <a:fillRef idx="0">
-              <a:schemeClr val="accent1"/>
-            </a:fillRef>
-            <a:effectRef idx="1">
+            <a:effectLst/>
+          </p:spPr>
+          <p:style>
+            <a:lnRef idx="2">
+              <a:schemeClr val="accent1"/>
+            </a:lnRef>
+            <a:fillRef idx="0">
+              <a:schemeClr val="accent1"/>
+            </a:fillRef>
+            <a:effectRef idx="0">
               <a:schemeClr val="accent1"/>
             </a:effectRef>
             <a:fontRef idx="minor">
@@ -4579,15 +4603,16 @@
                 <a:srgbClr val="8FBFBF"/>
               </a:solidFill>
             </a:ln>
-          </p:spPr>
-          <p:style>
-            <a:lnRef idx="2">
-              <a:schemeClr val="accent1"/>
-            </a:lnRef>
-            <a:fillRef idx="0">
-              <a:schemeClr val="accent1"/>
-            </a:fillRef>
-            <a:effectRef idx="1">
+            <a:effectLst/>
+          </p:spPr>
+          <p:style>
+            <a:lnRef idx="2">
+              <a:schemeClr val="accent1"/>
+            </a:lnRef>
+            <a:fillRef idx="0">
+              <a:schemeClr val="accent1"/>
+            </a:fillRef>
+            <a:effectRef idx="0">
               <a:schemeClr val="accent1"/>
             </a:effectRef>
             <a:fontRef idx="minor">
@@ -4614,15 +4639,16 @@
                 <a:srgbClr val="8FBFBF"/>
               </a:solidFill>
             </a:ln>
-          </p:spPr>
-          <p:style>
-            <a:lnRef idx="2">
-              <a:schemeClr val="accent1"/>
-            </a:lnRef>
-            <a:fillRef idx="0">
-              <a:schemeClr val="accent1"/>
-            </a:fillRef>
-            <a:effectRef idx="1">
+            <a:effectLst/>
+          </p:spPr>
+          <p:style>
+            <a:lnRef idx="2">
+              <a:schemeClr val="accent1"/>
+            </a:lnRef>
+            <a:fillRef idx="0">
+              <a:schemeClr val="accent1"/>
+            </a:fillRef>
+            <a:effectRef idx="0">
               <a:schemeClr val="accent1"/>
             </a:effectRef>
             <a:fontRef idx="minor">
@@ -4649,15 +4675,16 @@
                 <a:srgbClr val="8FBFBF"/>
               </a:solidFill>
             </a:ln>
-          </p:spPr>
-          <p:style>
-            <a:lnRef idx="2">
-              <a:schemeClr val="accent1"/>
-            </a:lnRef>
-            <a:fillRef idx="0">
-              <a:schemeClr val="accent1"/>
-            </a:fillRef>
-            <a:effectRef idx="1">
+            <a:effectLst/>
+          </p:spPr>
+          <p:style>
+            <a:lnRef idx="2">
+              <a:schemeClr val="accent1"/>
+            </a:lnRef>
+            <a:fillRef idx="0">
+              <a:schemeClr val="accent1"/>
+            </a:fillRef>
+            <a:effectRef idx="0">
               <a:schemeClr val="accent1"/>
             </a:effectRef>
             <a:fontRef idx="minor">
@@ -4684,15 +4711,16 @@
                 <a:srgbClr val="8FBFBF"/>
               </a:solidFill>
             </a:ln>
-          </p:spPr>
-          <p:style>
-            <a:lnRef idx="2">
-              <a:schemeClr val="accent1"/>
-            </a:lnRef>
-            <a:fillRef idx="0">
-              <a:schemeClr val="accent1"/>
-            </a:fillRef>
-            <a:effectRef idx="1">
+            <a:effectLst/>
+          </p:spPr>
+          <p:style>
+            <a:lnRef idx="2">
+              <a:schemeClr val="accent1"/>
+            </a:lnRef>
+            <a:fillRef idx="0">
+              <a:schemeClr val="accent1"/>
+            </a:fillRef>
+            <a:effectRef idx="0">
               <a:schemeClr val="accent1"/>
             </a:effectRef>
             <a:fontRef idx="minor">
@@ -4719,15 +4747,16 @@
                 <a:srgbClr val="8FBFBF"/>
               </a:solidFill>
             </a:ln>
-          </p:spPr>
-          <p:style>
-            <a:lnRef idx="2">
-              <a:schemeClr val="accent1"/>
-            </a:lnRef>
-            <a:fillRef idx="0">
-              <a:schemeClr val="accent1"/>
-            </a:fillRef>
-            <a:effectRef idx="1">
+            <a:effectLst/>
+          </p:spPr>
+          <p:style>
+            <a:lnRef idx="2">
+              <a:schemeClr val="accent1"/>
+            </a:lnRef>
+            <a:fillRef idx="0">
+              <a:schemeClr val="accent1"/>
+            </a:fillRef>
+            <a:effectRef idx="0">
               <a:schemeClr val="accent1"/>
             </a:effectRef>
             <a:fontRef idx="minor">
@@ -4779,7 +4808,7 @@
             <a:fillRef idx="3">
               <a:schemeClr val="accent1"/>
             </a:fillRef>
-            <a:effectRef idx="2">
+            <a:effectRef idx="0">
               <a:schemeClr val="accent1"/>
             </a:effectRef>
             <a:fontRef idx="minor">
@@ -4813,15 +4842,16 @@
                 <a:srgbClr val="8FBFBF"/>
               </a:solidFill>
             </a:ln>
-          </p:spPr>
-          <p:style>
-            <a:lnRef idx="2">
-              <a:schemeClr val="accent1"/>
-            </a:lnRef>
-            <a:fillRef idx="0">
-              <a:schemeClr val="accent1"/>
-            </a:fillRef>
-            <a:effectRef idx="1">
+            <a:effectLst/>
+          </p:spPr>
+          <p:style>
+            <a:lnRef idx="2">
+              <a:schemeClr val="accent1"/>
+            </a:lnRef>
+            <a:fillRef idx="0">
+              <a:schemeClr val="accent1"/>
+            </a:fillRef>
+            <a:effectRef idx="0">
               <a:schemeClr val="accent1"/>
             </a:effectRef>
             <a:fontRef idx="minor">
@@ -4848,15 +4878,16 @@
                 <a:srgbClr val="8FBFBF"/>
               </a:solidFill>
             </a:ln>
-          </p:spPr>
-          <p:style>
-            <a:lnRef idx="2">
-              <a:schemeClr val="accent1"/>
-            </a:lnRef>
-            <a:fillRef idx="0">
-              <a:schemeClr val="accent1"/>
-            </a:fillRef>
-            <a:effectRef idx="1">
+            <a:effectLst/>
+          </p:spPr>
+          <p:style>
+            <a:lnRef idx="2">
+              <a:schemeClr val="accent1"/>
+            </a:lnRef>
+            <a:fillRef idx="0">
+              <a:schemeClr val="accent1"/>
+            </a:fillRef>
+            <a:effectRef idx="0">
               <a:schemeClr val="accent1"/>
             </a:effectRef>
             <a:fontRef idx="minor">
@@ -4883,15 +4914,16 @@
                 <a:srgbClr val="8FBFBF"/>
               </a:solidFill>
             </a:ln>
-          </p:spPr>
-          <p:style>
-            <a:lnRef idx="2">
-              <a:schemeClr val="accent1"/>
-            </a:lnRef>
-            <a:fillRef idx="0">
-              <a:schemeClr val="accent1"/>
-            </a:fillRef>
-            <a:effectRef idx="1">
+            <a:effectLst/>
+          </p:spPr>
+          <p:style>
+            <a:lnRef idx="2">
+              <a:schemeClr val="accent1"/>
+            </a:lnRef>
+            <a:fillRef idx="0">
+              <a:schemeClr val="accent1"/>
+            </a:fillRef>
+            <a:effectRef idx="0">
               <a:schemeClr val="accent1"/>
             </a:effectRef>
             <a:fontRef idx="minor">
@@ -4918,15 +4950,16 @@
                 <a:srgbClr val="8FBFBF"/>
               </a:solidFill>
             </a:ln>
-          </p:spPr>
-          <p:style>
-            <a:lnRef idx="2">
-              <a:schemeClr val="accent1"/>
-            </a:lnRef>
-            <a:fillRef idx="0">
-              <a:schemeClr val="accent1"/>
-            </a:fillRef>
-            <a:effectRef idx="1">
+            <a:effectLst/>
+          </p:spPr>
+          <p:style>
+            <a:lnRef idx="2">
+              <a:schemeClr val="accent1"/>
+            </a:lnRef>
+            <a:fillRef idx="0">
+              <a:schemeClr val="accent1"/>
+            </a:fillRef>
+            <a:effectRef idx="0">
               <a:schemeClr val="accent1"/>
             </a:effectRef>
             <a:fontRef idx="minor">
@@ -4953,15 +4986,16 @@
                 <a:srgbClr val="8FBFBF"/>
               </a:solidFill>
             </a:ln>
-          </p:spPr>
-          <p:style>
-            <a:lnRef idx="2">
-              <a:schemeClr val="accent1"/>
-            </a:lnRef>
-            <a:fillRef idx="0">
-              <a:schemeClr val="accent1"/>
-            </a:fillRef>
-            <a:effectRef idx="1">
+            <a:effectLst/>
+          </p:spPr>
+          <p:style>
+            <a:lnRef idx="2">
+              <a:schemeClr val="accent1"/>
+            </a:lnRef>
+            <a:fillRef idx="0">
+              <a:schemeClr val="accent1"/>
+            </a:fillRef>
+            <a:effectRef idx="0">
               <a:schemeClr val="accent1"/>
             </a:effectRef>
             <a:fontRef idx="minor">
@@ -4988,15 +5022,16 @@
                 <a:srgbClr val="8FBFBF"/>
               </a:solidFill>
             </a:ln>
-          </p:spPr>
-          <p:style>
-            <a:lnRef idx="2">
-              <a:schemeClr val="accent1"/>
-            </a:lnRef>
-            <a:fillRef idx="0">
-              <a:schemeClr val="accent1"/>
-            </a:fillRef>
-            <a:effectRef idx="1">
+            <a:effectLst/>
+          </p:spPr>
+          <p:style>
+            <a:lnRef idx="2">
+              <a:schemeClr val="accent1"/>
+            </a:lnRef>
+            <a:fillRef idx="0">
+              <a:schemeClr val="accent1"/>
+            </a:fillRef>
+            <a:effectRef idx="0">
               <a:schemeClr val="accent1"/>
             </a:effectRef>
             <a:fontRef idx="minor">
@@ -5023,15 +5058,16 @@
                 <a:srgbClr val="8FBFBF"/>
               </a:solidFill>
             </a:ln>
-          </p:spPr>
-          <p:style>
-            <a:lnRef idx="2">
-              <a:schemeClr val="accent1"/>
-            </a:lnRef>
-            <a:fillRef idx="0">
-              <a:schemeClr val="accent1"/>
-            </a:fillRef>
-            <a:effectRef idx="1">
+            <a:effectLst/>
+          </p:spPr>
+          <p:style>
+            <a:lnRef idx="2">
+              <a:schemeClr val="accent1"/>
+            </a:lnRef>
+            <a:fillRef idx="0">
+              <a:schemeClr val="accent1"/>
+            </a:fillRef>
+            <a:effectRef idx="0">
               <a:schemeClr val="accent1"/>
             </a:effectRef>
             <a:fontRef idx="minor">
@@ -5058,15 +5094,16 @@
                 <a:srgbClr val="8FBFBF"/>
               </a:solidFill>
             </a:ln>
-          </p:spPr>
-          <p:style>
-            <a:lnRef idx="2">
-              <a:schemeClr val="accent1"/>
-            </a:lnRef>
-            <a:fillRef idx="0">
-              <a:schemeClr val="accent1"/>
-            </a:fillRef>
-            <a:effectRef idx="1">
+            <a:effectLst/>
+          </p:spPr>
+          <p:style>
+            <a:lnRef idx="2">
+              <a:schemeClr val="accent1"/>
+            </a:lnRef>
+            <a:fillRef idx="0">
+              <a:schemeClr val="accent1"/>
+            </a:fillRef>
+            <a:effectRef idx="0">
               <a:schemeClr val="accent1"/>
             </a:effectRef>
             <a:fontRef idx="minor">
@@ -5093,15 +5130,16 @@
                 <a:srgbClr val="8FBFBF"/>
               </a:solidFill>
             </a:ln>
-          </p:spPr>
-          <p:style>
-            <a:lnRef idx="2">
-              <a:schemeClr val="accent1"/>
-            </a:lnRef>
-            <a:fillRef idx="0">
-              <a:schemeClr val="accent1"/>
-            </a:fillRef>
-            <a:effectRef idx="1">
+            <a:effectLst/>
+          </p:spPr>
+          <p:style>
+            <a:lnRef idx="2">
+              <a:schemeClr val="accent1"/>
+            </a:lnRef>
+            <a:fillRef idx="0">
+              <a:schemeClr val="accent1"/>
+            </a:fillRef>
+            <a:effectRef idx="0">
               <a:schemeClr val="accent1"/>
             </a:effectRef>
             <a:fontRef idx="minor">
@@ -5128,15 +5166,16 @@
                 <a:srgbClr val="8FBFBF"/>
               </a:solidFill>
             </a:ln>
-          </p:spPr>
-          <p:style>
-            <a:lnRef idx="2">
-              <a:schemeClr val="accent1"/>
-            </a:lnRef>
-            <a:fillRef idx="0">
-              <a:schemeClr val="accent1"/>
-            </a:fillRef>
-            <a:effectRef idx="1">
+            <a:effectLst/>
+          </p:spPr>
+          <p:style>
+            <a:lnRef idx="2">
+              <a:schemeClr val="accent1"/>
+            </a:lnRef>
+            <a:fillRef idx="0">
+              <a:schemeClr val="accent1"/>
+            </a:fillRef>
+            <a:effectRef idx="0">
               <a:schemeClr val="accent1"/>
             </a:effectRef>
             <a:fontRef idx="minor">
@@ -5163,15 +5202,16 @@
                 <a:srgbClr val="8FBFBF"/>
               </a:solidFill>
             </a:ln>
-          </p:spPr>
-          <p:style>
-            <a:lnRef idx="2">
-              <a:schemeClr val="accent1"/>
-            </a:lnRef>
-            <a:fillRef idx="0">
-              <a:schemeClr val="accent1"/>
-            </a:fillRef>
-            <a:effectRef idx="1">
+            <a:effectLst/>
+          </p:spPr>
+          <p:style>
+            <a:lnRef idx="2">
+              <a:schemeClr val="accent1"/>
+            </a:lnRef>
+            <a:fillRef idx="0">
+              <a:schemeClr val="accent1"/>
+            </a:fillRef>
+            <a:effectRef idx="0">
               <a:schemeClr val="accent1"/>
             </a:effectRef>
             <a:fontRef idx="minor">
@@ -5198,15 +5238,16 @@
                 <a:srgbClr val="8FBFBF"/>
               </a:solidFill>
             </a:ln>
-          </p:spPr>
-          <p:style>
-            <a:lnRef idx="2">
-              <a:schemeClr val="accent1"/>
-            </a:lnRef>
-            <a:fillRef idx="0">
-              <a:schemeClr val="accent1"/>
-            </a:fillRef>
-            <a:effectRef idx="1">
+            <a:effectLst/>
+          </p:spPr>
+          <p:style>
+            <a:lnRef idx="2">
+              <a:schemeClr val="accent1"/>
+            </a:lnRef>
+            <a:fillRef idx="0">
+              <a:schemeClr val="accent1"/>
+            </a:fillRef>
+            <a:effectRef idx="0">
               <a:schemeClr val="accent1"/>
             </a:effectRef>
             <a:fontRef idx="minor">
@@ -5233,15 +5274,16 @@
                 <a:srgbClr val="8FBFBF"/>
               </a:solidFill>
             </a:ln>
-          </p:spPr>
-          <p:style>
-            <a:lnRef idx="2">
-              <a:schemeClr val="accent1"/>
-            </a:lnRef>
-            <a:fillRef idx="0">
-              <a:schemeClr val="accent1"/>
-            </a:fillRef>
-            <a:effectRef idx="1">
+            <a:effectLst/>
+          </p:spPr>
+          <p:style>
+            <a:lnRef idx="2">
+              <a:schemeClr val="accent1"/>
+            </a:lnRef>
+            <a:fillRef idx="0">
+              <a:schemeClr val="accent1"/>
+            </a:fillRef>
+            <a:effectRef idx="0">
               <a:schemeClr val="accent1"/>
             </a:effectRef>
             <a:fontRef idx="minor">
@@ -5268,15 +5310,16 @@
                 <a:srgbClr val="8FBFBF"/>
               </a:solidFill>
             </a:ln>
-          </p:spPr>
-          <p:style>
-            <a:lnRef idx="2">
-              <a:schemeClr val="accent1"/>
-            </a:lnRef>
-            <a:fillRef idx="0">
-              <a:schemeClr val="accent1"/>
-            </a:fillRef>
-            <a:effectRef idx="1">
+            <a:effectLst/>
+          </p:spPr>
+          <p:style>
+            <a:lnRef idx="2">
+              <a:schemeClr val="accent1"/>
+            </a:lnRef>
+            <a:fillRef idx="0">
+              <a:schemeClr val="accent1"/>
+            </a:fillRef>
+            <a:effectRef idx="0">
               <a:schemeClr val="accent1"/>
             </a:effectRef>
             <a:fontRef idx="minor">
@@ -5328,7 +5371,7 @@
             <a:fillRef idx="3">
               <a:schemeClr val="accent1"/>
             </a:fillRef>
-            <a:effectRef idx="2">
+            <a:effectRef idx="0">
               <a:schemeClr val="accent1"/>
             </a:effectRef>
             <a:fontRef idx="minor">
@@ -5362,15 +5405,16 @@
                 <a:srgbClr val="8FBFBF"/>
               </a:solidFill>
             </a:ln>
-          </p:spPr>
-          <p:style>
-            <a:lnRef idx="2">
-              <a:schemeClr val="accent1"/>
-            </a:lnRef>
-            <a:fillRef idx="0">
-              <a:schemeClr val="accent1"/>
-            </a:fillRef>
-            <a:effectRef idx="1">
+            <a:effectLst/>
+          </p:spPr>
+          <p:style>
+            <a:lnRef idx="2">
+              <a:schemeClr val="accent1"/>
+            </a:lnRef>
+            <a:fillRef idx="0">
+              <a:schemeClr val="accent1"/>
+            </a:fillRef>
+            <a:effectRef idx="0">
               <a:schemeClr val="accent1"/>
             </a:effectRef>
             <a:fontRef idx="minor">
@@ -5397,15 +5441,16 @@
                 <a:srgbClr val="8FBFBF"/>
               </a:solidFill>
             </a:ln>
-          </p:spPr>
-          <p:style>
-            <a:lnRef idx="2">
-              <a:schemeClr val="accent1"/>
-            </a:lnRef>
-            <a:fillRef idx="0">
-              <a:schemeClr val="accent1"/>
-            </a:fillRef>
-            <a:effectRef idx="1">
+            <a:effectLst/>
+          </p:spPr>
+          <p:style>
+            <a:lnRef idx="2">
+              <a:schemeClr val="accent1"/>
+            </a:lnRef>
+            <a:fillRef idx="0">
+              <a:schemeClr val="accent1"/>
+            </a:fillRef>
+            <a:effectRef idx="0">
               <a:schemeClr val="accent1"/>
             </a:effectRef>
             <a:fontRef idx="minor">
@@ -5432,15 +5477,16 @@
                 <a:srgbClr val="8FBFBF"/>
               </a:solidFill>
             </a:ln>
-          </p:spPr>
-          <p:style>
-            <a:lnRef idx="2">
-              <a:schemeClr val="accent1"/>
-            </a:lnRef>
-            <a:fillRef idx="0">
-              <a:schemeClr val="accent1"/>
-            </a:fillRef>
-            <a:effectRef idx="1">
+            <a:effectLst/>
+          </p:spPr>
+          <p:style>
+            <a:lnRef idx="2">
+              <a:schemeClr val="accent1"/>
+            </a:lnRef>
+            <a:fillRef idx="0">
+              <a:schemeClr val="accent1"/>
+            </a:fillRef>
+            <a:effectRef idx="0">
               <a:schemeClr val="accent1"/>
             </a:effectRef>
             <a:fontRef idx="minor">
@@ -5467,15 +5513,16 @@
                 <a:srgbClr val="8FBFBF"/>
               </a:solidFill>
             </a:ln>
-          </p:spPr>
-          <p:style>
-            <a:lnRef idx="2">
-              <a:schemeClr val="accent1"/>
-            </a:lnRef>
-            <a:fillRef idx="0">
-              <a:schemeClr val="accent1"/>
-            </a:fillRef>
-            <a:effectRef idx="1">
+            <a:effectLst/>
+          </p:spPr>
+          <p:style>
+            <a:lnRef idx="2">
+              <a:schemeClr val="accent1"/>
+            </a:lnRef>
+            <a:fillRef idx="0">
+              <a:schemeClr val="accent1"/>
+            </a:fillRef>
+            <a:effectRef idx="0">
               <a:schemeClr val="accent1"/>
             </a:effectRef>
             <a:fontRef idx="minor">
@@ -5502,15 +5549,16 @@
                 <a:srgbClr val="8FBFBF"/>
               </a:solidFill>
             </a:ln>
-          </p:spPr>
-          <p:style>
-            <a:lnRef idx="2">
-              <a:schemeClr val="accent1"/>
-            </a:lnRef>
-            <a:fillRef idx="0">
-              <a:schemeClr val="accent1"/>
-            </a:fillRef>
-            <a:effectRef idx="1">
+            <a:effectLst/>
+          </p:spPr>
+          <p:style>
+            <a:lnRef idx="2">
+              <a:schemeClr val="accent1"/>
+            </a:lnRef>
+            <a:fillRef idx="0">
+              <a:schemeClr val="accent1"/>
+            </a:fillRef>
+            <a:effectRef idx="0">
               <a:schemeClr val="accent1"/>
             </a:effectRef>
             <a:fontRef idx="minor">
@@ -5537,15 +5585,16 @@
                 <a:srgbClr val="8FBFBF"/>
               </a:solidFill>
             </a:ln>
-          </p:spPr>
-          <p:style>
-            <a:lnRef idx="2">
-              <a:schemeClr val="accent1"/>
-            </a:lnRef>
-            <a:fillRef idx="0">
-              <a:schemeClr val="accent1"/>
-            </a:fillRef>
-            <a:effectRef idx="1">
+            <a:effectLst/>
+          </p:spPr>
+          <p:style>
+            <a:lnRef idx="2">
+              <a:schemeClr val="accent1"/>
+            </a:lnRef>
+            <a:fillRef idx="0">
+              <a:schemeClr val="accent1"/>
+            </a:fillRef>
+            <a:effectRef idx="0">
               <a:schemeClr val="accent1"/>
             </a:effectRef>
             <a:fontRef idx="minor">
@@ -5572,15 +5621,16 @@
                 <a:srgbClr val="8FBFBF"/>
               </a:solidFill>
             </a:ln>
-          </p:spPr>
-          <p:style>
-            <a:lnRef idx="2">
-              <a:schemeClr val="accent1"/>
-            </a:lnRef>
-            <a:fillRef idx="0">
-              <a:schemeClr val="accent1"/>
-            </a:fillRef>
-            <a:effectRef idx="1">
+            <a:effectLst/>
+          </p:spPr>
+          <p:style>
+            <a:lnRef idx="2">
+              <a:schemeClr val="accent1"/>
+            </a:lnRef>
+            <a:fillRef idx="0">
+              <a:schemeClr val="accent1"/>
+            </a:fillRef>
+            <a:effectRef idx="0">
               <a:schemeClr val="accent1"/>
             </a:effectRef>
             <a:fontRef idx="minor">
@@ -5607,15 +5657,16 @@
                 <a:srgbClr val="8FBFBF"/>
               </a:solidFill>
             </a:ln>
-          </p:spPr>
-          <p:style>
-            <a:lnRef idx="2">
-              <a:schemeClr val="accent1"/>
-            </a:lnRef>
-            <a:fillRef idx="0">
-              <a:schemeClr val="accent1"/>
-            </a:fillRef>
-            <a:effectRef idx="1">
+            <a:effectLst/>
+          </p:spPr>
+          <p:style>
+            <a:lnRef idx="2">
+              <a:schemeClr val="accent1"/>
+            </a:lnRef>
+            <a:fillRef idx="0">
+              <a:schemeClr val="accent1"/>
+            </a:fillRef>
+            <a:effectRef idx="0">
               <a:schemeClr val="accent1"/>
             </a:effectRef>
             <a:fontRef idx="minor">
@@ -5642,15 +5693,16 @@
                 <a:srgbClr val="8FBFBF"/>
               </a:solidFill>
             </a:ln>
-          </p:spPr>
-          <p:style>
-            <a:lnRef idx="2">
-              <a:schemeClr val="accent1"/>
-            </a:lnRef>
-            <a:fillRef idx="0">
-              <a:schemeClr val="accent1"/>
-            </a:fillRef>
-            <a:effectRef idx="1">
+            <a:effectLst/>
+          </p:spPr>
+          <p:style>
+            <a:lnRef idx="2">
+              <a:schemeClr val="accent1"/>
+            </a:lnRef>
+            <a:fillRef idx="0">
+              <a:schemeClr val="accent1"/>
+            </a:fillRef>
+            <a:effectRef idx="0">
               <a:schemeClr val="accent1"/>
             </a:effectRef>
             <a:fontRef idx="minor">
@@ -5677,15 +5729,16 @@
                 <a:srgbClr val="8FBFBF"/>
               </a:solidFill>
             </a:ln>
-          </p:spPr>
-          <p:style>
-            <a:lnRef idx="2">
-              <a:schemeClr val="accent1"/>
-            </a:lnRef>
-            <a:fillRef idx="0">
-              <a:schemeClr val="accent1"/>
-            </a:fillRef>
-            <a:effectRef idx="1">
+            <a:effectLst/>
+          </p:spPr>
+          <p:style>
+            <a:lnRef idx="2">
+              <a:schemeClr val="accent1"/>
+            </a:lnRef>
+            <a:fillRef idx="0">
+              <a:schemeClr val="accent1"/>
+            </a:fillRef>
+            <a:effectRef idx="0">
               <a:schemeClr val="accent1"/>
             </a:effectRef>
             <a:fontRef idx="minor">
@@ -5712,15 +5765,16 @@
                 <a:srgbClr val="8FBFBF"/>
               </a:solidFill>
             </a:ln>
-          </p:spPr>
-          <p:style>
-            <a:lnRef idx="2">
-              <a:schemeClr val="accent1"/>
-            </a:lnRef>
-            <a:fillRef idx="0">
-              <a:schemeClr val="accent1"/>
-            </a:fillRef>
-            <a:effectRef idx="1">
+            <a:effectLst/>
+          </p:spPr>
+          <p:style>
+            <a:lnRef idx="2">
+              <a:schemeClr val="accent1"/>
+            </a:lnRef>
+            <a:fillRef idx="0">
+              <a:schemeClr val="accent1"/>
+            </a:fillRef>
+            <a:effectRef idx="0">
               <a:schemeClr val="accent1"/>
             </a:effectRef>
             <a:fontRef idx="minor">
@@ -5747,15 +5801,16 @@
                 <a:srgbClr val="8FBFBF"/>
               </a:solidFill>
             </a:ln>
-          </p:spPr>
-          <p:style>
-            <a:lnRef idx="2">
-              <a:schemeClr val="accent1"/>
-            </a:lnRef>
-            <a:fillRef idx="0">
-              <a:schemeClr val="accent1"/>
-            </a:fillRef>
-            <a:effectRef idx="1">
+            <a:effectLst/>
+          </p:spPr>
+          <p:style>
+            <a:lnRef idx="2">
+              <a:schemeClr val="accent1"/>
+            </a:lnRef>
+            <a:fillRef idx="0">
+              <a:schemeClr val="accent1"/>
+            </a:fillRef>
+            <a:effectRef idx="0">
               <a:schemeClr val="accent1"/>
             </a:effectRef>
             <a:fontRef idx="minor">
@@ -5782,15 +5837,16 @@
                 <a:srgbClr val="8FBFBF"/>
               </a:solidFill>
             </a:ln>
-          </p:spPr>
-          <p:style>
-            <a:lnRef idx="2">
-              <a:schemeClr val="accent1"/>
-            </a:lnRef>
-            <a:fillRef idx="0">
-              <a:schemeClr val="accent1"/>
-            </a:fillRef>
-            <a:effectRef idx="1">
+            <a:effectLst/>
+          </p:spPr>
+          <p:style>
+            <a:lnRef idx="2">
+              <a:schemeClr val="accent1"/>
+            </a:lnRef>
+            <a:fillRef idx="0">
+              <a:schemeClr val="accent1"/>
+            </a:fillRef>
+            <a:effectRef idx="0">
               <a:schemeClr val="accent1"/>
             </a:effectRef>
             <a:fontRef idx="minor">
@@ -5817,15 +5873,16 @@
                 <a:srgbClr val="8FBFBF"/>
               </a:solidFill>
             </a:ln>
-          </p:spPr>
-          <p:style>
-            <a:lnRef idx="2">
-              <a:schemeClr val="accent1"/>
-            </a:lnRef>
-            <a:fillRef idx="0">
-              <a:schemeClr val="accent1"/>
-            </a:fillRef>
-            <a:effectRef idx="1">
+            <a:effectLst/>
+          </p:spPr>
+          <p:style>
+            <a:lnRef idx="2">
+              <a:schemeClr val="accent1"/>
+            </a:lnRef>
+            <a:fillRef idx="0">
+              <a:schemeClr val="accent1"/>
+            </a:fillRef>
+            <a:effectRef idx="0">
               <a:schemeClr val="accent1"/>
             </a:effectRef>
             <a:fontRef idx="minor">
@@ -5877,7 +5934,7 @@
             <a:fillRef idx="3">
               <a:schemeClr val="accent1"/>
             </a:fillRef>
-            <a:effectRef idx="2">
+            <a:effectRef idx="0">
               <a:schemeClr val="accent1"/>
             </a:effectRef>
             <a:fontRef idx="minor">
@@ -5911,15 +5968,16 @@
                 <a:srgbClr val="8FBFBF"/>
               </a:solidFill>
             </a:ln>
-          </p:spPr>
-          <p:style>
-            <a:lnRef idx="2">
-              <a:schemeClr val="accent1"/>
-            </a:lnRef>
-            <a:fillRef idx="0">
-              <a:schemeClr val="accent1"/>
-            </a:fillRef>
-            <a:effectRef idx="1">
+            <a:effectLst/>
+          </p:spPr>
+          <p:style>
+            <a:lnRef idx="2">
+              <a:schemeClr val="accent1"/>
+            </a:lnRef>
+            <a:fillRef idx="0">
+              <a:schemeClr val="accent1"/>
+            </a:fillRef>
+            <a:effectRef idx="0">
               <a:schemeClr val="accent1"/>
             </a:effectRef>
             <a:fontRef idx="minor">
@@ -5946,15 +6004,16 @@
                 <a:srgbClr val="8FBFBF"/>
               </a:solidFill>
             </a:ln>
-          </p:spPr>
-          <p:style>
-            <a:lnRef idx="2">
-              <a:schemeClr val="accent1"/>
-            </a:lnRef>
-            <a:fillRef idx="0">
-              <a:schemeClr val="accent1"/>
-            </a:fillRef>
-            <a:effectRef idx="1">
+            <a:effectLst/>
+          </p:spPr>
+          <p:style>
+            <a:lnRef idx="2">
+              <a:schemeClr val="accent1"/>
+            </a:lnRef>
+            <a:fillRef idx="0">
+              <a:schemeClr val="accent1"/>
+            </a:fillRef>
+            <a:effectRef idx="0">
               <a:schemeClr val="accent1"/>
             </a:effectRef>
             <a:fontRef idx="minor">
@@ -5981,15 +6040,16 @@
                 <a:srgbClr val="8FBFBF"/>
               </a:solidFill>
             </a:ln>
-          </p:spPr>
-          <p:style>
-            <a:lnRef idx="2">
-              <a:schemeClr val="accent1"/>
-            </a:lnRef>
-            <a:fillRef idx="0">
-              <a:schemeClr val="accent1"/>
-            </a:fillRef>
-            <a:effectRef idx="1">
+            <a:effectLst/>
+          </p:spPr>
+          <p:style>
+            <a:lnRef idx="2">
+              <a:schemeClr val="accent1"/>
+            </a:lnRef>
+            <a:fillRef idx="0">
+              <a:schemeClr val="accent1"/>
+            </a:fillRef>
+            <a:effectRef idx="0">
               <a:schemeClr val="accent1"/>
             </a:effectRef>
             <a:fontRef idx="minor">
@@ -6016,15 +6076,16 @@
                 <a:srgbClr val="8FBFBF"/>
               </a:solidFill>
             </a:ln>
-          </p:spPr>
-          <p:style>
-            <a:lnRef idx="2">
-              <a:schemeClr val="accent1"/>
-            </a:lnRef>
-            <a:fillRef idx="0">
-              <a:schemeClr val="accent1"/>
-            </a:fillRef>
-            <a:effectRef idx="1">
+            <a:effectLst/>
+          </p:spPr>
+          <p:style>
+            <a:lnRef idx="2">
+              <a:schemeClr val="accent1"/>
+            </a:lnRef>
+            <a:fillRef idx="0">
+              <a:schemeClr val="accent1"/>
+            </a:fillRef>
+            <a:effectRef idx="0">
               <a:schemeClr val="accent1"/>
             </a:effectRef>
             <a:fontRef idx="minor">
@@ -6051,15 +6112,16 @@
                 <a:srgbClr val="8FBFBF"/>
               </a:solidFill>
             </a:ln>
-          </p:spPr>
-          <p:style>
-            <a:lnRef idx="2">
-              <a:schemeClr val="accent1"/>
-            </a:lnRef>
-            <a:fillRef idx="0">
-              <a:schemeClr val="accent1"/>
-            </a:fillRef>
-            <a:effectRef idx="1">
+            <a:effectLst/>
+          </p:spPr>
+          <p:style>
+            <a:lnRef idx="2">
+              <a:schemeClr val="accent1"/>
+            </a:lnRef>
+            <a:fillRef idx="0">
+              <a:schemeClr val="accent1"/>
+            </a:fillRef>
+            <a:effectRef idx="0">
               <a:schemeClr val="accent1"/>
             </a:effectRef>
             <a:fontRef idx="minor">
@@ -6086,15 +6148,16 @@
                 <a:srgbClr val="8FBFBF"/>
               </a:solidFill>
             </a:ln>
-          </p:spPr>
-          <p:style>
-            <a:lnRef idx="2">
-              <a:schemeClr val="accent1"/>
-            </a:lnRef>
-            <a:fillRef idx="0">
-              <a:schemeClr val="accent1"/>
-            </a:fillRef>
-            <a:effectRef idx="1">
+            <a:effectLst/>
+          </p:spPr>
+          <p:style>
+            <a:lnRef idx="2">
+              <a:schemeClr val="accent1"/>
+            </a:lnRef>
+            <a:fillRef idx="0">
+              <a:schemeClr val="accent1"/>
+            </a:fillRef>
+            <a:effectRef idx="0">
               <a:schemeClr val="accent1"/>
             </a:effectRef>
             <a:fontRef idx="minor">
@@ -6121,15 +6184,16 @@
                 <a:srgbClr val="8FBFBF"/>
               </a:solidFill>
             </a:ln>
-          </p:spPr>
-          <p:style>
-            <a:lnRef idx="2">
-              <a:schemeClr val="accent1"/>
-            </a:lnRef>
-            <a:fillRef idx="0">
-              <a:schemeClr val="accent1"/>
-            </a:fillRef>
-            <a:effectRef idx="1">
+            <a:effectLst/>
+          </p:spPr>
+          <p:style>
+            <a:lnRef idx="2">
+              <a:schemeClr val="accent1"/>
+            </a:lnRef>
+            <a:fillRef idx="0">
+              <a:schemeClr val="accent1"/>
+            </a:fillRef>
+            <a:effectRef idx="0">
               <a:schemeClr val="accent1"/>
             </a:effectRef>
             <a:fontRef idx="minor">
@@ -6156,15 +6220,16 @@
                 <a:srgbClr val="8FBFBF"/>
               </a:solidFill>
             </a:ln>
-          </p:spPr>
-          <p:style>
-            <a:lnRef idx="2">
-              <a:schemeClr val="accent1"/>
-            </a:lnRef>
-            <a:fillRef idx="0">
-              <a:schemeClr val="accent1"/>
-            </a:fillRef>
-            <a:effectRef idx="1">
+            <a:effectLst/>
+          </p:spPr>
+          <p:style>
+            <a:lnRef idx="2">
+              <a:schemeClr val="accent1"/>
+            </a:lnRef>
+            <a:fillRef idx="0">
+              <a:schemeClr val="accent1"/>
+            </a:fillRef>
+            <a:effectRef idx="0">
               <a:schemeClr val="accent1"/>
             </a:effectRef>
             <a:fontRef idx="minor">
@@ -6191,15 +6256,16 @@
                 <a:srgbClr val="8FBFBF"/>
               </a:solidFill>
             </a:ln>
-          </p:spPr>
-          <p:style>
-            <a:lnRef idx="2">
-              <a:schemeClr val="accent1"/>
-            </a:lnRef>
-            <a:fillRef idx="0">
-              <a:schemeClr val="accent1"/>
-            </a:fillRef>
-            <a:effectRef idx="1">
+            <a:effectLst/>
+          </p:spPr>
+          <p:style>
+            <a:lnRef idx="2">
+              <a:schemeClr val="accent1"/>
+            </a:lnRef>
+            <a:fillRef idx="0">
+              <a:schemeClr val="accent1"/>
+            </a:fillRef>
+            <a:effectRef idx="0">
               <a:schemeClr val="accent1"/>
             </a:effectRef>
             <a:fontRef idx="minor">
@@ -6226,15 +6292,16 @@
                 <a:srgbClr val="8FBFBF"/>
               </a:solidFill>
             </a:ln>
-          </p:spPr>
-          <p:style>
-            <a:lnRef idx="2">
-              <a:schemeClr val="accent1"/>
-            </a:lnRef>
-            <a:fillRef idx="0">
-              <a:schemeClr val="accent1"/>
-            </a:fillRef>
-            <a:effectRef idx="1">
+            <a:effectLst/>
+          </p:spPr>
+          <p:style>
+            <a:lnRef idx="2">
+              <a:schemeClr val="accent1"/>
+            </a:lnRef>
+            <a:fillRef idx="0">
+              <a:schemeClr val="accent1"/>
+            </a:fillRef>
+            <a:effectRef idx="0">
               <a:schemeClr val="accent1"/>
             </a:effectRef>
             <a:fontRef idx="minor">
@@ -6261,15 +6328,16 @@
                 <a:srgbClr val="8FBFBF"/>
               </a:solidFill>
             </a:ln>
-          </p:spPr>
-          <p:style>
-            <a:lnRef idx="2">
-              <a:schemeClr val="accent1"/>
-            </a:lnRef>
-            <a:fillRef idx="0">
-              <a:schemeClr val="accent1"/>
-            </a:fillRef>
-            <a:effectRef idx="1">
+            <a:effectLst/>
+          </p:spPr>
+          <p:style>
+            <a:lnRef idx="2">
+              <a:schemeClr val="accent1"/>
+            </a:lnRef>
+            <a:fillRef idx="0">
+              <a:schemeClr val="accent1"/>
+            </a:fillRef>
+            <a:effectRef idx="0">
               <a:schemeClr val="accent1"/>
             </a:effectRef>
             <a:fontRef idx="minor">
@@ -6296,15 +6364,16 @@
                 <a:srgbClr val="8FBFBF"/>
               </a:solidFill>
             </a:ln>
-          </p:spPr>
-          <p:style>
-            <a:lnRef idx="2">
-              <a:schemeClr val="accent1"/>
-            </a:lnRef>
-            <a:fillRef idx="0">
-              <a:schemeClr val="accent1"/>
-            </a:fillRef>
-            <a:effectRef idx="1">
+            <a:effectLst/>
+          </p:spPr>
+          <p:style>
+            <a:lnRef idx="2">
+              <a:schemeClr val="accent1"/>
+            </a:lnRef>
+            <a:fillRef idx="0">
+              <a:schemeClr val="accent1"/>
+            </a:fillRef>
+            <a:effectRef idx="0">
               <a:schemeClr val="accent1"/>
             </a:effectRef>
             <a:fontRef idx="minor">
@@ -6331,15 +6400,16 @@
                 <a:srgbClr val="8FBFBF"/>
               </a:solidFill>
             </a:ln>
-          </p:spPr>
-          <p:style>
-            <a:lnRef idx="2">
-              <a:schemeClr val="accent1"/>
-            </a:lnRef>
-            <a:fillRef idx="0">
-              <a:schemeClr val="accent1"/>
-            </a:fillRef>
-            <a:effectRef idx="1">
+            <a:effectLst/>
+          </p:spPr>
+          <p:style>
+            <a:lnRef idx="2">
+              <a:schemeClr val="accent1"/>
+            </a:lnRef>
+            <a:fillRef idx="0">
+              <a:schemeClr val="accent1"/>
+            </a:fillRef>
+            <a:effectRef idx="0">
               <a:schemeClr val="accent1"/>
             </a:effectRef>
             <a:fontRef idx="minor">
@@ -6366,15 +6436,16 @@
                 <a:srgbClr val="8FBFBF"/>
               </a:solidFill>
             </a:ln>
-          </p:spPr>
-          <p:style>
-            <a:lnRef idx="2">
-              <a:schemeClr val="accent1"/>
-            </a:lnRef>
-            <a:fillRef idx="0">
-              <a:schemeClr val="accent1"/>
-            </a:fillRef>
-            <a:effectRef idx="1">
+            <a:effectLst/>
+          </p:spPr>
+          <p:style>
+            <a:lnRef idx="2">
+              <a:schemeClr val="accent1"/>
+            </a:lnRef>
+            <a:fillRef idx="0">
+              <a:schemeClr val="accent1"/>
+            </a:fillRef>
+            <a:effectRef idx="0">
               <a:schemeClr val="accent1"/>
             </a:effectRef>
             <a:fontRef idx="minor">
@@ -6426,7 +6497,7 @@
             <a:fillRef idx="3">
               <a:schemeClr val="accent1"/>
             </a:fillRef>
-            <a:effectRef idx="2">
+            <a:effectRef idx="0">
               <a:schemeClr val="accent1"/>
             </a:effectRef>
             <a:fontRef idx="minor">
@@ -6460,15 +6531,16 @@
                 <a:srgbClr val="8FBFBF"/>
               </a:solidFill>
             </a:ln>
-          </p:spPr>
-          <p:style>
-            <a:lnRef idx="2">
-              <a:schemeClr val="accent1"/>
-            </a:lnRef>
-            <a:fillRef idx="0">
-              <a:schemeClr val="accent1"/>
-            </a:fillRef>
-            <a:effectRef idx="1">
+            <a:effectLst/>
+          </p:spPr>
+          <p:style>
+            <a:lnRef idx="2">
+              <a:schemeClr val="accent1"/>
+            </a:lnRef>
+            <a:fillRef idx="0">
+              <a:schemeClr val="accent1"/>
+            </a:fillRef>
+            <a:effectRef idx="0">
               <a:schemeClr val="accent1"/>
             </a:effectRef>
             <a:fontRef idx="minor">
@@ -6495,15 +6567,16 @@
                 <a:srgbClr val="8FBFBF"/>
               </a:solidFill>
             </a:ln>
-          </p:spPr>
-          <p:style>
-            <a:lnRef idx="2">
-              <a:schemeClr val="accent1"/>
-            </a:lnRef>
-            <a:fillRef idx="0">
-              <a:schemeClr val="accent1"/>
-            </a:fillRef>
-            <a:effectRef idx="1">
+            <a:effectLst/>
+          </p:spPr>
+          <p:style>
+            <a:lnRef idx="2">
+              <a:schemeClr val="accent1"/>
+            </a:lnRef>
+            <a:fillRef idx="0">
+              <a:schemeClr val="accent1"/>
+            </a:fillRef>
+            <a:effectRef idx="0">
               <a:schemeClr val="accent1"/>
             </a:effectRef>
             <a:fontRef idx="minor">
@@ -6530,15 +6603,16 @@
                 <a:srgbClr val="8FBFBF"/>
               </a:solidFill>
             </a:ln>
-          </p:spPr>
-          <p:style>
-            <a:lnRef idx="2">
-              <a:schemeClr val="accent1"/>
-            </a:lnRef>
-            <a:fillRef idx="0">
-              <a:schemeClr val="accent1"/>
-            </a:fillRef>
-            <a:effectRef idx="1">
+            <a:effectLst/>
+          </p:spPr>
+          <p:style>
+            <a:lnRef idx="2">
+              <a:schemeClr val="accent1"/>
+            </a:lnRef>
+            <a:fillRef idx="0">
+              <a:schemeClr val="accent1"/>
+            </a:fillRef>
+            <a:effectRef idx="0">
               <a:schemeClr val="accent1"/>
             </a:effectRef>
             <a:fontRef idx="minor">
@@ -6565,15 +6639,16 @@
                 <a:srgbClr val="8FBFBF"/>
               </a:solidFill>
             </a:ln>
-          </p:spPr>
-          <p:style>
-            <a:lnRef idx="2">
-              <a:schemeClr val="accent1"/>
-            </a:lnRef>
-            <a:fillRef idx="0">
-              <a:schemeClr val="accent1"/>
-            </a:fillRef>
-            <a:effectRef idx="1">
+            <a:effectLst/>
+          </p:spPr>
+          <p:style>
+            <a:lnRef idx="2">
+              <a:schemeClr val="accent1"/>
+            </a:lnRef>
+            <a:fillRef idx="0">
+              <a:schemeClr val="accent1"/>
+            </a:fillRef>
+            <a:effectRef idx="0">
               <a:schemeClr val="accent1"/>
             </a:effectRef>
             <a:fontRef idx="minor">
@@ -6600,15 +6675,16 @@
                 <a:srgbClr val="8FBFBF"/>
               </a:solidFill>
             </a:ln>
-          </p:spPr>
-          <p:style>
-            <a:lnRef idx="2">
-              <a:schemeClr val="accent1"/>
-            </a:lnRef>
-            <a:fillRef idx="0">
-              <a:schemeClr val="accent1"/>
-            </a:fillRef>
-            <a:effectRef idx="1">
+            <a:effectLst/>
+          </p:spPr>
+          <p:style>
+            <a:lnRef idx="2">
+              <a:schemeClr val="accent1"/>
+            </a:lnRef>
+            <a:fillRef idx="0">
+              <a:schemeClr val="accent1"/>
+            </a:fillRef>
+            <a:effectRef idx="0">
               <a:schemeClr val="accent1"/>
             </a:effectRef>
             <a:fontRef idx="minor">
@@ -6635,15 +6711,16 @@
                 <a:srgbClr val="8FBFBF"/>
               </a:solidFill>
             </a:ln>
-          </p:spPr>
-          <p:style>
-            <a:lnRef idx="2">
-              <a:schemeClr val="accent1"/>
-            </a:lnRef>
-            <a:fillRef idx="0">
-              <a:schemeClr val="accent1"/>
-            </a:fillRef>
-            <a:effectRef idx="1">
+            <a:effectLst/>
+          </p:spPr>
+          <p:style>
+            <a:lnRef idx="2">
+              <a:schemeClr val="accent1"/>
+            </a:lnRef>
+            <a:fillRef idx="0">
+              <a:schemeClr val="accent1"/>
+            </a:fillRef>
+            <a:effectRef idx="0">
               <a:schemeClr val="accent1"/>
             </a:effectRef>
             <a:fontRef idx="minor">
@@ -6670,15 +6747,16 @@
                 <a:srgbClr val="8FBFBF"/>
               </a:solidFill>
             </a:ln>
-          </p:spPr>
-          <p:style>
-            <a:lnRef idx="2">
-              <a:schemeClr val="accent1"/>
-            </a:lnRef>
-            <a:fillRef idx="0">
-              <a:schemeClr val="accent1"/>
-            </a:fillRef>
-            <a:effectRef idx="1">
+            <a:effectLst/>
+          </p:spPr>
+          <p:style>
+            <a:lnRef idx="2">
+              <a:schemeClr val="accent1"/>
+            </a:lnRef>
+            <a:fillRef idx="0">
+              <a:schemeClr val="accent1"/>
+            </a:fillRef>
+            <a:effectRef idx="0">
               <a:schemeClr val="accent1"/>
             </a:effectRef>
             <a:fontRef idx="minor">
@@ -6705,15 +6783,16 @@
                 <a:srgbClr val="8FBFBF"/>
               </a:solidFill>
             </a:ln>
-          </p:spPr>
-          <p:style>
-            <a:lnRef idx="2">
-              <a:schemeClr val="accent1"/>
-            </a:lnRef>
-            <a:fillRef idx="0">
-              <a:schemeClr val="accent1"/>
-            </a:fillRef>
-            <a:effectRef idx="1">
+            <a:effectLst/>
+          </p:spPr>
+          <p:style>
+            <a:lnRef idx="2">
+              <a:schemeClr val="accent1"/>
+            </a:lnRef>
+            <a:fillRef idx="0">
+              <a:schemeClr val="accent1"/>
+            </a:fillRef>
+            <a:effectRef idx="0">
               <a:schemeClr val="accent1"/>
             </a:effectRef>
             <a:fontRef idx="minor">
@@ -6740,15 +6819,16 @@
                 <a:srgbClr val="8FBFBF"/>
               </a:solidFill>
             </a:ln>
-          </p:spPr>
-          <p:style>
-            <a:lnRef idx="2">
-              <a:schemeClr val="accent1"/>
-            </a:lnRef>
-            <a:fillRef idx="0">
-              <a:schemeClr val="accent1"/>
-            </a:fillRef>
-            <a:effectRef idx="1">
+            <a:effectLst/>
+          </p:spPr>
+          <p:style>
+            <a:lnRef idx="2">
+              <a:schemeClr val="accent1"/>
+            </a:lnRef>
+            <a:fillRef idx="0">
+              <a:schemeClr val="accent1"/>
+            </a:fillRef>
+            <a:effectRef idx="0">
               <a:schemeClr val="accent1"/>
             </a:effectRef>
             <a:fontRef idx="minor">
@@ -6775,15 +6855,16 @@
                 <a:srgbClr val="8FBFBF"/>
               </a:solidFill>
             </a:ln>
-          </p:spPr>
-          <p:style>
-            <a:lnRef idx="2">
-              <a:schemeClr val="accent1"/>
-            </a:lnRef>
-            <a:fillRef idx="0">
-              <a:schemeClr val="accent1"/>
-            </a:fillRef>
-            <a:effectRef idx="1">
+            <a:effectLst/>
+          </p:spPr>
+          <p:style>
+            <a:lnRef idx="2">
+              <a:schemeClr val="accent1"/>
+            </a:lnRef>
+            <a:fillRef idx="0">
+              <a:schemeClr val="accent1"/>
+            </a:fillRef>
+            <a:effectRef idx="0">
               <a:schemeClr val="accent1"/>
             </a:effectRef>
             <a:fontRef idx="minor">
@@ -6810,15 +6891,16 @@
                 <a:srgbClr val="8FBFBF"/>
               </a:solidFill>
             </a:ln>
-          </p:spPr>
-          <p:style>
-            <a:lnRef idx="2">
-              <a:schemeClr val="accent1"/>
-            </a:lnRef>
-            <a:fillRef idx="0">
-              <a:schemeClr val="accent1"/>
-            </a:fillRef>
-            <a:effectRef idx="1">
+            <a:effectLst/>
+          </p:spPr>
+          <p:style>
+            <a:lnRef idx="2">
+              <a:schemeClr val="accent1"/>
+            </a:lnRef>
+            <a:fillRef idx="0">
+              <a:schemeClr val="accent1"/>
+            </a:fillRef>
+            <a:effectRef idx="0">
               <a:schemeClr val="accent1"/>
             </a:effectRef>
             <a:fontRef idx="minor">
@@ -6845,15 +6927,16 @@
                 <a:srgbClr val="8FBFBF"/>
               </a:solidFill>
             </a:ln>
-          </p:spPr>
-          <p:style>
-            <a:lnRef idx="2">
-              <a:schemeClr val="accent1"/>
-            </a:lnRef>
-            <a:fillRef idx="0">
-              <a:schemeClr val="accent1"/>
-            </a:fillRef>
-            <a:effectRef idx="1">
+            <a:effectLst/>
+          </p:spPr>
+          <p:style>
+            <a:lnRef idx="2">
+              <a:schemeClr val="accent1"/>
+            </a:lnRef>
+            <a:fillRef idx="0">
+              <a:schemeClr val="accent1"/>
+            </a:fillRef>
+            <a:effectRef idx="0">
               <a:schemeClr val="accent1"/>
             </a:effectRef>
             <a:fontRef idx="minor">
@@ -6880,15 +6963,16 @@
                 <a:srgbClr val="8FBFBF"/>
               </a:solidFill>
             </a:ln>
-          </p:spPr>
-          <p:style>
-            <a:lnRef idx="2">
-              <a:schemeClr val="accent1"/>
-            </a:lnRef>
-            <a:fillRef idx="0">
-              <a:schemeClr val="accent1"/>
-            </a:fillRef>
-            <a:effectRef idx="1">
+            <a:effectLst/>
+          </p:spPr>
+          <p:style>
+            <a:lnRef idx="2">
+              <a:schemeClr val="accent1"/>
+            </a:lnRef>
+            <a:fillRef idx="0">
+              <a:schemeClr val="accent1"/>
+            </a:fillRef>
+            <a:effectRef idx="0">
               <a:schemeClr val="accent1"/>
             </a:effectRef>
             <a:fontRef idx="minor">
@@ -6915,15 +6999,16 @@
                 <a:srgbClr val="8FBFBF"/>
               </a:solidFill>
             </a:ln>
-          </p:spPr>
-          <p:style>
-            <a:lnRef idx="2">
-              <a:schemeClr val="accent1"/>
-            </a:lnRef>
-            <a:fillRef idx="0">
-              <a:schemeClr val="accent1"/>
-            </a:fillRef>
-            <a:effectRef idx="1">
+            <a:effectLst/>
+          </p:spPr>
+          <p:style>
+            <a:lnRef idx="2">
+              <a:schemeClr val="accent1"/>
+            </a:lnRef>
+            <a:fillRef idx="0">
+              <a:schemeClr val="accent1"/>
+            </a:fillRef>
+            <a:effectRef idx="0">
               <a:schemeClr val="accent1"/>
             </a:effectRef>
             <a:fontRef idx="minor">
@@ -6975,7 +7060,7 @@
             <a:fillRef idx="3">
               <a:schemeClr val="accent1"/>
             </a:fillRef>
-            <a:effectRef idx="2">
+            <a:effectRef idx="0">
               <a:schemeClr val="accent1"/>
             </a:effectRef>
             <a:fontRef idx="minor">
@@ -7009,15 +7094,16 @@
                 <a:srgbClr val="8FBFBF"/>
               </a:solidFill>
             </a:ln>
-          </p:spPr>
-          <p:style>
-            <a:lnRef idx="2">
-              <a:schemeClr val="accent1"/>
-            </a:lnRef>
-            <a:fillRef idx="0">
-              <a:schemeClr val="accent1"/>
-            </a:fillRef>
-            <a:effectRef idx="1">
+            <a:effectLst/>
+          </p:spPr>
+          <p:style>
+            <a:lnRef idx="2">
+              <a:schemeClr val="accent1"/>
+            </a:lnRef>
+            <a:fillRef idx="0">
+              <a:schemeClr val="accent1"/>
+            </a:fillRef>
+            <a:effectRef idx="0">
               <a:schemeClr val="accent1"/>
             </a:effectRef>
             <a:fontRef idx="minor">
@@ -7044,15 +7130,16 @@
                 <a:srgbClr val="8FBFBF"/>
               </a:solidFill>
             </a:ln>
-          </p:spPr>
-          <p:style>
-            <a:lnRef idx="2">
-              <a:schemeClr val="accent1"/>
-            </a:lnRef>
-            <a:fillRef idx="0">
-              <a:schemeClr val="accent1"/>
-            </a:fillRef>
-            <a:effectRef idx="1">
+            <a:effectLst/>
+          </p:spPr>
+          <p:style>
+            <a:lnRef idx="2">
+              <a:schemeClr val="accent1"/>
+            </a:lnRef>
+            <a:fillRef idx="0">
+              <a:schemeClr val="accent1"/>
+            </a:fillRef>
+            <a:effectRef idx="0">
               <a:schemeClr val="accent1"/>
             </a:effectRef>
             <a:fontRef idx="minor">
@@ -7079,15 +7166,16 @@
                 <a:srgbClr val="8FBFBF"/>
               </a:solidFill>
             </a:ln>
-          </p:spPr>
-          <p:style>
-            <a:lnRef idx="2">
-              <a:schemeClr val="accent1"/>
-            </a:lnRef>
-            <a:fillRef idx="0">
-              <a:schemeClr val="accent1"/>
-            </a:fillRef>
-            <a:effectRef idx="1">
+            <a:effectLst/>
+          </p:spPr>
+          <p:style>
+            <a:lnRef idx="2">
+              <a:schemeClr val="accent1"/>
+            </a:lnRef>
+            <a:fillRef idx="0">
+              <a:schemeClr val="accent1"/>
+            </a:fillRef>
+            <a:effectRef idx="0">
               <a:schemeClr val="accent1"/>
             </a:effectRef>
             <a:fontRef idx="minor">
@@ -7114,15 +7202,16 @@
                 <a:srgbClr val="8FBFBF"/>
               </a:solidFill>
             </a:ln>
-          </p:spPr>
-          <p:style>
-            <a:lnRef idx="2">
-              <a:schemeClr val="accent1"/>
-            </a:lnRef>
-            <a:fillRef idx="0">
-              <a:schemeClr val="accent1"/>
-            </a:fillRef>
-            <a:effectRef idx="1">
+            <a:effectLst/>
+          </p:spPr>
+          <p:style>
+            <a:lnRef idx="2">
+              <a:schemeClr val="accent1"/>
+            </a:lnRef>
+            <a:fillRef idx="0">
+              <a:schemeClr val="accent1"/>
+            </a:fillRef>
+            <a:effectRef idx="0">
               <a:schemeClr val="accent1"/>
             </a:effectRef>
             <a:fontRef idx="minor">
@@ -7149,15 +7238,16 @@
                 <a:srgbClr val="8FBFBF"/>
               </a:solidFill>
             </a:ln>
-          </p:spPr>
-          <p:style>
-            <a:lnRef idx="2">
-              <a:schemeClr val="accent1"/>
-            </a:lnRef>
-            <a:fillRef idx="0">
-              <a:schemeClr val="accent1"/>
-            </a:fillRef>
-            <a:effectRef idx="1">
+            <a:effectLst/>
+          </p:spPr>
+          <p:style>
+            <a:lnRef idx="2">
+              <a:schemeClr val="accent1"/>
+            </a:lnRef>
+            <a:fillRef idx="0">
+              <a:schemeClr val="accent1"/>
+            </a:fillRef>
+            <a:effectRef idx="0">
               <a:schemeClr val="accent1"/>
             </a:effectRef>
             <a:fontRef idx="minor">
@@ -7184,15 +7274,16 @@
                 <a:srgbClr val="8FBFBF"/>
               </a:solidFill>
             </a:ln>
-          </p:spPr>
-          <p:style>
-            <a:lnRef idx="2">
-              <a:schemeClr val="accent1"/>
-            </a:lnRef>
-            <a:fillRef idx="0">
-              <a:schemeClr val="accent1"/>
-            </a:fillRef>
-            <a:effectRef idx="1">
+            <a:effectLst/>
+          </p:spPr>
+          <p:style>
+            <a:lnRef idx="2">
+              <a:schemeClr val="accent1"/>
+            </a:lnRef>
+            <a:fillRef idx="0">
+              <a:schemeClr val="accent1"/>
+            </a:fillRef>
+            <a:effectRef idx="0">
               <a:schemeClr val="accent1"/>
             </a:effectRef>
             <a:fontRef idx="minor">
@@ -7219,15 +7310,16 @@
                 <a:srgbClr val="8FBFBF"/>
               </a:solidFill>
             </a:ln>
-          </p:spPr>
-          <p:style>
-            <a:lnRef idx="2">
-              <a:schemeClr val="accent1"/>
-            </a:lnRef>
-            <a:fillRef idx="0">
-              <a:schemeClr val="accent1"/>
-            </a:fillRef>
-            <a:effectRef idx="1">
+            <a:effectLst/>
+          </p:spPr>
+          <p:style>
+            <a:lnRef idx="2">
+              <a:schemeClr val="accent1"/>
+            </a:lnRef>
+            <a:fillRef idx="0">
+              <a:schemeClr val="accent1"/>
+            </a:fillRef>
+            <a:effectRef idx="0">
               <a:schemeClr val="accent1"/>
             </a:effectRef>
             <a:fontRef idx="minor">
@@ -7254,15 +7346,16 @@
                 <a:srgbClr val="8FBFBF"/>
               </a:solidFill>
             </a:ln>
-          </p:spPr>
-          <p:style>
-            <a:lnRef idx="2">
-              <a:schemeClr val="accent1"/>
-            </a:lnRef>
-            <a:fillRef idx="0">
-              <a:schemeClr val="accent1"/>
-            </a:fillRef>
-            <a:effectRef idx="1">
+            <a:effectLst/>
+          </p:spPr>
+          <p:style>
+            <a:lnRef idx="2">
+              <a:schemeClr val="accent1"/>
+            </a:lnRef>
+            <a:fillRef idx="0">
+              <a:schemeClr val="accent1"/>
+            </a:fillRef>
+            <a:effectRef idx="0">
               <a:schemeClr val="accent1"/>
             </a:effectRef>
             <a:fontRef idx="minor">
@@ -7289,15 +7382,16 @@
                 <a:srgbClr val="8FBFBF"/>
               </a:solidFill>
             </a:ln>
-          </p:spPr>
-          <p:style>
-            <a:lnRef idx="2">
-              <a:schemeClr val="accent1"/>
-            </a:lnRef>
-            <a:fillRef idx="0">
-              <a:schemeClr val="accent1"/>
-            </a:fillRef>
-            <a:effectRef idx="1">
+            <a:effectLst/>
+          </p:spPr>
+          <p:style>
+            <a:lnRef idx="2">
+              <a:schemeClr val="accent1"/>
+            </a:lnRef>
+            <a:fillRef idx="0">
+              <a:schemeClr val="accent1"/>
+            </a:fillRef>
+            <a:effectRef idx="0">
               <a:schemeClr val="accent1"/>
             </a:effectRef>
             <a:fontRef idx="minor">
@@ -7324,15 +7418,16 @@
                 <a:srgbClr val="8FBFBF"/>
               </a:solidFill>
             </a:ln>
-          </p:spPr>
-          <p:style>
-            <a:lnRef idx="2">
-              <a:schemeClr val="accent1"/>
-            </a:lnRef>
-            <a:fillRef idx="0">
-              <a:schemeClr val="accent1"/>
-            </a:fillRef>
-            <a:effectRef idx="1">
+            <a:effectLst/>
+          </p:spPr>
+          <p:style>
+            <a:lnRef idx="2">
+              <a:schemeClr val="accent1"/>
+            </a:lnRef>
+            <a:fillRef idx="0">
+              <a:schemeClr val="accent1"/>
+            </a:fillRef>
+            <a:effectRef idx="0">
               <a:schemeClr val="accent1"/>
             </a:effectRef>
             <a:fontRef idx="minor">
@@ -7359,15 +7454,16 @@
                 <a:srgbClr val="8FBFBF"/>
               </a:solidFill>
             </a:ln>
-          </p:spPr>
-          <p:style>
-            <a:lnRef idx="2">
-              <a:schemeClr val="accent1"/>
-            </a:lnRef>
-            <a:fillRef idx="0">
-              <a:schemeClr val="accent1"/>
-            </a:fillRef>
-            <a:effectRef idx="1">
+            <a:effectLst/>
+          </p:spPr>
+          <p:style>
+            <a:lnRef idx="2">
+              <a:schemeClr val="accent1"/>
+            </a:lnRef>
+            <a:fillRef idx="0">
+              <a:schemeClr val="accent1"/>
+            </a:fillRef>
+            <a:effectRef idx="0">
               <a:schemeClr val="accent1"/>
             </a:effectRef>
             <a:fontRef idx="minor">
@@ -7394,15 +7490,16 @@
                 <a:srgbClr val="8FBFBF"/>
               </a:solidFill>
             </a:ln>
-          </p:spPr>
-          <p:style>
-            <a:lnRef idx="2">
-              <a:schemeClr val="accent1"/>
-            </a:lnRef>
-            <a:fillRef idx="0">
-              <a:schemeClr val="accent1"/>
-            </a:fillRef>
-            <a:effectRef idx="1">
+            <a:effectLst/>
+          </p:spPr>
+          <p:style>
+            <a:lnRef idx="2">
+              <a:schemeClr val="accent1"/>
+            </a:lnRef>
+            <a:fillRef idx="0">
+              <a:schemeClr val="accent1"/>
+            </a:fillRef>
+            <a:effectRef idx="0">
               <a:schemeClr val="accent1"/>
             </a:effectRef>
             <a:fontRef idx="minor">
@@ -7429,15 +7526,16 @@
                 <a:srgbClr val="8FBFBF"/>
               </a:solidFill>
             </a:ln>
-          </p:spPr>
-          <p:style>
-            <a:lnRef idx="2">
-              <a:schemeClr val="accent1"/>
-            </a:lnRef>
-            <a:fillRef idx="0">
-              <a:schemeClr val="accent1"/>
-            </a:fillRef>
-            <a:effectRef idx="1">
+            <a:effectLst/>
+          </p:spPr>
+          <p:style>
+            <a:lnRef idx="2">
+              <a:schemeClr val="accent1"/>
+            </a:lnRef>
+            <a:fillRef idx="0">
+              <a:schemeClr val="accent1"/>
+            </a:fillRef>
+            <a:effectRef idx="0">
               <a:schemeClr val="accent1"/>
             </a:effectRef>
             <a:fontRef idx="minor">
@@ -7464,15 +7562,16 @@
                 <a:srgbClr val="8FBFBF"/>
               </a:solidFill>
             </a:ln>
-          </p:spPr>
-          <p:style>
-            <a:lnRef idx="2">
-              <a:schemeClr val="accent1"/>
-            </a:lnRef>
-            <a:fillRef idx="0">
-              <a:schemeClr val="accent1"/>
-            </a:fillRef>
-            <a:effectRef idx="1">
+            <a:effectLst/>
+          </p:spPr>
+          <p:style>
+            <a:lnRef idx="2">
+              <a:schemeClr val="accent1"/>
+            </a:lnRef>
+            <a:fillRef idx="0">
+              <a:schemeClr val="accent1"/>
+            </a:fillRef>
+            <a:effectRef idx="0">
               <a:schemeClr val="accent1"/>
             </a:effectRef>
             <a:fontRef idx="minor">
@@ -7524,7 +7623,7 @@
             <a:fillRef idx="3">
               <a:schemeClr val="accent1"/>
             </a:fillRef>
-            <a:effectRef idx="2">
+            <a:effectRef idx="0">
               <a:schemeClr val="accent1"/>
             </a:effectRef>
             <a:fontRef idx="minor">
@@ -7558,15 +7657,16 @@
                 <a:srgbClr val="8FBFBF"/>
               </a:solidFill>
             </a:ln>
-          </p:spPr>
-          <p:style>
-            <a:lnRef idx="2">
-              <a:schemeClr val="accent1"/>
-            </a:lnRef>
-            <a:fillRef idx="0">
-              <a:schemeClr val="accent1"/>
-            </a:fillRef>
-            <a:effectRef idx="1">
+            <a:effectLst/>
+          </p:spPr>
+          <p:style>
+            <a:lnRef idx="2">
+              <a:schemeClr val="accent1"/>
+            </a:lnRef>
+            <a:fillRef idx="0">
+              <a:schemeClr val="accent1"/>
+            </a:fillRef>
+            <a:effectRef idx="0">
               <a:schemeClr val="accent1"/>
             </a:effectRef>
             <a:fontRef idx="minor">
@@ -7593,15 +7693,16 @@
                 <a:srgbClr val="8FBFBF"/>
               </a:solidFill>
             </a:ln>
-          </p:spPr>
-          <p:style>
-            <a:lnRef idx="2">
-              <a:schemeClr val="accent1"/>
-            </a:lnRef>
-            <a:fillRef idx="0">
-              <a:schemeClr val="accent1"/>
-            </a:fillRef>
-            <a:effectRef idx="1">
+            <a:effectLst/>
+          </p:spPr>
+          <p:style>
+            <a:lnRef idx="2">
+              <a:schemeClr val="accent1"/>
+            </a:lnRef>
+            <a:fillRef idx="0">
+              <a:schemeClr val="accent1"/>
+            </a:fillRef>
+            <a:effectRef idx="0">
               <a:schemeClr val="accent1"/>
             </a:effectRef>
             <a:fontRef idx="minor">
@@ -7628,15 +7729,16 @@
                 <a:srgbClr val="8FBFBF"/>
               </a:solidFill>
             </a:ln>
-          </p:spPr>
-          <p:style>
-            <a:lnRef idx="2">
-              <a:schemeClr val="accent1"/>
-            </a:lnRef>
-            <a:fillRef idx="0">
-              <a:schemeClr val="accent1"/>
-            </a:fillRef>
-            <a:effectRef idx="1">
+            <a:effectLst/>
+          </p:spPr>
+          <p:style>
+            <a:lnRef idx="2">
+              <a:schemeClr val="accent1"/>
+            </a:lnRef>
+            <a:fillRef idx="0">
+              <a:schemeClr val="accent1"/>
+            </a:fillRef>
+            <a:effectRef idx="0">
               <a:schemeClr val="accent1"/>
             </a:effectRef>
             <a:fontRef idx="minor">
@@ -7663,15 +7765,16 @@
                 <a:srgbClr val="8FBFBF"/>
               </a:solidFill>
             </a:ln>
-          </p:spPr>
-          <p:style>
-            <a:lnRef idx="2">
-              <a:schemeClr val="accent1"/>
-            </a:lnRef>
-            <a:fillRef idx="0">
-              <a:schemeClr val="accent1"/>
-            </a:fillRef>
-            <a:effectRef idx="1">
+            <a:effectLst/>
+          </p:spPr>
+          <p:style>
+            <a:lnRef idx="2">
+              <a:schemeClr val="accent1"/>
+            </a:lnRef>
+            <a:fillRef idx="0">
+              <a:schemeClr val="accent1"/>
+            </a:fillRef>
+            <a:effectRef idx="0">
               <a:schemeClr val="accent1"/>
             </a:effectRef>
             <a:fontRef idx="minor">
@@ -7698,15 +7801,16 @@
                 <a:srgbClr val="8FBFBF"/>
               </a:solidFill>
             </a:ln>
-          </p:spPr>
-          <p:style>
-            <a:lnRef idx="2">
-              <a:schemeClr val="accent1"/>
-            </a:lnRef>
-            <a:fillRef idx="0">
-              <a:schemeClr val="accent1"/>
-            </a:fillRef>
-            <a:effectRef idx="1">
+            <a:effectLst/>
+          </p:spPr>
+          <p:style>
+            <a:lnRef idx="2">
+              <a:schemeClr val="accent1"/>
+            </a:lnRef>
+            <a:fillRef idx="0">
+              <a:schemeClr val="accent1"/>
+            </a:fillRef>
+            <a:effectRef idx="0">
               <a:schemeClr val="accent1"/>
             </a:effectRef>
             <a:fontRef idx="minor">
@@ -7733,15 +7837,16 @@
                 <a:srgbClr val="8FBFBF"/>
               </a:solidFill>
             </a:ln>
-          </p:spPr>
-          <p:style>
-            <a:lnRef idx="2">
-              <a:schemeClr val="accent1"/>
-            </a:lnRef>
-            <a:fillRef idx="0">
-              <a:schemeClr val="accent1"/>
-            </a:fillRef>
-            <a:effectRef idx="1">
+            <a:effectLst/>
+          </p:spPr>
+          <p:style>
+            <a:lnRef idx="2">
+              <a:schemeClr val="accent1"/>
+            </a:lnRef>
+            <a:fillRef idx="0">
+              <a:schemeClr val="accent1"/>
+            </a:fillRef>
+            <a:effectRef idx="0">
               <a:schemeClr val="accent1"/>
             </a:effectRef>
             <a:fontRef idx="minor">
@@ -7768,15 +7873,16 @@
                 <a:srgbClr val="8FBFBF"/>
               </a:solidFill>
             </a:ln>
-          </p:spPr>
-          <p:style>
-            <a:lnRef idx="2">
-              <a:schemeClr val="accent1"/>
-            </a:lnRef>
-            <a:fillRef idx="0">
-              <a:schemeClr val="accent1"/>
-            </a:fillRef>
-            <a:effectRef idx="1">
+            <a:effectLst/>
+          </p:spPr>
+          <p:style>
+            <a:lnRef idx="2">
+              <a:schemeClr val="accent1"/>
+            </a:lnRef>
+            <a:fillRef idx="0">
+              <a:schemeClr val="accent1"/>
+            </a:fillRef>
+            <a:effectRef idx="0">
               <a:schemeClr val="accent1"/>
             </a:effectRef>
             <a:fontRef idx="minor">
@@ -7803,15 +7909,16 @@
                 <a:srgbClr val="8FBFBF"/>
               </a:solidFill>
             </a:ln>
-          </p:spPr>
-          <p:style>
-            <a:lnRef idx="2">
-              <a:schemeClr val="accent1"/>
-            </a:lnRef>
-            <a:fillRef idx="0">
-              <a:schemeClr val="accent1"/>
-            </a:fillRef>
-            <a:effectRef idx="1">
+            <a:effectLst/>
+          </p:spPr>
+          <p:style>
+            <a:lnRef idx="2">
+              <a:schemeClr val="accent1"/>
+            </a:lnRef>
+            <a:fillRef idx="0">
+              <a:schemeClr val="accent1"/>
+            </a:fillRef>
+            <a:effectRef idx="0">
               <a:schemeClr val="accent1"/>
             </a:effectRef>
             <a:fontRef idx="minor">
@@ -7838,15 +7945,16 @@
                 <a:srgbClr val="8FBFBF"/>
               </a:solidFill>
             </a:ln>
-          </p:spPr>
-          <p:style>
-            <a:lnRef idx="2">
-              <a:schemeClr val="accent1"/>
-            </a:lnRef>
-            <a:fillRef idx="0">
-              <a:schemeClr val="accent1"/>
-            </a:fillRef>
-            <a:effectRef idx="1">
+            <a:effectLst/>
+          </p:spPr>
+          <p:style>
+            <a:lnRef idx="2">
+              <a:schemeClr val="accent1"/>
+            </a:lnRef>
+            <a:fillRef idx="0">
+              <a:schemeClr val="accent1"/>
+            </a:fillRef>
+            <a:effectRef idx="0">
               <a:schemeClr val="accent1"/>
             </a:effectRef>
             <a:fontRef idx="minor">
@@ -7873,15 +7981,16 @@
                 <a:srgbClr val="8FBFBF"/>
               </a:solidFill>
             </a:ln>
-          </p:spPr>
-          <p:style>
-            <a:lnRef idx="2">
-              <a:schemeClr val="accent1"/>
-            </a:lnRef>
-            <a:fillRef idx="0">
-              <a:schemeClr val="accent1"/>
-            </a:fillRef>
-            <a:effectRef idx="1">
+            <a:effectLst/>
+          </p:spPr>
+          <p:style>
+            <a:lnRef idx="2">
+              <a:schemeClr val="accent1"/>
+            </a:lnRef>
+            <a:fillRef idx="0">
+              <a:schemeClr val="accent1"/>
+            </a:fillRef>
+            <a:effectRef idx="0">
               <a:schemeClr val="accent1"/>
             </a:effectRef>
             <a:fontRef idx="minor">
@@ -7908,15 +8017,16 @@
                 <a:srgbClr val="8FBFBF"/>
               </a:solidFill>
             </a:ln>
-          </p:spPr>
-          <p:style>
-            <a:lnRef idx="2">
-              <a:schemeClr val="accent1"/>
-            </a:lnRef>
-            <a:fillRef idx="0">
-              <a:schemeClr val="accent1"/>
-            </a:fillRef>
-            <a:effectRef idx="1">
+            <a:effectLst/>
+          </p:spPr>
+          <p:style>
+            <a:lnRef idx="2">
+              <a:schemeClr val="accent1"/>
+            </a:lnRef>
+            <a:fillRef idx="0">
+              <a:schemeClr val="accent1"/>
+            </a:fillRef>
+            <a:effectRef idx="0">
               <a:schemeClr val="accent1"/>
             </a:effectRef>
             <a:fontRef idx="minor">
@@ -7943,15 +8053,16 @@
                 <a:srgbClr val="8FBFBF"/>
               </a:solidFill>
             </a:ln>
-          </p:spPr>
-          <p:style>
-            <a:lnRef idx="2">
-              <a:schemeClr val="accent1"/>
-            </a:lnRef>
-            <a:fillRef idx="0">
-              <a:schemeClr val="accent1"/>
-            </a:fillRef>
-            <a:effectRef idx="1">
+            <a:effectLst/>
+          </p:spPr>
+          <p:style>
+            <a:lnRef idx="2">
+              <a:schemeClr val="accent1"/>
+            </a:lnRef>
+            <a:fillRef idx="0">
+              <a:schemeClr val="accent1"/>
+            </a:fillRef>
+            <a:effectRef idx="0">
               <a:schemeClr val="accent1"/>
             </a:effectRef>
             <a:fontRef idx="minor">
@@ -7978,15 +8089,16 @@
                 <a:srgbClr val="8FBFBF"/>
               </a:solidFill>
             </a:ln>
-          </p:spPr>
-          <p:style>
-            <a:lnRef idx="2">
-              <a:schemeClr val="accent1"/>
-            </a:lnRef>
-            <a:fillRef idx="0">
-              <a:schemeClr val="accent1"/>
-            </a:fillRef>
-            <a:effectRef idx="1">
+            <a:effectLst/>
+          </p:spPr>
+          <p:style>
+            <a:lnRef idx="2">
+              <a:schemeClr val="accent1"/>
+            </a:lnRef>
+            <a:fillRef idx="0">
+              <a:schemeClr val="accent1"/>
+            </a:fillRef>
+            <a:effectRef idx="0">
               <a:schemeClr val="accent1"/>
             </a:effectRef>
             <a:fontRef idx="minor">
@@ -8013,15 +8125,16 @@
                 <a:srgbClr val="8FBFBF"/>
               </a:solidFill>
             </a:ln>
-          </p:spPr>
-          <p:style>
-            <a:lnRef idx="2">
-              <a:schemeClr val="accent1"/>
-            </a:lnRef>
-            <a:fillRef idx="0">
-              <a:schemeClr val="accent1"/>
-            </a:fillRef>
-            <a:effectRef idx="1">
+            <a:effectLst/>
+          </p:spPr>
+          <p:style>
+            <a:lnRef idx="2">
+              <a:schemeClr val="accent1"/>
+            </a:lnRef>
+            <a:fillRef idx="0">
+              <a:schemeClr val="accent1"/>
+            </a:fillRef>
+            <a:effectRef idx="0">
               <a:schemeClr val="accent1"/>
             </a:effectRef>
             <a:fontRef idx="minor">
@@ -8073,7 +8186,7 @@
             <a:fillRef idx="3">
               <a:schemeClr val="accent1"/>
             </a:fillRef>
-            <a:effectRef idx="2">
+            <a:effectRef idx="0">
               <a:schemeClr val="accent1"/>
             </a:effectRef>
             <a:fontRef idx="minor">
@@ -8107,15 +8220,16 @@
                 <a:srgbClr val="8FBFBF"/>
               </a:solidFill>
             </a:ln>
-          </p:spPr>
-          <p:style>
-            <a:lnRef idx="2">
-              <a:schemeClr val="accent1"/>
-            </a:lnRef>
-            <a:fillRef idx="0">
-              <a:schemeClr val="accent1"/>
-            </a:fillRef>
-            <a:effectRef idx="1">
+            <a:effectLst/>
+          </p:spPr>
+          <p:style>
+            <a:lnRef idx="2">
+              <a:schemeClr val="accent1"/>
+            </a:lnRef>
+            <a:fillRef idx="0">
+              <a:schemeClr val="accent1"/>
+            </a:fillRef>
+            <a:effectRef idx="0">
               <a:schemeClr val="accent1"/>
             </a:effectRef>
             <a:fontRef idx="minor">
@@ -8142,15 +8256,16 @@
                 <a:srgbClr val="8FBFBF"/>
               </a:solidFill>
             </a:ln>
-          </p:spPr>
-          <p:style>
-            <a:lnRef idx="2">
-              <a:schemeClr val="accent1"/>
-            </a:lnRef>
-            <a:fillRef idx="0">
-              <a:schemeClr val="accent1"/>
-            </a:fillRef>
-            <a:effectRef idx="1">
+            <a:effectLst/>
+          </p:spPr>
+          <p:style>
+            <a:lnRef idx="2">
+              <a:schemeClr val="accent1"/>
+            </a:lnRef>
+            <a:fillRef idx="0">
+              <a:schemeClr val="accent1"/>
+            </a:fillRef>
+            <a:effectRef idx="0">
               <a:schemeClr val="accent1"/>
             </a:effectRef>
             <a:fontRef idx="minor">
@@ -8177,15 +8292,16 @@
                 <a:srgbClr val="8FBFBF"/>
               </a:solidFill>
             </a:ln>
-          </p:spPr>
-          <p:style>
-            <a:lnRef idx="2">
-              <a:schemeClr val="accent1"/>
-            </a:lnRef>
-            <a:fillRef idx="0">
-              <a:schemeClr val="accent1"/>
-            </a:fillRef>
-            <a:effectRef idx="1">
+            <a:effectLst/>
+          </p:spPr>
+          <p:style>
+            <a:lnRef idx="2">
+              <a:schemeClr val="accent1"/>
+            </a:lnRef>
+            <a:fillRef idx="0">
+              <a:schemeClr val="accent1"/>
+            </a:fillRef>
+            <a:effectRef idx="0">
               <a:schemeClr val="accent1"/>
             </a:effectRef>
             <a:fontRef idx="minor">
@@ -8212,15 +8328,16 @@
                 <a:srgbClr val="8FBFBF"/>
               </a:solidFill>
             </a:ln>
-          </p:spPr>
-          <p:style>
-            <a:lnRef idx="2">
-              <a:schemeClr val="accent1"/>
-            </a:lnRef>
-            <a:fillRef idx="0">
-              <a:schemeClr val="accent1"/>
-            </a:fillRef>
-            <a:effectRef idx="1">
+            <a:effectLst/>
+          </p:spPr>
+          <p:style>
+            <a:lnRef idx="2">
+              <a:schemeClr val="accent1"/>
+            </a:lnRef>
+            <a:fillRef idx="0">
+              <a:schemeClr val="accent1"/>
+            </a:fillRef>
+            <a:effectRef idx="0">
               <a:schemeClr val="accent1"/>
             </a:effectRef>
             <a:fontRef idx="minor">
@@ -8247,15 +8364,16 @@
                 <a:srgbClr val="8FBFBF"/>
               </a:solidFill>
             </a:ln>
-          </p:spPr>
-          <p:style>
-            <a:lnRef idx="2">
-              <a:schemeClr val="accent1"/>
-            </a:lnRef>
-            <a:fillRef idx="0">
-              <a:schemeClr val="accent1"/>
-            </a:fillRef>
-            <a:effectRef idx="1">
+            <a:effectLst/>
+          </p:spPr>
+          <p:style>
+            <a:lnRef idx="2">
+              <a:schemeClr val="accent1"/>
+            </a:lnRef>
+            <a:fillRef idx="0">
+              <a:schemeClr val="accent1"/>
+            </a:fillRef>
+            <a:effectRef idx="0">
               <a:schemeClr val="accent1"/>
             </a:effectRef>
             <a:fontRef idx="minor">
@@ -8282,15 +8400,16 @@
                 <a:srgbClr val="8FBFBF"/>
               </a:solidFill>
             </a:ln>
-          </p:spPr>
-          <p:style>
-            <a:lnRef idx="2">
-              <a:schemeClr val="accent1"/>
-            </a:lnRef>
-            <a:fillRef idx="0">
-              <a:schemeClr val="accent1"/>
-            </a:fillRef>
-            <a:effectRef idx="1">
+            <a:effectLst/>
+          </p:spPr>
+          <p:style>
+            <a:lnRef idx="2">
+              <a:schemeClr val="accent1"/>
+            </a:lnRef>
+            <a:fillRef idx="0">
+              <a:schemeClr val="accent1"/>
+            </a:fillRef>
+            <a:effectRef idx="0">
               <a:schemeClr val="accent1"/>
             </a:effectRef>
             <a:fontRef idx="minor">
@@ -8317,15 +8436,16 @@
                 <a:srgbClr val="8FBFBF"/>
               </a:solidFill>
             </a:ln>
-          </p:spPr>
-          <p:style>
-            <a:lnRef idx="2">
-              <a:schemeClr val="accent1"/>
-            </a:lnRef>
-            <a:fillRef idx="0">
-              <a:schemeClr val="accent1"/>
-            </a:fillRef>
-            <a:effectRef idx="1">
+            <a:effectLst/>
+          </p:spPr>
+          <p:style>
+            <a:lnRef idx="2">
+              <a:schemeClr val="accent1"/>
+            </a:lnRef>
+            <a:fillRef idx="0">
+              <a:schemeClr val="accent1"/>
+            </a:fillRef>
+            <a:effectRef idx="0">
               <a:schemeClr val="accent1"/>
             </a:effectRef>
             <a:fontRef idx="minor">
@@ -8352,15 +8472,16 @@
                 <a:srgbClr val="8FBFBF"/>
               </a:solidFill>
             </a:ln>
-          </p:spPr>
-          <p:style>
-            <a:lnRef idx="2">
-              <a:schemeClr val="accent1"/>
-            </a:lnRef>
-            <a:fillRef idx="0">
-              <a:schemeClr val="accent1"/>
-            </a:fillRef>
-            <a:effectRef idx="1">
+            <a:effectLst/>
+          </p:spPr>
+          <p:style>
+            <a:lnRef idx="2">
+              <a:schemeClr val="accent1"/>
+            </a:lnRef>
+            <a:fillRef idx="0">
+              <a:schemeClr val="accent1"/>
+            </a:fillRef>
+            <a:effectRef idx="0">
               <a:schemeClr val="accent1"/>
             </a:effectRef>
             <a:fontRef idx="minor">
@@ -8387,15 +8508,16 @@
                 <a:srgbClr val="8FBFBF"/>
               </a:solidFill>
             </a:ln>
-          </p:spPr>
-          <p:style>
-            <a:lnRef idx="2">
-              <a:schemeClr val="accent1"/>
-            </a:lnRef>
-            <a:fillRef idx="0">
-              <a:schemeClr val="accent1"/>
-            </a:fillRef>
-            <a:effectRef idx="1">
+            <a:effectLst/>
+          </p:spPr>
+          <p:style>
+            <a:lnRef idx="2">
+              <a:schemeClr val="accent1"/>
+            </a:lnRef>
+            <a:fillRef idx="0">
+              <a:schemeClr val="accent1"/>
+            </a:fillRef>
+            <a:effectRef idx="0">
               <a:schemeClr val="accent1"/>
             </a:effectRef>
             <a:fontRef idx="minor">
@@ -8422,15 +8544,16 @@
                 <a:srgbClr val="8FBFBF"/>
               </a:solidFill>
             </a:ln>
-          </p:spPr>
-          <p:style>
-            <a:lnRef idx="2">
-              <a:schemeClr val="accent1"/>
-            </a:lnRef>
-            <a:fillRef idx="0">
-              <a:schemeClr val="accent1"/>
-            </a:fillRef>
-            <a:effectRef idx="1">
+            <a:effectLst/>
+          </p:spPr>
+          <p:style>
+            <a:lnRef idx="2">
+              <a:schemeClr val="accent1"/>
+            </a:lnRef>
+            <a:fillRef idx="0">
+              <a:schemeClr val="accent1"/>
+            </a:fillRef>
+            <a:effectRef idx="0">
               <a:schemeClr val="accent1"/>
             </a:effectRef>
             <a:fontRef idx="minor">
@@ -8457,15 +8580,16 @@
                 <a:srgbClr val="8FBFBF"/>
               </a:solidFill>
             </a:ln>
-          </p:spPr>
-          <p:style>
-            <a:lnRef idx="2">
-              <a:schemeClr val="accent1"/>
-            </a:lnRef>
-            <a:fillRef idx="0">
-              <a:schemeClr val="accent1"/>
-            </a:fillRef>
-            <a:effectRef idx="1">
+            <a:effectLst/>
+          </p:spPr>
+          <p:style>
+            <a:lnRef idx="2">
+              <a:schemeClr val="accent1"/>
+            </a:lnRef>
+            <a:fillRef idx="0">
+              <a:schemeClr val="accent1"/>
+            </a:fillRef>
+            <a:effectRef idx="0">
               <a:schemeClr val="accent1"/>
             </a:effectRef>
             <a:fontRef idx="minor">
@@ -8492,15 +8616,16 @@
                 <a:srgbClr val="8FBFBF"/>
               </a:solidFill>
             </a:ln>
-          </p:spPr>
-          <p:style>
-            <a:lnRef idx="2">
-              <a:schemeClr val="accent1"/>
-            </a:lnRef>
-            <a:fillRef idx="0">
-              <a:schemeClr val="accent1"/>
-            </a:fillRef>
-            <a:effectRef idx="1">
+            <a:effectLst/>
+          </p:spPr>
+          <p:style>
+            <a:lnRef idx="2">
+              <a:schemeClr val="accent1"/>
+            </a:lnRef>
+            <a:fillRef idx="0">
+              <a:schemeClr val="accent1"/>
+            </a:fillRef>
+            <a:effectRef idx="0">
               <a:schemeClr val="accent1"/>
             </a:effectRef>
             <a:fontRef idx="minor">
@@ -8527,15 +8652,16 @@
                 <a:srgbClr val="8FBFBF"/>
               </a:solidFill>
             </a:ln>
-          </p:spPr>
-          <p:style>
-            <a:lnRef idx="2">
-              <a:schemeClr val="accent1"/>
-            </a:lnRef>
-            <a:fillRef idx="0">
-              <a:schemeClr val="accent1"/>
-            </a:fillRef>
-            <a:effectRef idx="1">
+            <a:effectLst/>
+          </p:spPr>
+          <p:style>
+            <a:lnRef idx="2">
+              <a:schemeClr val="accent1"/>
+            </a:lnRef>
+            <a:fillRef idx="0">
+              <a:schemeClr val="accent1"/>
+            </a:fillRef>
+            <a:effectRef idx="0">
               <a:schemeClr val="accent1"/>
             </a:effectRef>
             <a:fontRef idx="minor">
@@ -8562,15 +8688,16 @@
                 <a:srgbClr val="8FBFBF"/>
               </a:solidFill>
             </a:ln>
-          </p:spPr>
-          <p:style>
-            <a:lnRef idx="2">
-              <a:schemeClr val="accent1"/>
-            </a:lnRef>
-            <a:fillRef idx="0">
-              <a:schemeClr val="accent1"/>
-            </a:fillRef>
-            <a:effectRef idx="1">
+            <a:effectLst/>
+          </p:spPr>
+          <p:style>
+            <a:lnRef idx="2">
+              <a:schemeClr val="accent1"/>
+            </a:lnRef>
+            <a:fillRef idx="0">
+              <a:schemeClr val="accent1"/>
+            </a:fillRef>
+            <a:effectRef idx="0">
               <a:schemeClr val="accent1"/>
             </a:effectRef>
             <a:fontRef idx="minor">
@@ -8622,7 +8749,7 @@
             <a:fillRef idx="3">
               <a:schemeClr val="accent1"/>
             </a:fillRef>
-            <a:effectRef idx="2">
+            <a:effectRef idx="0">
               <a:schemeClr val="accent1"/>
             </a:effectRef>
             <a:fontRef idx="minor">
@@ -8656,15 +8783,16 @@
                 <a:srgbClr val="8FBFBF"/>
               </a:solidFill>
             </a:ln>
-          </p:spPr>
-          <p:style>
-            <a:lnRef idx="2">
-              <a:schemeClr val="accent1"/>
-            </a:lnRef>
-            <a:fillRef idx="0">
-              <a:schemeClr val="accent1"/>
-            </a:fillRef>
-            <a:effectRef idx="1">
+            <a:effectLst/>
+          </p:spPr>
+          <p:style>
+            <a:lnRef idx="2">
+              <a:schemeClr val="accent1"/>
+            </a:lnRef>
+            <a:fillRef idx="0">
+              <a:schemeClr val="accent1"/>
+            </a:fillRef>
+            <a:effectRef idx="0">
               <a:schemeClr val="accent1"/>
             </a:effectRef>
             <a:fontRef idx="minor">
@@ -8691,15 +8819,16 @@
                 <a:srgbClr val="8FBFBF"/>
               </a:solidFill>
             </a:ln>
-          </p:spPr>
-          <p:style>
-            <a:lnRef idx="2">
-              <a:schemeClr val="accent1"/>
-            </a:lnRef>
-            <a:fillRef idx="0">
-              <a:schemeClr val="accent1"/>
-            </a:fillRef>
-            <a:effectRef idx="1">
+            <a:effectLst/>
+          </p:spPr>
+          <p:style>
+            <a:lnRef idx="2">
+              <a:schemeClr val="accent1"/>
+            </a:lnRef>
+            <a:fillRef idx="0">
+              <a:schemeClr val="accent1"/>
+            </a:fillRef>
+            <a:effectRef idx="0">
               <a:schemeClr val="accent1"/>
             </a:effectRef>
             <a:fontRef idx="minor">
@@ -8726,15 +8855,16 @@
                 <a:srgbClr val="8FBFBF"/>
               </a:solidFill>
             </a:ln>
-          </p:spPr>
-          <p:style>
-            <a:lnRef idx="2">
-              <a:schemeClr val="accent1"/>
-            </a:lnRef>
-            <a:fillRef idx="0">
-              <a:schemeClr val="accent1"/>
-            </a:fillRef>
-            <a:effectRef idx="1">
+            <a:effectLst/>
+          </p:spPr>
+          <p:style>
+            <a:lnRef idx="2">
+              <a:schemeClr val="accent1"/>
+            </a:lnRef>
+            <a:fillRef idx="0">
+              <a:schemeClr val="accent1"/>
+            </a:fillRef>
+            <a:effectRef idx="0">
               <a:schemeClr val="accent1"/>
             </a:effectRef>
             <a:fontRef idx="minor">
@@ -8761,15 +8891,16 @@
                 <a:srgbClr val="8FBFBF"/>
               </a:solidFill>
             </a:ln>
-          </p:spPr>
-          <p:style>
-            <a:lnRef idx="2">
-              <a:schemeClr val="accent1"/>
-            </a:lnRef>
-            <a:fillRef idx="0">
-              <a:schemeClr val="accent1"/>
-            </a:fillRef>
-            <a:effectRef idx="1">
+            <a:effectLst/>
+          </p:spPr>
+          <p:style>
+            <a:lnRef idx="2">
+              <a:schemeClr val="accent1"/>
+            </a:lnRef>
+            <a:fillRef idx="0">
+              <a:schemeClr val="accent1"/>
+            </a:fillRef>
+            <a:effectRef idx="0">
               <a:schemeClr val="accent1"/>
             </a:effectRef>
             <a:fontRef idx="minor">
@@ -8796,15 +8927,16 @@
                 <a:srgbClr val="8FBFBF"/>
               </a:solidFill>
             </a:ln>
-          </p:spPr>
-          <p:style>
-            <a:lnRef idx="2">
-              <a:schemeClr val="accent1"/>
-            </a:lnRef>
-            <a:fillRef idx="0">
-              <a:schemeClr val="accent1"/>
-            </a:fillRef>
-            <a:effectRef idx="1">
+            <a:effectLst/>
+          </p:spPr>
+          <p:style>
+            <a:lnRef idx="2">
+              <a:schemeClr val="accent1"/>
+            </a:lnRef>
+            <a:fillRef idx="0">
+              <a:schemeClr val="accent1"/>
+            </a:fillRef>
+            <a:effectRef idx="0">
               <a:schemeClr val="accent1"/>
             </a:effectRef>
             <a:fontRef idx="minor">
@@ -8831,15 +8963,16 @@
                 <a:srgbClr val="8FBFBF"/>
               </a:solidFill>
             </a:ln>
-          </p:spPr>
-          <p:style>
-            <a:lnRef idx="2">
-              <a:schemeClr val="accent1"/>
-            </a:lnRef>
-            <a:fillRef idx="0">
-              <a:schemeClr val="accent1"/>
-            </a:fillRef>
-            <a:effectRef idx="1">
+            <a:effectLst/>
+          </p:spPr>
+          <p:style>
+            <a:lnRef idx="2">
+              <a:schemeClr val="accent1"/>
+            </a:lnRef>
+            <a:fillRef idx="0">
+              <a:schemeClr val="accent1"/>
+            </a:fillRef>
+            <a:effectRef idx="0">
               <a:schemeClr val="accent1"/>
             </a:effectRef>
             <a:fontRef idx="minor">
@@ -8866,15 +8999,16 @@
                 <a:srgbClr val="8FBFBF"/>
               </a:solidFill>
             </a:ln>
-          </p:spPr>
-          <p:style>
-            <a:lnRef idx="2">
-              <a:schemeClr val="accent1"/>
-            </a:lnRef>
-            <a:fillRef idx="0">
-              <a:schemeClr val="accent1"/>
-            </a:fillRef>
-            <a:effectRef idx="1">
+            <a:effectLst/>
+          </p:spPr>
+          <p:style>
+            <a:lnRef idx="2">
+              <a:schemeClr val="accent1"/>
+            </a:lnRef>
+            <a:fillRef idx="0">
+              <a:schemeClr val="accent1"/>
+            </a:fillRef>
+            <a:effectRef idx="0">
               <a:schemeClr val="accent1"/>
             </a:effectRef>
             <a:fontRef idx="minor">
@@ -8901,15 +9035,16 @@
                 <a:srgbClr val="8FBFBF"/>
               </a:solidFill>
             </a:ln>
-          </p:spPr>
-          <p:style>
-            <a:lnRef idx="2">
-              <a:schemeClr val="accent1"/>
-            </a:lnRef>
-            <a:fillRef idx="0">
-              <a:schemeClr val="accent1"/>
-            </a:fillRef>
-            <a:effectRef idx="1">
+            <a:effectLst/>
+          </p:spPr>
+          <p:style>
+            <a:lnRef idx="2">
+              <a:schemeClr val="accent1"/>
+            </a:lnRef>
+            <a:fillRef idx="0">
+              <a:schemeClr val="accent1"/>
+            </a:fillRef>
+            <a:effectRef idx="0">
               <a:schemeClr val="accent1"/>
             </a:effectRef>
             <a:fontRef idx="minor">
@@ -8936,15 +9071,16 @@
                 <a:srgbClr val="8FBFBF"/>
               </a:solidFill>
             </a:ln>
-          </p:spPr>
-          <p:style>
-            <a:lnRef idx="2">
-              <a:schemeClr val="accent1"/>
-            </a:lnRef>
-            <a:fillRef idx="0">
-              <a:schemeClr val="accent1"/>
-            </a:fillRef>
-            <a:effectRef idx="1">
+            <a:effectLst/>
+          </p:spPr>
+          <p:style>
+            <a:lnRef idx="2">
+              <a:schemeClr val="accent1"/>
+            </a:lnRef>
+            <a:fillRef idx="0">
+              <a:schemeClr val="accent1"/>
+            </a:fillRef>
+            <a:effectRef idx="0">
               <a:schemeClr val="accent1"/>
             </a:effectRef>
             <a:fontRef idx="minor">
@@ -8971,15 +9107,16 @@
                 <a:srgbClr val="8FBFBF"/>
               </a:solidFill>
             </a:ln>
-          </p:spPr>
-          <p:style>
-            <a:lnRef idx="2">
-              <a:schemeClr val="accent1"/>
-            </a:lnRef>
-            <a:fillRef idx="0">
-              <a:schemeClr val="accent1"/>
-            </a:fillRef>
-            <a:effectRef idx="1">
+            <a:effectLst/>
+          </p:spPr>
+          <p:style>
+            <a:lnRef idx="2">
+              <a:schemeClr val="accent1"/>
+            </a:lnRef>
+            <a:fillRef idx="0">
+              <a:schemeClr val="accent1"/>
+            </a:fillRef>
+            <a:effectRef idx="0">
               <a:schemeClr val="accent1"/>
             </a:effectRef>
             <a:fontRef idx="minor">
@@ -9006,15 +9143,16 @@
                 <a:srgbClr val="8FBFBF"/>
               </a:solidFill>
             </a:ln>
-          </p:spPr>
-          <p:style>
-            <a:lnRef idx="2">
-              <a:schemeClr val="accent1"/>
-            </a:lnRef>
-            <a:fillRef idx="0">
-              <a:schemeClr val="accent1"/>
-            </a:fillRef>
-            <a:effectRef idx="1">
+            <a:effectLst/>
+          </p:spPr>
+          <p:style>
+            <a:lnRef idx="2">
+              <a:schemeClr val="accent1"/>
+            </a:lnRef>
+            <a:fillRef idx="0">
+              <a:schemeClr val="accent1"/>
+            </a:fillRef>
+            <a:effectRef idx="0">
               <a:schemeClr val="accent1"/>
             </a:effectRef>
             <a:fontRef idx="minor">
@@ -9041,15 +9179,16 @@
                 <a:srgbClr val="8FBFBF"/>
               </a:solidFill>
             </a:ln>
-          </p:spPr>
-          <p:style>
-            <a:lnRef idx="2">
-              <a:schemeClr val="accent1"/>
-            </a:lnRef>
-            <a:fillRef idx="0">
-              <a:schemeClr val="accent1"/>
-            </a:fillRef>
-            <a:effectRef idx="1">
+            <a:effectLst/>
+          </p:spPr>
+          <p:style>
+            <a:lnRef idx="2">
+              <a:schemeClr val="accent1"/>
+            </a:lnRef>
+            <a:fillRef idx="0">
+              <a:schemeClr val="accent1"/>
+            </a:fillRef>
+            <a:effectRef idx="0">
               <a:schemeClr val="accent1"/>
             </a:effectRef>
             <a:fontRef idx="minor">
@@ -9076,15 +9215,16 @@
                 <a:srgbClr val="8FBFBF"/>
               </a:solidFill>
             </a:ln>
-          </p:spPr>
-          <p:style>
-            <a:lnRef idx="2">
-              <a:schemeClr val="accent1"/>
-            </a:lnRef>
-            <a:fillRef idx="0">
-              <a:schemeClr val="accent1"/>
-            </a:fillRef>
-            <a:effectRef idx="1">
+            <a:effectLst/>
+          </p:spPr>
+          <p:style>
+            <a:lnRef idx="2">
+              <a:schemeClr val="accent1"/>
+            </a:lnRef>
+            <a:fillRef idx="0">
+              <a:schemeClr val="accent1"/>
+            </a:fillRef>
+            <a:effectRef idx="0">
               <a:schemeClr val="accent1"/>
             </a:effectRef>
             <a:fontRef idx="minor">
@@ -9111,15 +9251,16 @@
                 <a:srgbClr val="8FBFBF"/>
               </a:solidFill>
             </a:ln>
-          </p:spPr>
-          <p:style>
-            <a:lnRef idx="2">
-              <a:schemeClr val="accent1"/>
-            </a:lnRef>
-            <a:fillRef idx="0">
-              <a:schemeClr val="accent1"/>
-            </a:fillRef>
-            <a:effectRef idx="1">
+            <a:effectLst/>
+          </p:spPr>
+          <p:style>
+            <a:lnRef idx="2">
+              <a:schemeClr val="accent1"/>
+            </a:lnRef>
+            <a:fillRef idx="0">
+              <a:schemeClr val="accent1"/>
+            </a:fillRef>
+            <a:effectRef idx="0">
               <a:schemeClr val="accent1"/>
             </a:effectRef>
             <a:fontRef idx="minor">
@@ -9171,7 +9312,7 @@
             <a:fillRef idx="3">
               <a:schemeClr val="accent1"/>
             </a:fillRef>
-            <a:effectRef idx="2">
+            <a:effectRef idx="0">
               <a:schemeClr val="accent1"/>
             </a:effectRef>
             <a:fontRef idx="minor">
@@ -9205,15 +9346,16 @@
                 <a:srgbClr val="8FBFBF"/>
               </a:solidFill>
             </a:ln>
-          </p:spPr>
-          <p:style>
-            <a:lnRef idx="2">
-              <a:schemeClr val="accent1"/>
-            </a:lnRef>
-            <a:fillRef idx="0">
-              <a:schemeClr val="accent1"/>
-            </a:fillRef>
-            <a:effectRef idx="1">
+            <a:effectLst/>
+          </p:spPr>
+          <p:style>
+            <a:lnRef idx="2">
+              <a:schemeClr val="accent1"/>
+            </a:lnRef>
+            <a:fillRef idx="0">
+              <a:schemeClr val="accent1"/>
+            </a:fillRef>
+            <a:effectRef idx="0">
               <a:schemeClr val="accent1"/>
             </a:effectRef>
             <a:fontRef idx="minor">
@@ -9240,15 +9382,16 @@
                 <a:srgbClr val="8FBFBF"/>
               </a:solidFill>
             </a:ln>
-          </p:spPr>
-          <p:style>
-            <a:lnRef idx="2">
-              <a:schemeClr val="accent1"/>
-            </a:lnRef>
-            <a:fillRef idx="0">
-              <a:schemeClr val="accent1"/>
-            </a:fillRef>
-            <a:effectRef idx="1">
+            <a:effectLst/>
+          </p:spPr>
+          <p:style>
+            <a:lnRef idx="2">
+              <a:schemeClr val="accent1"/>
+            </a:lnRef>
+            <a:fillRef idx="0">
+              <a:schemeClr val="accent1"/>
+            </a:fillRef>
+            <a:effectRef idx="0">
               <a:schemeClr val="accent1"/>
             </a:effectRef>
             <a:fontRef idx="minor">
@@ -9275,15 +9418,16 @@
                 <a:srgbClr val="8FBFBF"/>
               </a:solidFill>
             </a:ln>
-          </p:spPr>
-          <p:style>
-            <a:lnRef idx="2">
-              <a:schemeClr val="accent1"/>
-            </a:lnRef>
-            <a:fillRef idx="0">
-              <a:schemeClr val="accent1"/>
-            </a:fillRef>
-            <a:effectRef idx="1">
+            <a:effectLst/>
+          </p:spPr>
+          <p:style>
+            <a:lnRef idx="2">
+              <a:schemeClr val="accent1"/>
+            </a:lnRef>
+            <a:fillRef idx="0">
+              <a:schemeClr val="accent1"/>
+            </a:fillRef>
+            <a:effectRef idx="0">
               <a:schemeClr val="accent1"/>
             </a:effectRef>
             <a:fontRef idx="minor">
@@ -9310,15 +9454,16 @@
                 <a:srgbClr val="8FBFBF"/>
               </a:solidFill>
             </a:ln>
-          </p:spPr>
-          <p:style>
-            <a:lnRef idx="2">
-              <a:schemeClr val="accent1"/>
-            </a:lnRef>
-            <a:fillRef idx="0">
-              <a:schemeClr val="accent1"/>
-            </a:fillRef>
-            <a:effectRef idx="1">
+            <a:effectLst/>
+          </p:spPr>
+          <p:style>
+            <a:lnRef idx="2">
+              <a:schemeClr val="accent1"/>
+            </a:lnRef>
+            <a:fillRef idx="0">
+              <a:schemeClr val="accent1"/>
+            </a:fillRef>
+            <a:effectRef idx="0">
               <a:schemeClr val="accent1"/>
             </a:effectRef>
             <a:fontRef idx="minor">
@@ -9345,15 +9490,16 @@
                 <a:srgbClr val="8FBFBF"/>
               </a:solidFill>
             </a:ln>
-          </p:spPr>
-          <p:style>
-            <a:lnRef idx="2">
-              <a:schemeClr val="accent1"/>
-            </a:lnRef>
-            <a:fillRef idx="0">
-              <a:schemeClr val="accent1"/>
-            </a:fillRef>
-            <a:effectRef idx="1">
+            <a:effectLst/>
+          </p:spPr>
+          <p:style>
+            <a:lnRef idx="2">
+              <a:schemeClr val="accent1"/>
+            </a:lnRef>
+            <a:fillRef idx="0">
+              <a:schemeClr val="accent1"/>
+            </a:fillRef>
+            <a:effectRef idx="0">
               <a:schemeClr val="accent1"/>
             </a:effectRef>
             <a:fontRef idx="minor">
@@ -9380,15 +9526,16 @@
                 <a:srgbClr val="8FBFBF"/>
               </a:solidFill>
             </a:ln>
-          </p:spPr>
-          <p:style>
-            <a:lnRef idx="2">
-              <a:schemeClr val="accent1"/>
-            </a:lnRef>
-            <a:fillRef idx="0">
-              <a:schemeClr val="accent1"/>
-            </a:fillRef>
-            <a:effectRef idx="1">
+            <a:effectLst/>
+          </p:spPr>
+          <p:style>
+            <a:lnRef idx="2">
+              <a:schemeClr val="accent1"/>
+            </a:lnRef>
+            <a:fillRef idx="0">
+              <a:schemeClr val="accent1"/>
+            </a:fillRef>
+            <a:effectRef idx="0">
               <a:schemeClr val="accent1"/>
             </a:effectRef>
             <a:fontRef idx="minor">
@@ -9415,15 +9562,16 @@
                 <a:srgbClr val="8FBFBF"/>
               </a:solidFill>
             </a:ln>
-          </p:spPr>
-          <p:style>
-            <a:lnRef idx="2">
-              <a:schemeClr val="accent1"/>
-            </a:lnRef>
-            <a:fillRef idx="0">
-              <a:schemeClr val="accent1"/>
-            </a:fillRef>
-            <a:effectRef idx="1">
+            <a:effectLst/>
+          </p:spPr>
+          <p:style>
+            <a:lnRef idx="2">
+              <a:schemeClr val="accent1"/>
+            </a:lnRef>
+            <a:fillRef idx="0">
+              <a:schemeClr val="accent1"/>
+            </a:fillRef>
+            <a:effectRef idx="0">
               <a:schemeClr val="accent1"/>
             </a:effectRef>
             <a:fontRef idx="minor">
@@ -9450,15 +9598,16 @@
                 <a:srgbClr val="8FBFBF"/>
               </a:solidFill>
             </a:ln>
-          </p:spPr>
-          <p:style>
-            <a:lnRef idx="2">
-              <a:schemeClr val="accent1"/>
-            </a:lnRef>
-            <a:fillRef idx="0">
-              <a:schemeClr val="accent1"/>
-            </a:fillRef>
-            <a:effectRef idx="1">
+            <a:effectLst/>
+          </p:spPr>
+          <p:style>
+            <a:lnRef idx="2">
+              <a:schemeClr val="accent1"/>
+            </a:lnRef>
+            <a:fillRef idx="0">
+              <a:schemeClr val="accent1"/>
+            </a:fillRef>
+            <a:effectRef idx="0">
               <a:schemeClr val="accent1"/>
             </a:effectRef>
             <a:fontRef idx="minor">
@@ -9485,15 +9634,16 @@
                 <a:srgbClr val="8FBFBF"/>
               </a:solidFill>
             </a:ln>
-          </p:spPr>
-          <p:style>
-            <a:lnRef idx="2">
-              <a:schemeClr val="accent1"/>
-            </a:lnRef>
-            <a:fillRef idx="0">
-              <a:schemeClr val="accent1"/>
-            </a:fillRef>
-            <a:effectRef idx="1">
+            <a:effectLst/>
+          </p:spPr>
+          <p:style>
+            <a:lnRef idx="2">
+              <a:schemeClr val="accent1"/>
+            </a:lnRef>
+            <a:fillRef idx="0">
+              <a:schemeClr val="accent1"/>
+            </a:fillRef>
+            <a:effectRef idx="0">
               <a:schemeClr val="accent1"/>
             </a:effectRef>
             <a:fontRef idx="minor">
@@ -9520,15 +9670,16 @@
                 <a:srgbClr val="8FBFBF"/>
               </a:solidFill>
             </a:ln>
-          </p:spPr>
-          <p:style>
-            <a:lnRef idx="2">
-              <a:schemeClr val="accent1"/>
-            </a:lnRef>
-            <a:fillRef idx="0">
-              <a:schemeClr val="accent1"/>
-            </a:fillRef>
-            <a:effectRef idx="1">
+            <a:effectLst/>
+          </p:spPr>
+          <p:style>
+            <a:lnRef idx="2">
+              <a:schemeClr val="accent1"/>
+            </a:lnRef>
+            <a:fillRef idx="0">
+              <a:schemeClr val="accent1"/>
+            </a:fillRef>
+            <a:effectRef idx="0">
               <a:schemeClr val="accent1"/>
             </a:effectRef>
             <a:fontRef idx="minor">
@@ -9555,15 +9706,16 @@
                 <a:srgbClr val="8FBFBF"/>
               </a:solidFill>
             </a:ln>
-          </p:spPr>
-          <p:style>
-            <a:lnRef idx="2">
-              <a:schemeClr val="accent1"/>
-            </a:lnRef>
-            <a:fillRef idx="0">
-              <a:schemeClr val="accent1"/>
-            </a:fillRef>
-            <a:effectRef idx="1">
+            <a:effectLst/>
+          </p:spPr>
+          <p:style>
+            <a:lnRef idx="2">
+              <a:schemeClr val="accent1"/>
+            </a:lnRef>
+            <a:fillRef idx="0">
+              <a:schemeClr val="accent1"/>
+            </a:fillRef>
+            <a:effectRef idx="0">
               <a:schemeClr val="accent1"/>
             </a:effectRef>
             <a:fontRef idx="minor">
@@ -9590,15 +9742,16 @@
                 <a:srgbClr val="8FBFBF"/>
               </a:solidFill>
             </a:ln>
-          </p:spPr>
-          <p:style>
-            <a:lnRef idx="2">
-              <a:schemeClr val="accent1"/>
-            </a:lnRef>
-            <a:fillRef idx="0">
-              <a:schemeClr val="accent1"/>
-            </a:fillRef>
-            <a:effectRef idx="1">
+            <a:effectLst/>
+          </p:spPr>
+          <p:style>
+            <a:lnRef idx="2">
+              <a:schemeClr val="accent1"/>
+            </a:lnRef>
+            <a:fillRef idx="0">
+              <a:schemeClr val="accent1"/>
+            </a:fillRef>
+            <a:effectRef idx="0">
               <a:schemeClr val="accent1"/>
             </a:effectRef>
             <a:fontRef idx="minor">
@@ -9625,15 +9778,16 @@
                 <a:srgbClr val="8FBFBF"/>
               </a:solidFill>
             </a:ln>
-          </p:spPr>
-          <p:style>
-            <a:lnRef idx="2">
-              <a:schemeClr val="accent1"/>
-            </a:lnRef>
-            <a:fillRef idx="0">
-              <a:schemeClr val="accent1"/>
-            </a:fillRef>
-            <a:effectRef idx="1">
+            <a:effectLst/>
+          </p:spPr>
+          <p:style>
+            <a:lnRef idx="2">
+              <a:schemeClr val="accent1"/>
+            </a:lnRef>
+            <a:fillRef idx="0">
+              <a:schemeClr val="accent1"/>
+            </a:fillRef>
+            <a:effectRef idx="0">
               <a:schemeClr val="accent1"/>
             </a:effectRef>
             <a:fontRef idx="minor">
@@ -9660,15 +9814,16 @@
                 <a:srgbClr val="8FBFBF"/>
               </a:solidFill>
             </a:ln>
-          </p:spPr>
-          <p:style>
-            <a:lnRef idx="2">
-              <a:schemeClr val="accent1"/>
-            </a:lnRef>
-            <a:fillRef idx="0">
-              <a:schemeClr val="accent1"/>
-            </a:fillRef>
-            <a:effectRef idx="1">
+            <a:effectLst/>
+          </p:spPr>
+          <p:style>
+            <a:lnRef idx="2">
+              <a:schemeClr val="accent1"/>
+            </a:lnRef>
+            <a:fillRef idx="0">
+              <a:schemeClr val="accent1"/>
+            </a:fillRef>
+            <a:effectRef idx="0">
               <a:schemeClr val="accent1"/>
             </a:effectRef>
             <a:fontRef idx="minor">
@@ -9720,7 +9875,7 @@
             <a:fillRef idx="3">
               <a:schemeClr val="accent1"/>
             </a:fillRef>
-            <a:effectRef idx="2">
+            <a:effectRef idx="0">
               <a:schemeClr val="accent1"/>
             </a:effectRef>
             <a:fontRef idx="minor">
@@ -9754,15 +9909,16 @@
                 <a:srgbClr val="8FBFBF"/>
               </a:solidFill>
             </a:ln>
-          </p:spPr>
-          <p:style>
-            <a:lnRef idx="2">
-              <a:schemeClr val="accent1"/>
-            </a:lnRef>
-            <a:fillRef idx="0">
-              <a:schemeClr val="accent1"/>
-            </a:fillRef>
-            <a:effectRef idx="1">
+            <a:effectLst/>
+          </p:spPr>
+          <p:style>
+            <a:lnRef idx="2">
+              <a:schemeClr val="accent1"/>
+            </a:lnRef>
+            <a:fillRef idx="0">
+              <a:schemeClr val="accent1"/>
+            </a:fillRef>
+            <a:effectRef idx="0">
               <a:schemeClr val="accent1"/>
             </a:effectRef>
             <a:fontRef idx="minor">
@@ -9789,15 +9945,16 @@
                 <a:srgbClr val="8FBFBF"/>
               </a:solidFill>
             </a:ln>
-          </p:spPr>
-          <p:style>
-            <a:lnRef idx="2">
-              <a:schemeClr val="accent1"/>
-            </a:lnRef>
-            <a:fillRef idx="0">
-              <a:schemeClr val="accent1"/>
-            </a:fillRef>
-            <a:effectRef idx="1">
+            <a:effectLst/>
+          </p:spPr>
+          <p:style>
+            <a:lnRef idx="2">
+              <a:schemeClr val="accent1"/>
+            </a:lnRef>
+            <a:fillRef idx="0">
+              <a:schemeClr val="accent1"/>
+            </a:fillRef>
+            <a:effectRef idx="0">
               <a:schemeClr val="accent1"/>
             </a:effectRef>
             <a:fontRef idx="minor">
@@ -9824,15 +9981,16 @@
                 <a:srgbClr val="8FBFBF"/>
               </a:solidFill>
             </a:ln>
-          </p:spPr>
-          <p:style>
-            <a:lnRef idx="2">
-              <a:schemeClr val="accent1"/>
-            </a:lnRef>
-            <a:fillRef idx="0">
-              <a:schemeClr val="accent1"/>
-            </a:fillRef>
-            <a:effectRef idx="1">
+            <a:effectLst/>
+          </p:spPr>
+          <p:style>
+            <a:lnRef idx="2">
+              <a:schemeClr val="accent1"/>
+            </a:lnRef>
+            <a:fillRef idx="0">
+              <a:schemeClr val="accent1"/>
+            </a:fillRef>
+            <a:effectRef idx="0">
               <a:schemeClr val="accent1"/>
             </a:effectRef>
             <a:fontRef idx="minor">
@@ -9859,15 +10017,16 @@
                 <a:srgbClr val="8FBFBF"/>
               </a:solidFill>
             </a:ln>
-          </p:spPr>
-          <p:style>
-            <a:lnRef idx="2">
-              <a:schemeClr val="accent1"/>
-            </a:lnRef>
-            <a:fillRef idx="0">
-              <a:schemeClr val="accent1"/>
-            </a:fillRef>
-            <a:effectRef idx="1">
+            <a:effectLst/>
+          </p:spPr>
+          <p:style>
+            <a:lnRef idx="2">
+              <a:schemeClr val="accent1"/>
+            </a:lnRef>
+            <a:fillRef idx="0">
+              <a:schemeClr val="accent1"/>
+            </a:fillRef>
+            <a:effectRef idx="0">
               <a:schemeClr val="accent1"/>
             </a:effectRef>
             <a:fontRef idx="minor">
@@ -9894,15 +10053,16 @@
                 <a:srgbClr val="8FBFBF"/>
               </a:solidFill>
             </a:ln>
-          </p:spPr>
-          <p:style>
-            <a:lnRef idx="2">
-              <a:schemeClr val="accent1"/>
-            </a:lnRef>
-            <a:fillRef idx="0">
-              <a:schemeClr val="accent1"/>
-            </a:fillRef>
-            <a:effectRef idx="1">
+            <a:effectLst/>
+          </p:spPr>
+          <p:style>
+            <a:lnRef idx="2">
+              <a:schemeClr val="accent1"/>
+            </a:lnRef>
+            <a:fillRef idx="0">
+              <a:schemeClr val="accent1"/>
+            </a:fillRef>
+            <a:effectRef idx="0">
               <a:schemeClr val="accent1"/>
             </a:effectRef>
             <a:fontRef idx="minor">
@@ -9929,15 +10089,16 @@
                 <a:srgbClr val="8FBFBF"/>
               </a:solidFill>
             </a:ln>
-          </p:spPr>
-          <p:style>
-            <a:lnRef idx="2">
-              <a:schemeClr val="accent1"/>
-            </a:lnRef>
-            <a:fillRef idx="0">
-              <a:schemeClr val="accent1"/>
-            </a:fillRef>
-            <a:effectRef idx="1">
+            <a:effectLst/>
+          </p:spPr>
+          <p:style>
+            <a:lnRef idx="2">
+              <a:schemeClr val="accent1"/>
+            </a:lnRef>
+            <a:fillRef idx="0">
+              <a:schemeClr val="accent1"/>
+            </a:fillRef>
+            <a:effectRef idx="0">
               <a:schemeClr val="accent1"/>
             </a:effectRef>
             <a:fontRef idx="minor">
@@ -9964,15 +10125,16 @@
                 <a:srgbClr val="8FBFBF"/>
               </a:solidFill>
             </a:ln>
-          </p:spPr>
-          <p:style>
-            <a:lnRef idx="2">
-              <a:schemeClr val="accent1"/>
-            </a:lnRef>
-            <a:fillRef idx="0">
-              <a:schemeClr val="accent1"/>
-            </a:fillRef>
-            <a:effectRef idx="1">
+            <a:effectLst/>
+          </p:spPr>
+          <p:style>
+            <a:lnRef idx="2">
+              <a:schemeClr val="accent1"/>
+            </a:lnRef>
+            <a:fillRef idx="0">
+              <a:schemeClr val="accent1"/>
+            </a:fillRef>
+            <a:effectRef idx="0">
               <a:schemeClr val="accent1"/>
             </a:effectRef>
             <a:fontRef idx="minor">
@@ -9999,15 +10161,16 @@
                 <a:srgbClr val="8FBFBF"/>
               </a:solidFill>
             </a:ln>
-          </p:spPr>
-          <p:style>
-            <a:lnRef idx="2">
-              <a:schemeClr val="accent1"/>
-            </a:lnRef>
-            <a:fillRef idx="0">
-              <a:schemeClr val="accent1"/>
-            </a:fillRef>
-            <a:effectRef idx="1">
+            <a:effectLst/>
+          </p:spPr>
+          <p:style>
+            <a:lnRef idx="2">
+              <a:schemeClr val="accent1"/>
+            </a:lnRef>
+            <a:fillRef idx="0">
+              <a:schemeClr val="accent1"/>
+            </a:fillRef>
+            <a:effectRef idx="0">
               <a:schemeClr val="accent1"/>
             </a:effectRef>
             <a:fontRef idx="minor">
@@ -10034,15 +10197,16 @@
                 <a:srgbClr val="8FBFBF"/>
               </a:solidFill>
             </a:ln>
-          </p:spPr>
-          <p:style>
-            <a:lnRef idx="2">
-              <a:schemeClr val="accent1"/>
-            </a:lnRef>
-            <a:fillRef idx="0">
-              <a:schemeClr val="accent1"/>
-            </a:fillRef>
-            <a:effectRef idx="1">
+            <a:effectLst/>
+          </p:spPr>
+          <p:style>
+            <a:lnRef idx="2">
+              <a:schemeClr val="accent1"/>
+            </a:lnRef>
+            <a:fillRef idx="0">
+              <a:schemeClr val="accent1"/>
+            </a:fillRef>
+            <a:effectRef idx="0">
               <a:schemeClr val="accent1"/>
             </a:effectRef>
             <a:fontRef idx="minor">
@@ -10069,15 +10233,16 @@
                 <a:srgbClr val="8FBFBF"/>
               </a:solidFill>
             </a:ln>
-          </p:spPr>
-          <p:style>
-            <a:lnRef idx="2">
-              <a:schemeClr val="accent1"/>
-            </a:lnRef>
-            <a:fillRef idx="0">
-              <a:schemeClr val="accent1"/>
-            </a:fillRef>
-            <a:effectRef idx="1">
+            <a:effectLst/>
+          </p:spPr>
+          <p:style>
+            <a:lnRef idx="2">
+              <a:schemeClr val="accent1"/>
+            </a:lnRef>
+            <a:fillRef idx="0">
+              <a:schemeClr val="accent1"/>
+            </a:fillRef>
+            <a:effectRef idx="0">
               <a:schemeClr val="accent1"/>
             </a:effectRef>
             <a:fontRef idx="minor">
@@ -10104,15 +10269,16 @@
                 <a:srgbClr val="8FBFBF"/>
               </a:solidFill>
             </a:ln>
-          </p:spPr>
-          <p:style>
-            <a:lnRef idx="2">
-              <a:schemeClr val="accent1"/>
-            </a:lnRef>
-            <a:fillRef idx="0">
-              <a:schemeClr val="accent1"/>
-            </a:fillRef>
-            <a:effectRef idx="1">
+            <a:effectLst/>
+          </p:spPr>
+          <p:style>
+            <a:lnRef idx="2">
+              <a:schemeClr val="accent1"/>
+            </a:lnRef>
+            <a:fillRef idx="0">
+              <a:schemeClr val="accent1"/>
+            </a:fillRef>
+            <a:effectRef idx="0">
               <a:schemeClr val="accent1"/>
             </a:effectRef>
             <a:fontRef idx="minor">
@@ -10139,15 +10305,16 @@
                 <a:srgbClr val="8FBFBF"/>
               </a:solidFill>
             </a:ln>
-          </p:spPr>
-          <p:style>
-            <a:lnRef idx="2">
-              <a:schemeClr val="accent1"/>
-            </a:lnRef>
-            <a:fillRef idx="0">
-              <a:schemeClr val="accent1"/>
-            </a:fillRef>
-            <a:effectRef idx="1">
+            <a:effectLst/>
+          </p:spPr>
+          <p:style>
+            <a:lnRef idx="2">
+              <a:schemeClr val="accent1"/>
+            </a:lnRef>
+            <a:fillRef idx="0">
+              <a:schemeClr val="accent1"/>
+            </a:fillRef>
+            <a:effectRef idx="0">
               <a:schemeClr val="accent1"/>
             </a:effectRef>
             <a:fontRef idx="minor">
@@ -10174,15 +10341,16 @@
                 <a:srgbClr val="8FBFBF"/>
               </a:solidFill>
             </a:ln>
-          </p:spPr>
-          <p:style>
-            <a:lnRef idx="2">
-              <a:schemeClr val="accent1"/>
-            </a:lnRef>
-            <a:fillRef idx="0">
-              <a:schemeClr val="accent1"/>
-            </a:fillRef>
-            <a:effectRef idx="1">
+            <a:effectLst/>
+          </p:spPr>
+          <p:style>
+            <a:lnRef idx="2">
+              <a:schemeClr val="accent1"/>
+            </a:lnRef>
+            <a:fillRef idx="0">
+              <a:schemeClr val="accent1"/>
+            </a:fillRef>
+            <a:effectRef idx="0">
               <a:schemeClr val="accent1"/>
             </a:effectRef>
             <a:fontRef idx="minor">
@@ -10209,15 +10377,16 @@
                 <a:srgbClr val="8FBFBF"/>
               </a:solidFill>
             </a:ln>
-          </p:spPr>
-          <p:style>
-            <a:lnRef idx="2">
-              <a:schemeClr val="accent1"/>
-            </a:lnRef>
-            <a:fillRef idx="0">
-              <a:schemeClr val="accent1"/>
-            </a:fillRef>
-            <a:effectRef idx="1">
+            <a:effectLst/>
+          </p:spPr>
+          <p:style>
+            <a:lnRef idx="2">
+              <a:schemeClr val="accent1"/>
+            </a:lnRef>
+            <a:fillRef idx="0">
+              <a:schemeClr val="accent1"/>
+            </a:fillRef>
+            <a:effectRef idx="0">
               <a:schemeClr val="accent1"/>
             </a:effectRef>
             <a:fontRef idx="minor">
@@ -10269,7 +10438,7 @@
             <a:fillRef idx="3">
               <a:schemeClr val="accent1"/>
             </a:fillRef>
-            <a:effectRef idx="2">
+            <a:effectRef idx="0">
               <a:schemeClr val="accent1"/>
             </a:effectRef>
             <a:fontRef idx="minor">
@@ -10303,15 +10472,16 @@
                 <a:srgbClr val="8FBFBF"/>
               </a:solidFill>
             </a:ln>
-          </p:spPr>
-          <p:style>
-            <a:lnRef idx="2">
-              <a:schemeClr val="accent1"/>
-            </a:lnRef>
-            <a:fillRef idx="0">
-              <a:schemeClr val="accent1"/>
-            </a:fillRef>
-            <a:effectRef idx="1">
+            <a:effectLst/>
+          </p:spPr>
+          <p:style>
+            <a:lnRef idx="2">
+              <a:schemeClr val="accent1"/>
+            </a:lnRef>
+            <a:fillRef idx="0">
+              <a:schemeClr val="accent1"/>
+            </a:fillRef>
+            <a:effectRef idx="0">
               <a:schemeClr val="accent1"/>
             </a:effectRef>
             <a:fontRef idx="minor">
@@ -10338,15 +10508,16 @@
                 <a:srgbClr val="8FBFBF"/>
               </a:solidFill>
             </a:ln>
-          </p:spPr>
-          <p:style>
-            <a:lnRef idx="2">
-              <a:schemeClr val="accent1"/>
-            </a:lnRef>
-            <a:fillRef idx="0">
-              <a:schemeClr val="accent1"/>
-            </a:fillRef>
-            <a:effectRef idx="1">
+            <a:effectLst/>
+          </p:spPr>
+          <p:style>
+            <a:lnRef idx="2">
+              <a:schemeClr val="accent1"/>
+            </a:lnRef>
+            <a:fillRef idx="0">
+              <a:schemeClr val="accent1"/>
+            </a:fillRef>
+            <a:effectRef idx="0">
               <a:schemeClr val="accent1"/>
             </a:effectRef>
             <a:fontRef idx="minor">
@@ -10373,15 +10544,16 @@
                 <a:srgbClr val="8FBFBF"/>
               </a:solidFill>
             </a:ln>
-          </p:spPr>
-          <p:style>
-            <a:lnRef idx="2">
-              <a:schemeClr val="accent1"/>
-            </a:lnRef>
-            <a:fillRef idx="0">
-              <a:schemeClr val="accent1"/>
-            </a:fillRef>
-            <a:effectRef idx="1">
+            <a:effectLst/>
+          </p:spPr>
+          <p:style>
+            <a:lnRef idx="2">
+              <a:schemeClr val="accent1"/>
+            </a:lnRef>
+            <a:fillRef idx="0">
+              <a:schemeClr val="accent1"/>
+            </a:fillRef>
+            <a:effectRef idx="0">
               <a:schemeClr val="accent1"/>
             </a:effectRef>
             <a:fontRef idx="minor">
@@ -10408,15 +10580,16 @@
                 <a:srgbClr val="8FBFBF"/>
               </a:solidFill>
             </a:ln>
-          </p:spPr>
-          <p:style>
-            <a:lnRef idx="2">
-              <a:schemeClr val="accent1"/>
-            </a:lnRef>
-            <a:fillRef idx="0">
-              <a:schemeClr val="accent1"/>
-            </a:fillRef>
-            <a:effectRef idx="1">
+            <a:effectLst/>
+          </p:spPr>
+          <p:style>
+            <a:lnRef idx="2">
+              <a:schemeClr val="accent1"/>
+            </a:lnRef>
+            <a:fillRef idx="0">
+              <a:schemeClr val="accent1"/>
+            </a:fillRef>
+            <a:effectRef idx="0">
               <a:schemeClr val="accent1"/>
             </a:effectRef>
             <a:fontRef idx="minor">
@@ -10443,15 +10616,16 @@
                 <a:srgbClr val="8FBFBF"/>
               </a:solidFill>
             </a:ln>
-          </p:spPr>
-          <p:style>
-            <a:lnRef idx="2">
-              <a:schemeClr val="accent1"/>
-            </a:lnRef>
-            <a:fillRef idx="0">
-              <a:schemeClr val="accent1"/>
-            </a:fillRef>
-            <a:effectRef idx="1">
+            <a:effectLst/>
+          </p:spPr>
+          <p:style>
+            <a:lnRef idx="2">
+              <a:schemeClr val="accent1"/>
+            </a:lnRef>
+            <a:fillRef idx="0">
+              <a:schemeClr val="accent1"/>
+            </a:fillRef>
+            <a:effectRef idx="0">
               <a:schemeClr val="accent1"/>
             </a:effectRef>
             <a:fontRef idx="minor">
@@ -10478,15 +10652,16 @@
                 <a:srgbClr val="8FBFBF"/>
               </a:solidFill>
             </a:ln>
-          </p:spPr>
-          <p:style>
-            <a:lnRef idx="2">
-              <a:schemeClr val="accent1"/>
-            </a:lnRef>
-            <a:fillRef idx="0">
-              <a:schemeClr val="accent1"/>
-            </a:fillRef>
-            <a:effectRef idx="1">
+            <a:effectLst/>
+          </p:spPr>
+          <p:style>
+            <a:lnRef idx="2">
+              <a:schemeClr val="accent1"/>
+            </a:lnRef>
+            <a:fillRef idx="0">
+              <a:schemeClr val="accent1"/>
+            </a:fillRef>
+            <a:effectRef idx="0">
               <a:schemeClr val="accent1"/>
             </a:effectRef>
             <a:fontRef idx="minor">
@@ -10513,15 +10688,16 @@
                 <a:srgbClr val="8FBFBF"/>
               </a:solidFill>
             </a:ln>
-          </p:spPr>
-          <p:style>
-            <a:lnRef idx="2">
-              <a:schemeClr val="accent1"/>
-            </a:lnRef>
-            <a:fillRef idx="0">
-              <a:schemeClr val="accent1"/>
-            </a:fillRef>
-            <a:effectRef idx="1">
+            <a:effectLst/>
+          </p:spPr>
+          <p:style>
+            <a:lnRef idx="2">
+              <a:schemeClr val="accent1"/>
+            </a:lnRef>
+            <a:fillRef idx="0">
+              <a:schemeClr val="accent1"/>
+            </a:fillRef>
+            <a:effectRef idx="0">
               <a:schemeClr val="accent1"/>
             </a:effectRef>
             <a:fontRef idx="minor">
@@ -10548,15 +10724,16 @@
                 <a:srgbClr val="8FBFBF"/>
               </a:solidFill>
             </a:ln>
-          </p:spPr>
-          <p:style>
-            <a:lnRef idx="2">
-              <a:schemeClr val="accent1"/>
-            </a:lnRef>
-            <a:fillRef idx="0">
-              <a:schemeClr val="accent1"/>
-            </a:fillRef>
-            <a:effectRef idx="1">
+            <a:effectLst/>
+          </p:spPr>
+          <p:style>
+            <a:lnRef idx="2">
+              <a:schemeClr val="accent1"/>
+            </a:lnRef>
+            <a:fillRef idx="0">
+              <a:schemeClr val="accent1"/>
+            </a:fillRef>
+            <a:effectRef idx="0">
               <a:schemeClr val="accent1"/>
             </a:effectRef>
             <a:fontRef idx="minor">
@@ -10583,15 +10760,16 @@
                 <a:srgbClr val="8FBFBF"/>
               </a:solidFill>
             </a:ln>
-          </p:spPr>
-          <p:style>
-            <a:lnRef idx="2">
-              <a:schemeClr val="accent1"/>
-            </a:lnRef>
-            <a:fillRef idx="0">
-              <a:schemeClr val="accent1"/>
-            </a:fillRef>
-            <a:effectRef idx="1">
+            <a:effectLst/>
+          </p:spPr>
+          <p:style>
+            <a:lnRef idx="2">
+              <a:schemeClr val="accent1"/>
+            </a:lnRef>
+            <a:fillRef idx="0">
+              <a:schemeClr val="accent1"/>
+            </a:fillRef>
+            <a:effectRef idx="0">
               <a:schemeClr val="accent1"/>
             </a:effectRef>
             <a:fontRef idx="minor">
@@ -10618,15 +10796,16 @@
                 <a:srgbClr val="8FBFBF"/>
               </a:solidFill>
             </a:ln>
-          </p:spPr>
-          <p:style>
-            <a:lnRef idx="2">
-              <a:schemeClr val="accent1"/>
-            </a:lnRef>
-            <a:fillRef idx="0">
-              <a:schemeClr val="accent1"/>
-            </a:fillRef>
-            <a:effectRef idx="1">
+            <a:effectLst/>
+          </p:spPr>
+          <p:style>
+            <a:lnRef idx="2">
+              <a:schemeClr val="accent1"/>
+            </a:lnRef>
+            <a:fillRef idx="0">
+              <a:schemeClr val="accent1"/>
+            </a:fillRef>
+            <a:effectRef idx="0">
               <a:schemeClr val="accent1"/>
             </a:effectRef>
             <a:fontRef idx="minor">
@@ -10653,15 +10832,16 @@
                 <a:srgbClr val="8FBFBF"/>
               </a:solidFill>
             </a:ln>
-          </p:spPr>
-          <p:style>
-            <a:lnRef idx="2">
-              <a:schemeClr val="accent1"/>
-            </a:lnRef>
-            <a:fillRef idx="0">
-              <a:schemeClr val="accent1"/>
-            </a:fillRef>
-            <a:effectRef idx="1">
+            <a:effectLst/>
+          </p:spPr>
+          <p:style>
+            <a:lnRef idx="2">
+              <a:schemeClr val="accent1"/>
+            </a:lnRef>
+            <a:fillRef idx="0">
+              <a:schemeClr val="accent1"/>
+            </a:fillRef>
+            <a:effectRef idx="0">
               <a:schemeClr val="accent1"/>
             </a:effectRef>
             <a:fontRef idx="minor">
@@ -10688,15 +10868,16 @@
                 <a:srgbClr val="8FBFBF"/>
               </a:solidFill>
             </a:ln>
-          </p:spPr>
-          <p:style>
-            <a:lnRef idx="2">
-              <a:schemeClr val="accent1"/>
-            </a:lnRef>
-            <a:fillRef idx="0">
-              <a:schemeClr val="accent1"/>
-            </a:fillRef>
-            <a:effectRef idx="1">
+            <a:effectLst/>
+          </p:spPr>
+          <p:style>
+            <a:lnRef idx="2">
+              <a:schemeClr val="accent1"/>
+            </a:lnRef>
+            <a:fillRef idx="0">
+              <a:schemeClr val="accent1"/>
+            </a:fillRef>
+            <a:effectRef idx="0">
               <a:schemeClr val="accent1"/>
             </a:effectRef>
             <a:fontRef idx="minor">
@@ -10723,15 +10904,16 @@
                 <a:srgbClr val="8FBFBF"/>
               </a:solidFill>
             </a:ln>
-          </p:spPr>
-          <p:style>
-            <a:lnRef idx="2">
-              <a:schemeClr val="accent1"/>
-            </a:lnRef>
-            <a:fillRef idx="0">
-              <a:schemeClr val="accent1"/>
-            </a:fillRef>
-            <a:effectRef idx="1">
+            <a:effectLst/>
+          </p:spPr>
+          <p:style>
+            <a:lnRef idx="2">
+              <a:schemeClr val="accent1"/>
+            </a:lnRef>
+            <a:fillRef idx="0">
+              <a:schemeClr val="accent1"/>
+            </a:fillRef>
+            <a:effectRef idx="0">
               <a:schemeClr val="accent1"/>
             </a:effectRef>
             <a:fontRef idx="minor">
@@ -10758,15 +10940,16 @@
                 <a:srgbClr val="8FBFBF"/>
               </a:solidFill>
             </a:ln>
-          </p:spPr>
-          <p:style>
-            <a:lnRef idx="2">
-              <a:schemeClr val="accent1"/>
-            </a:lnRef>
-            <a:fillRef idx="0">
-              <a:schemeClr val="accent1"/>
-            </a:fillRef>
-            <a:effectRef idx="1">
+            <a:effectLst/>
+          </p:spPr>
+          <p:style>
+            <a:lnRef idx="2">
+              <a:schemeClr val="accent1"/>
+            </a:lnRef>
+            <a:fillRef idx="0">
+              <a:schemeClr val="accent1"/>
+            </a:fillRef>
+            <a:effectRef idx="0">
               <a:schemeClr val="accent1"/>
             </a:effectRef>
             <a:fontRef idx="minor">
@@ -10818,7 +11001,7 @@
             <a:fillRef idx="3">
               <a:schemeClr val="accent1"/>
             </a:fillRef>
-            <a:effectRef idx="2">
+            <a:effectRef idx="0">
               <a:schemeClr val="accent1"/>
             </a:effectRef>
             <a:fontRef idx="minor">
@@ -10852,15 +11035,16 @@
                 <a:srgbClr val="8FBFBF"/>
               </a:solidFill>
             </a:ln>
-          </p:spPr>
-          <p:style>
-            <a:lnRef idx="2">
-              <a:schemeClr val="accent1"/>
-            </a:lnRef>
-            <a:fillRef idx="0">
-              <a:schemeClr val="accent1"/>
-            </a:fillRef>
-            <a:effectRef idx="1">
+            <a:effectLst/>
+          </p:spPr>
+          <p:style>
+            <a:lnRef idx="2">
+              <a:schemeClr val="accent1"/>
+            </a:lnRef>
+            <a:fillRef idx="0">
+              <a:schemeClr val="accent1"/>
+            </a:fillRef>
+            <a:effectRef idx="0">
               <a:schemeClr val="accent1"/>
             </a:effectRef>
             <a:fontRef idx="minor">
@@ -10887,15 +11071,16 @@
                 <a:srgbClr val="8FBFBF"/>
               </a:solidFill>
             </a:ln>
-          </p:spPr>
-          <p:style>
-            <a:lnRef idx="2">
-              <a:schemeClr val="accent1"/>
-            </a:lnRef>
-            <a:fillRef idx="0">
-              <a:schemeClr val="accent1"/>
-            </a:fillRef>
-            <a:effectRef idx="1">
+            <a:effectLst/>
+          </p:spPr>
+          <p:style>
+            <a:lnRef idx="2">
+              <a:schemeClr val="accent1"/>
+            </a:lnRef>
+            <a:fillRef idx="0">
+              <a:schemeClr val="accent1"/>
+            </a:fillRef>
+            <a:effectRef idx="0">
               <a:schemeClr val="accent1"/>
             </a:effectRef>
             <a:fontRef idx="minor">
@@ -10922,15 +11107,16 @@
                 <a:srgbClr val="8FBFBF"/>
               </a:solidFill>
             </a:ln>
-          </p:spPr>
-          <p:style>
-            <a:lnRef idx="2">
-              <a:schemeClr val="accent1"/>
-            </a:lnRef>
-            <a:fillRef idx="0">
-              <a:schemeClr val="accent1"/>
-            </a:fillRef>
-            <a:effectRef idx="1">
+            <a:effectLst/>
+          </p:spPr>
+          <p:style>
+            <a:lnRef idx="2">
+              <a:schemeClr val="accent1"/>
+            </a:lnRef>
+            <a:fillRef idx="0">
+              <a:schemeClr val="accent1"/>
+            </a:fillRef>
+            <a:effectRef idx="0">
               <a:schemeClr val="accent1"/>
             </a:effectRef>
             <a:fontRef idx="minor">
@@ -10957,15 +11143,16 @@
                 <a:srgbClr val="8FBFBF"/>
               </a:solidFill>
             </a:ln>
-          </p:spPr>
-          <p:style>
-            <a:lnRef idx="2">
-              <a:schemeClr val="accent1"/>
-            </a:lnRef>
-            <a:fillRef idx="0">
-              <a:schemeClr val="accent1"/>
-            </a:fillRef>
-            <a:effectRef idx="1">
+            <a:effectLst/>
+          </p:spPr>
+          <p:style>
+            <a:lnRef idx="2">
+              <a:schemeClr val="accent1"/>
+            </a:lnRef>
+            <a:fillRef idx="0">
+              <a:schemeClr val="accent1"/>
+            </a:fillRef>
+            <a:effectRef idx="0">
               <a:schemeClr val="accent1"/>
             </a:effectRef>
             <a:fontRef idx="minor">
@@ -10992,15 +11179,16 @@
                 <a:srgbClr val="8FBFBF"/>
               </a:solidFill>
             </a:ln>
-          </p:spPr>
-          <p:style>
-            <a:lnRef idx="2">
-              <a:schemeClr val="accent1"/>
-            </a:lnRef>
-            <a:fillRef idx="0">
-              <a:schemeClr val="accent1"/>
-            </a:fillRef>
-            <a:effectRef idx="1">
+            <a:effectLst/>
+          </p:spPr>
+          <p:style>
+            <a:lnRef idx="2">
+              <a:schemeClr val="accent1"/>
+            </a:lnRef>
+            <a:fillRef idx="0">
+              <a:schemeClr val="accent1"/>
+            </a:fillRef>
+            <a:effectRef idx="0">
               <a:schemeClr val="accent1"/>
             </a:effectRef>
             <a:fontRef idx="minor">
@@ -11027,15 +11215,16 @@
                 <a:srgbClr val="8FBFBF"/>
               </a:solidFill>
             </a:ln>
-          </p:spPr>
-          <p:style>
-            <a:lnRef idx="2">
-              <a:schemeClr val="accent1"/>
-            </a:lnRef>
-            <a:fillRef idx="0">
-              <a:schemeClr val="accent1"/>
-            </a:fillRef>
-            <a:effectRef idx="1">
+            <a:effectLst/>
+          </p:spPr>
+          <p:style>
+            <a:lnRef idx="2">
+              <a:schemeClr val="accent1"/>
+            </a:lnRef>
+            <a:fillRef idx="0">
+              <a:schemeClr val="accent1"/>
+            </a:fillRef>
+            <a:effectRef idx="0">
               <a:schemeClr val="accent1"/>
             </a:effectRef>
             <a:fontRef idx="minor">
@@ -11062,15 +11251,16 @@
                 <a:srgbClr val="8FBFBF"/>
               </a:solidFill>
             </a:ln>
-          </p:spPr>
-          <p:style>
-            <a:lnRef idx="2">
-              <a:schemeClr val="accent1"/>
-            </a:lnRef>
-            <a:fillRef idx="0">
-              <a:schemeClr val="accent1"/>
-            </a:fillRef>
-            <a:effectRef idx="1">
+            <a:effectLst/>
+          </p:spPr>
+          <p:style>
+            <a:lnRef idx="2">
+              <a:schemeClr val="accent1"/>
+            </a:lnRef>
+            <a:fillRef idx="0">
+              <a:schemeClr val="accent1"/>
+            </a:fillRef>
+            <a:effectRef idx="0">
               <a:schemeClr val="accent1"/>
             </a:effectRef>
             <a:fontRef idx="minor">
@@ -11097,15 +11287,16 @@
                 <a:srgbClr val="8FBFBF"/>
               </a:solidFill>
             </a:ln>
-          </p:spPr>
-          <p:style>
-            <a:lnRef idx="2">
-              <a:schemeClr val="accent1"/>
-            </a:lnRef>
-            <a:fillRef idx="0">
-              <a:schemeClr val="accent1"/>
-            </a:fillRef>
-            <a:effectRef idx="1">
+            <a:effectLst/>
+          </p:spPr>
+          <p:style>
+            <a:lnRef idx="2">
+              <a:schemeClr val="accent1"/>
+            </a:lnRef>
+            <a:fillRef idx="0">
+              <a:schemeClr val="accent1"/>
+            </a:fillRef>
+            <a:effectRef idx="0">
               <a:schemeClr val="accent1"/>
             </a:effectRef>
             <a:fontRef idx="minor">
@@ -11132,15 +11323,16 @@
                 <a:srgbClr val="8FBFBF"/>
               </a:solidFill>
             </a:ln>
-          </p:spPr>
-          <p:style>
-            <a:lnRef idx="2">
-              <a:schemeClr val="accent1"/>
-            </a:lnRef>
-            <a:fillRef idx="0">
-              <a:schemeClr val="accent1"/>
-            </a:fillRef>
-            <a:effectRef idx="1">
+            <a:effectLst/>
+          </p:spPr>
+          <p:style>
+            <a:lnRef idx="2">
+              <a:schemeClr val="accent1"/>
+            </a:lnRef>
+            <a:fillRef idx="0">
+              <a:schemeClr val="accent1"/>
+            </a:fillRef>
+            <a:effectRef idx="0">
               <a:schemeClr val="accent1"/>
             </a:effectRef>
             <a:fontRef idx="minor">
@@ -11167,15 +11359,16 @@
                 <a:srgbClr val="8FBFBF"/>
               </a:solidFill>
             </a:ln>
-          </p:spPr>
-          <p:style>
-            <a:lnRef idx="2">
-              <a:schemeClr val="accent1"/>
-            </a:lnRef>
-            <a:fillRef idx="0">
-              <a:schemeClr val="accent1"/>
-            </a:fillRef>
-            <a:effectRef idx="1">
+            <a:effectLst/>
+          </p:spPr>
+          <p:style>
+            <a:lnRef idx="2">
+              <a:schemeClr val="accent1"/>
+            </a:lnRef>
+            <a:fillRef idx="0">
+              <a:schemeClr val="accent1"/>
+            </a:fillRef>
+            <a:effectRef idx="0">
               <a:schemeClr val="accent1"/>
             </a:effectRef>
             <a:fontRef idx="minor">
@@ -11202,15 +11395,16 @@
                 <a:srgbClr val="8FBFBF"/>
               </a:solidFill>
             </a:ln>
-          </p:spPr>
-          <p:style>
-            <a:lnRef idx="2">
-              <a:schemeClr val="accent1"/>
-            </a:lnRef>
-            <a:fillRef idx="0">
-              <a:schemeClr val="accent1"/>
-            </a:fillRef>
-            <a:effectRef idx="1">
+            <a:effectLst/>
+          </p:spPr>
+          <p:style>
+            <a:lnRef idx="2">
+              <a:schemeClr val="accent1"/>
+            </a:lnRef>
+            <a:fillRef idx="0">
+              <a:schemeClr val="accent1"/>
+            </a:fillRef>
+            <a:effectRef idx="0">
               <a:schemeClr val="accent1"/>
             </a:effectRef>
             <a:fontRef idx="minor">
@@ -11237,15 +11431,16 @@
                 <a:srgbClr val="8FBFBF"/>
               </a:solidFill>
             </a:ln>
-          </p:spPr>
-          <p:style>
-            <a:lnRef idx="2">
-              <a:schemeClr val="accent1"/>
-            </a:lnRef>
-            <a:fillRef idx="0">
-              <a:schemeClr val="accent1"/>
-            </a:fillRef>
-            <a:effectRef idx="1">
+            <a:effectLst/>
+          </p:spPr>
+          <p:style>
+            <a:lnRef idx="2">
+              <a:schemeClr val="accent1"/>
+            </a:lnRef>
+            <a:fillRef idx="0">
+              <a:schemeClr val="accent1"/>
+            </a:fillRef>
+            <a:effectRef idx="0">
               <a:schemeClr val="accent1"/>
             </a:effectRef>
             <a:fontRef idx="minor">
@@ -11272,15 +11467,16 @@
                 <a:srgbClr val="8FBFBF"/>
               </a:solidFill>
             </a:ln>
-          </p:spPr>
-          <p:style>
-            <a:lnRef idx="2">
-              <a:schemeClr val="accent1"/>
-            </a:lnRef>
-            <a:fillRef idx="0">
-              <a:schemeClr val="accent1"/>
-            </a:fillRef>
-            <a:effectRef idx="1">
+            <a:effectLst/>
+          </p:spPr>
+          <p:style>
+            <a:lnRef idx="2">
+              <a:schemeClr val="accent1"/>
+            </a:lnRef>
+            <a:fillRef idx="0">
+              <a:schemeClr val="accent1"/>
+            </a:fillRef>
+            <a:effectRef idx="0">
               <a:schemeClr val="accent1"/>
             </a:effectRef>
             <a:fontRef idx="minor">
@@ -11307,15 +11503,16 @@
                 <a:srgbClr val="8FBFBF"/>
               </a:solidFill>
             </a:ln>
-          </p:spPr>
-          <p:style>
-            <a:lnRef idx="2">
-              <a:schemeClr val="accent1"/>
-            </a:lnRef>
-            <a:fillRef idx="0">
-              <a:schemeClr val="accent1"/>
-            </a:fillRef>
-            <a:effectRef idx="1">
+            <a:effectLst/>
+          </p:spPr>
+          <p:style>
+            <a:lnRef idx="2">
+              <a:schemeClr val="accent1"/>
+            </a:lnRef>
+            <a:fillRef idx="0">
+              <a:schemeClr val="accent1"/>
+            </a:fillRef>
+            <a:effectRef idx="0">
               <a:schemeClr val="accent1"/>
             </a:effectRef>
             <a:fontRef idx="minor">

--- a/gakkyu/tegami/pptx/Y2.pptx
+++ b/gakkyu/tegami/pptx/Y2.pptx
@@ -3568,44 +3568,9 @@
           </a:p>
         </p:txBody>
       </p:sp>
-      <p:sp>
-        <p:nvSpPr>
-          <p:cNvPr id="3" name="名前欄"/>
-          <p:cNvSpPr txBox="1"/>
-          <p:nvPr/>
-        </p:nvSpPr>
-        <p:spPr>
-          <a:xfrm>
-            <a:off x="3600000" y="475200"/>
-            <a:ext cx="3420000" cy="252000"/>
-          </a:xfrm>
-          <a:prstGeom prst="rect">
-            <a:avLst/>
-          </a:prstGeom>
-          <a:noFill/>
-        </p:spPr>
-        <p:txBody>
-          <a:bodyPr wrap="square" lIns="0" rIns="0" tIns="0" bIns="0" anchor="t">
-            <a:spAutoFit/>
-          </a:bodyPr>
-          <a:lstStyle/>
-          <a:p>
-            <a:pPr algn="r"/>
-            <a:r>
-              <a:rPr sz="1000" b="0">
-                <a:solidFill>
-                  <a:srgbClr val="38424B"/>
-                </a:solidFill>
-                <a:latin typeface="UD デジタル 教科書体 N-R"/>
-              </a:rPr>
-              <a:t>（　　年　　組　　名前　　　　　　　　）</a:t>
-            </a:r>
-          </a:p>
-        </p:txBody>
-      </p:sp>
       <p:cxnSp>
         <p:nvCxnSpPr>
-          <p:cNvPr id="4" name="見出しの線"/>
+          <p:cNvPr id="3" name="見出しの線"/>
           <p:cNvCxnSpPr/>
           <p:nvPr/>
         </p:nvCxnSpPr>
@@ -3641,7 +3606,7 @@
       </p:cxnSp>
       <p:grpSp>
         <p:nvGrpSpPr>
-          <p:cNvPr id="5" name="1行目"/>
+          <p:cNvPr id="4" name="1行目"/>
           <p:cNvGrpSpPr/>
           <p:nvPr/>
         </p:nvGrpSpPr>
@@ -3655,7 +3620,7 @@
         </p:grpSpPr>
         <p:sp>
           <p:nvSpPr>
-            <p:cNvPr id="6" name="外わく"/>
+            <p:cNvPr id="5" name="外わく"/>
             <p:cNvSpPr/>
             <p:nvPr/>
           </p:nvSpPr>
@@ -3699,7 +3664,7 @@
         </p:sp>
         <p:cxnSp>
           <p:nvCxnSpPr>
-            <p:cNvPr id="7" name="マスの線 1"/>
+            <p:cNvPr id="6" name="マスの線 1"/>
             <p:cNvCxnSpPr/>
             <p:nvPr/>
           </p:nvCxnSpPr>
@@ -3735,7 +3700,7 @@
         </p:cxnSp>
         <p:cxnSp>
           <p:nvCxnSpPr>
-            <p:cNvPr id="8" name="マスの線 2"/>
+            <p:cNvPr id="7" name="マスの線 2"/>
             <p:cNvCxnSpPr/>
             <p:nvPr/>
           </p:nvCxnSpPr>
@@ -3771,7 +3736,7 @@
         </p:cxnSp>
         <p:cxnSp>
           <p:nvCxnSpPr>
-            <p:cNvPr id="9" name="マスの線 3"/>
+            <p:cNvPr id="8" name="マスの線 3"/>
             <p:cNvCxnSpPr/>
             <p:nvPr/>
           </p:nvCxnSpPr>
@@ -3807,7 +3772,7 @@
         </p:cxnSp>
         <p:cxnSp>
           <p:nvCxnSpPr>
-            <p:cNvPr id="10" name="マスの線 4"/>
+            <p:cNvPr id="9" name="マスの線 4"/>
             <p:cNvCxnSpPr/>
             <p:nvPr/>
           </p:nvCxnSpPr>
@@ -3843,7 +3808,7 @@
         </p:cxnSp>
         <p:cxnSp>
           <p:nvCxnSpPr>
-            <p:cNvPr id="11" name="マスの線 5"/>
+            <p:cNvPr id="10" name="マスの線 5"/>
             <p:cNvCxnSpPr/>
             <p:nvPr/>
           </p:nvCxnSpPr>
@@ -3879,7 +3844,7 @@
         </p:cxnSp>
         <p:cxnSp>
           <p:nvCxnSpPr>
-            <p:cNvPr id="12" name="マスの線 6"/>
+            <p:cNvPr id="11" name="マスの線 6"/>
             <p:cNvCxnSpPr/>
             <p:nvPr/>
           </p:nvCxnSpPr>
@@ -3915,7 +3880,7 @@
         </p:cxnSp>
         <p:cxnSp>
           <p:nvCxnSpPr>
-            <p:cNvPr id="13" name="マスの線 7"/>
+            <p:cNvPr id="12" name="マスの線 7"/>
             <p:cNvCxnSpPr/>
             <p:nvPr/>
           </p:nvCxnSpPr>
@@ -3951,7 +3916,7 @@
         </p:cxnSp>
         <p:cxnSp>
           <p:nvCxnSpPr>
-            <p:cNvPr id="14" name="マスの線 8"/>
+            <p:cNvPr id="13" name="マスの線 8"/>
             <p:cNvCxnSpPr/>
             <p:nvPr/>
           </p:nvCxnSpPr>
@@ -3987,7 +3952,7 @@
         </p:cxnSp>
         <p:cxnSp>
           <p:nvCxnSpPr>
-            <p:cNvPr id="15" name="マスの線 9"/>
+            <p:cNvPr id="14" name="マスの線 9"/>
             <p:cNvCxnSpPr/>
             <p:nvPr/>
           </p:nvCxnSpPr>
@@ -4023,7 +3988,7 @@
         </p:cxnSp>
         <p:cxnSp>
           <p:nvCxnSpPr>
-            <p:cNvPr id="16" name="マスの線 10"/>
+            <p:cNvPr id="15" name="マスの線 10"/>
             <p:cNvCxnSpPr/>
             <p:nvPr/>
           </p:nvCxnSpPr>
@@ -4059,7 +4024,7 @@
         </p:cxnSp>
         <p:cxnSp>
           <p:nvCxnSpPr>
-            <p:cNvPr id="17" name="マスの線 11"/>
+            <p:cNvPr id="16" name="マスの線 11"/>
             <p:cNvCxnSpPr/>
             <p:nvPr/>
           </p:nvCxnSpPr>
@@ -4095,7 +4060,7 @@
         </p:cxnSp>
         <p:cxnSp>
           <p:nvCxnSpPr>
-            <p:cNvPr id="18" name="マスの線 12"/>
+            <p:cNvPr id="17" name="マスの線 12"/>
             <p:cNvCxnSpPr/>
             <p:nvPr/>
           </p:nvCxnSpPr>
@@ -4131,7 +4096,7 @@
         </p:cxnSp>
         <p:cxnSp>
           <p:nvCxnSpPr>
-            <p:cNvPr id="19" name="マスの線 13"/>
+            <p:cNvPr id="18" name="マスの線 13"/>
             <p:cNvCxnSpPr/>
             <p:nvPr/>
           </p:nvCxnSpPr>
@@ -4167,7 +4132,7 @@
         </p:cxnSp>
         <p:cxnSp>
           <p:nvCxnSpPr>
-            <p:cNvPr id="20" name="マスの線 14"/>
+            <p:cNvPr id="19" name="マスの線 14"/>
             <p:cNvCxnSpPr/>
             <p:nvPr/>
           </p:nvCxnSpPr>
@@ -4204,7 +4169,7 @@
       </p:grpSp>
       <p:grpSp>
         <p:nvGrpSpPr>
-          <p:cNvPr id="21" name="2行目"/>
+          <p:cNvPr id="20" name="2行目"/>
           <p:cNvGrpSpPr/>
           <p:nvPr/>
         </p:nvGrpSpPr>
@@ -4218,7 +4183,7 @@
         </p:grpSpPr>
         <p:sp>
           <p:nvSpPr>
-            <p:cNvPr id="22" name="外わく"/>
+            <p:cNvPr id="21" name="外わく"/>
             <p:cNvSpPr/>
             <p:nvPr/>
           </p:nvSpPr>
@@ -4262,7 +4227,7 @@
         </p:sp>
         <p:cxnSp>
           <p:nvCxnSpPr>
-            <p:cNvPr id="23" name="マスの線 1"/>
+            <p:cNvPr id="22" name="マスの線 1"/>
             <p:cNvCxnSpPr/>
             <p:nvPr/>
           </p:nvCxnSpPr>
@@ -4298,7 +4263,7 @@
         </p:cxnSp>
         <p:cxnSp>
           <p:nvCxnSpPr>
-            <p:cNvPr id="24" name="マスの線 2"/>
+            <p:cNvPr id="23" name="マスの線 2"/>
             <p:cNvCxnSpPr/>
             <p:nvPr/>
           </p:nvCxnSpPr>
@@ -4334,7 +4299,7 @@
         </p:cxnSp>
         <p:cxnSp>
           <p:nvCxnSpPr>
-            <p:cNvPr id="25" name="マスの線 3"/>
+            <p:cNvPr id="24" name="マスの線 3"/>
             <p:cNvCxnSpPr/>
             <p:nvPr/>
           </p:nvCxnSpPr>
@@ -4370,7 +4335,7 @@
         </p:cxnSp>
         <p:cxnSp>
           <p:nvCxnSpPr>
-            <p:cNvPr id="26" name="マスの線 4"/>
+            <p:cNvPr id="25" name="マスの線 4"/>
             <p:cNvCxnSpPr/>
             <p:nvPr/>
           </p:nvCxnSpPr>
@@ -4406,7 +4371,7 @@
         </p:cxnSp>
         <p:cxnSp>
           <p:nvCxnSpPr>
-            <p:cNvPr id="27" name="マスの線 5"/>
+            <p:cNvPr id="26" name="マスの線 5"/>
             <p:cNvCxnSpPr/>
             <p:nvPr/>
           </p:nvCxnSpPr>
@@ -4442,7 +4407,7 @@
         </p:cxnSp>
         <p:cxnSp>
           <p:nvCxnSpPr>
-            <p:cNvPr id="28" name="マスの線 6"/>
+            <p:cNvPr id="27" name="マスの線 6"/>
             <p:cNvCxnSpPr/>
             <p:nvPr/>
           </p:nvCxnSpPr>
@@ -4478,7 +4443,7 @@
         </p:cxnSp>
         <p:cxnSp>
           <p:nvCxnSpPr>
-            <p:cNvPr id="29" name="マスの線 7"/>
+            <p:cNvPr id="28" name="マスの線 7"/>
             <p:cNvCxnSpPr/>
             <p:nvPr/>
           </p:nvCxnSpPr>
@@ -4514,7 +4479,7 @@
         </p:cxnSp>
         <p:cxnSp>
           <p:nvCxnSpPr>
-            <p:cNvPr id="30" name="マスの線 8"/>
+            <p:cNvPr id="29" name="マスの線 8"/>
             <p:cNvCxnSpPr/>
             <p:nvPr/>
           </p:nvCxnSpPr>
@@ -4550,7 +4515,7 @@
         </p:cxnSp>
         <p:cxnSp>
           <p:nvCxnSpPr>
-            <p:cNvPr id="31" name="マスの線 9"/>
+            <p:cNvPr id="30" name="マスの線 9"/>
             <p:cNvCxnSpPr/>
             <p:nvPr/>
           </p:nvCxnSpPr>
@@ -4586,7 +4551,7 @@
         </p:cxnSp>
         <p:cxnSp>
           <p:nvCxnSpPr>
-            <p:cNvPr id="32" name="マスの線 10"/>
+            <p:cNvPr id="31" name="マスの線 10"/>
             <p:cNvCxnSpPr/>
             <p:nvPr/>
           </p:nvCxnSpPr>
@@ -4622,7 +4587,7 @@
         </p:cxnSp>
         <p:cxnSp>
           <p:nvCxnSpPr>
-            <p:cNvPr id="33" name="マスの線 11"/>
+            <p:cNvPr id="32" name="マスの線 11"/>
             <p:cNvCxnSpPr/>
             <p:nvPr/>
           </p:nvCxnSpPr>
@@ -4658,7 +4623,7 @@
         </p:cxnSp>
         <p:cxnSp>
           <p:nvCxnSpPr>
-            <p:cNvPr id="34" name="マスの線 12"/>
+            <p:cNvPr id="33" name="マスの線 12"/>
             <p:cNvCxnSpPr/>
             <p:nvPr/>
           </p:nvCxnSpPr>
@@ -4694,7 +4659,7 @@
         </p:cxnSp>
         <p:cxnSp>
           <p:nvCxnSpPr>
-            <p:cNvPr id="35" name="マスの線 13"/>
+            <p:cNvPr id="34" name="マスの線 13"/>
             <p:cNvCxnSpPr/>
             <p:nvPr/>
           </p:nvCxnSpPr>
@@ -4730,7 +4695,7 @@
         </p:cxnSp>
         <p:cxnSp>
           <p:nvCxnSpPr>
-            <p:cNvPr id="36" name="マスの線 14"/>
+            <p:cNvPr id="35" name="マスの線 14"/>
             <p:cNvCxnSpPr/>
             <p:nvPr/>
           </p:nvCxnSpPr>
@@ -4767,7 +4732,7 @@
       </p:grpSp>
       <p:grpSp>
         <p:nvGrpSpPr>
-          <p:cNvPr id="37" name="3行目"/>
+          <p:cNvPr id="36" name="3行目"/>
           <p:cNvGrpSpPr/>
           <p:nvPr/>
         </p:nvGrpSpPr>
@@ -4781,7 +4746,7 @@
         </p:grpSpPr>
         <p:sp>
           <p:nvSpPr>
-            <p:cNvPr id="38" name="外わく"/>
+            <p:cNvPr id="37" name="外わく"/>
             <p:cNvSpPr/>
             <p:nvPr/>
           </p:nvSpPr>
@@ -4825,7 +4790,7 @@
         </p:sp>
         <p:cxnSp>
           <p:nvCxnSpPr>
-            <p:cNvPr id="39" name="マスの線 1"/>
+            <p:cNvPr id="38" name="マスの線 1"/>
             <p:cNvCxnSpPr/>
             <p:nvPr/>
           </p:nvCxnSpPr>
@@ -4861,7 +4826,7 @@
         </p:cxnSp>
         <p:cxnSp>
           <p:nvCxnSpPr>
-            <p:cNvPr id="40" name="マスの線 2"/>
+            <p:cNvPr id="39" name="マスの線 2"/>
             <p:cNvCxnSpPr/>
             <p:nvPr/>
           </p:nvCxnSpPr>
@@ -4897,7 +4862,7 @@
         </p:cxnSp>
         <p:cxnSp>
           <p:nvCxnSpPr>
-            <p:cNvPr id="41" name="マスの線 3"/>
+            <p:cNvPr id="40" name="マスの線 3"/>
             <p:cNvCxnSpPr/>
             <p:nvPr/>
           </p:nvCxnSpPr>
@@ -4933,7 +4898,7 @@
         </p:cxnSp>
         <p:cxnSp>
           <p:nvCxnSpPr>
-            <p:cNvPr id="42" name="マスの線 4"/>
+            <p:cNvPr id="41" name="マスの線 4"/>
             <p:cNvCxnSpPr/>
             <p:nvPr/>
           </p:nvCxnSpPr>
@@ -4969,7 +4934,7 @@
         </p:cxnSp>
         <p:cxnSp>
           <p:nvCxnSpPr>
-            <p:cNvPr id="43" name="マスの線 5"/>
+            <p:cNvPr id="42" name="マスの線 5"/>
             <p:cNvCxnSpPr/>
             <p:nvPr/>
           </p:nvCxnSpPr>
@@ -5005,7 +4970,7 @@
         </p:cxnSp>
         <p:cxnSp>
           <p:nvCxnSpPr>
-            <p:cNvPr id="44" name="マスの線 6"/>
+            <p:cNvPr id="43" name="マスの線 6"/>
             <p:cNvCxnSpPr/>
             <p:nvPr/>
           </p:nvCxnSpPr>
@@ -5041,7 +5006,7 @@
         </p:cxnSp>
         <p:cxnSp>
           <p:nvCxnSpPr>
-            <p:cNvPr id="45" name="マスの線 7"/>
+            <p:cNvPr id="44" name="マスの線 7"/>
             <p:cNvCxnSpPr/>
             <p:nvPr/>
           </p:nvCxnSpPr>
@@ -5077,7 +5042,7 @@
         </p:cxnSp>
         <p:cxnSp>
           <p:nvCxnSpPr>
-            <p:cNvPr id="46" name="マスの線 8"/>
+            <p:cNvPr id="45" name="マスの線 8"/>
             <p:cNvCxnSpPr/>
             <p:nvPr/>
           </p:nvCxnSpPr>
@@ -5113,7 +5078,7 @@
         </p:cxnSp>
         <p:cxnSp>
           <p:nvCxnSpPr>
-            <p:cNvPr id="47" name="マスの線 9"/>
+            <p:cNvPr id="46" name="マスの線 9"/>
             <p:cNvCxnSpPr/>
             <p:nvPr/>
           </p:nvCxnSpPr>
@@ -5149,7 +5114,7 @@
         </p:cxnSp>
         <p:cxnSp>
           <p:nvCxnSpPr>
-            <p:cNvPr id="48" name="マスの線 10"/>
+            <p:cNvPr id="47" name="マスの線 10"/>
             <p:cNvCxnSpPr/>
             <p:nvPr/>
           </p:nvCxnSpPr>
@@ -5185,7 +5150,7 @@
         </p:cxnSp>
         <p:cxnSp>
           <p:nvCxnSpPr>
-            <p:cNvPr id="49" name="マスの線 11"/>
+            <p:cNvPr id="48" name="マスの線 11"/>
             <p:cNvCxnSpPr/>
             <p:nvPr/>
           </p:nvCxnSpPr>
@@ -5221,7 +5186,7 @@
         </p:cxnSp>
         <p:cxnSp>
           <p:nvCxnSpPr>
-            <p:cNvPr id="50" name="マスの線 12"/>
+            <p:cNvPr id="49" name="マスの線 12"/>
             <p:cNvCxnSpPr/>
             <p:nvPr/>
           </p:nvCxnSpPr>
@@ -5257,7 +5222,7 @@
         </p:cxnSp>
         <p:cxnSp>
           <p:nvCxnSpPr>
-            <p:cNvPr id="51" name="マスの線 13"/>
+            <p:cNvPr id="50" name="マスの線 13"/>
             <p:cNvCxnSpPr/>
             <p:nvPr/>
           </p:nvCxnSpPr>
@@ -5293,7 +5258,7 @@
         </p:cxnSp>
         <p:cxnSp>
           <p:nvCxnSpPr>
-            <p:cNvPr id="52" name="マスの線 14"/>
+            <p:cNvPr id="51" name="マスの線 14"/>
             <p:cNvCxnSpPr/>
             <p:nvPr/>
           </p:nvCxnSpPr>
@@ -5330,7 +5295,7 @@
       </p:grpSp>
       <p:grpSp>
         <p:nvGrpSpPr>
-          <p:cNvPr id="53" name="4行目"/>
+          <p:cNvPr id="52" name="4行目"/>
           <p:cNvGrpSpPr/>
           <p:nvPr/>
         </p:nvGrpSpPr>
@@ -5344,7 +5309,7 @@
         </p:grpSpPr>
         <p:sp>
           <p:nvSpPr>
-            <p:cNvPr id="54" name="外わく"/>
+            <p:cNvPr id="53" name="外わく"/>
             <p:cNvSpPr/>
             <p:nvPr/>
           </p:nvSpPr>
@@ -5388,7 +5353,7 @@
         </p:sp>
         <p:cxnSp>
           <p:nvCxnSpPr>
-            <p:cNvPr id="55" name="マスの線 1"/>
+            <p:cNvPr id="54" name="マスの線 1"/>
             <p:cNvCxnSpPr/>
             <p:nvPr/>
           </p:nvCxnSpPr>
@@ -5424,7 +5389,7 @@
         </p:cxnSp>
         <p:cxnSp>
           <p:nvCxnSpPr>
-            <p:cNvPr id="56" name="マスの線 2"/>
+            <p:cNvPr id="55" name="マスの線 2"/>
             <p:cNvCxnSpPr/>
             <p:nvPr/>
           </p:nvCxnSpPr>
@@ -5460,7 +5425,7 @@
         </p:cxnSp>
         <p:cxnSp>
           <p:nvCxnSpPr>
-            <p:cNvPr id="57" name="マスの線 3"/>
+            <p:cNvPr id="56" name="マスの線 3"/>
             <p:cNvCxnSpPr/>
             <p:nvPr/>
           </p:nvCxnSpPr>
@@ -5496,7 +5461,7 @@
         </p:cxnSp>
         <p:cxnSp>
           <p:nvCxnSpPr>
-            <p:cNvPr id="58" name="マスの線 4"/>
+            <p:cNvPr id="57" name="マスの線 4"/>
             <p:cNvCxnSpPr/>
             <p:nvPr/>
           </p:nvCxnSpPr>
@@ -5532,7 +5497,7 @@
         </p:cxnSp>
         <p:cxnSp>
           <p:nvCxnSpPr>
-            <p:cNvPr id="59" name="マスの線 5"/>
+            <p:cNvPr id="58" name="マスの線 5"/>
             <p:cNvCxnSpPr/>
             <p:nvPr/>
           </p:nvCxnSpPr>
@@ -5568,7 +5533,7 @@
         </p:cxnSp>
         <p:cxnSp>
           <p:nvCxnSpPr>
-            <p:cNvPr id="60" name="マスの線 6"/>
+            <p:cNvPr id="59" name="マスの線 6"/>
             <p:cNvCxnSpPr/>
             <p:nvPr/>
           </p:nvCxnSpPr>
@@ -5604,7 +5569,7 @@
         </p:cxnSp>
         <p:cxnSp>
           <p:nvCxnSpPr>
-            <p:cNvPr id="61" name="マスの線 7"/>
+            <p:cNvPr id="60" name="マスの線 7"/>
             <p:cNvCxnSpPr/>
             <p:nvPr/>
           </p:nvCxnSpPr>
@@ -5640,7 +5605,7 @@
         </p:cxnSp>
         <p:cxnSp>
           <p:nvCxnSpPr>
-            <p:cNvPr id="62" name="マスの線 8"/>
+            <p:cNvPr id="61" name="マスの線 8"/>
             <p:cNvCxnSpPr/>
             <p:nvPr/>
           </p:nvCxnSpPr>
@@ -5676,7 +5641,7 @@
         </p:cxnSp>
         <p:cxnSp>
           <p:nvCxnSpPr>
-            <p:cNvPr id="63" name="マスの線 9"/>
+            <p:cNvPr id="62" name="マスの線 9"/>
             <p:cNvCxnSpPr/>
             <p:nvPr/>
           </p:nvCxnSpPr>
@@ -5712,7 +5677,7 @@
         </p:cxnSp>
         <p:cxnSp>
           <p:nvCxnSpPr>
-            <p:cNvPr id="64" name="マスの線 10"/>
+            <p:cNvPr id="63" name="マスの線 10"/>
             <p:cNvCxnSpPr/>
             <p:nvPr/>
           </p:nvCxnSpPr>
@@ -5748,7 +5713,7 @@
         </p:cxnSp>
         <p:cxnSp>
           <p:nvCxnSpPr>
-            <p:cNvPr id="65" name="マスの線 11"/>
+            <p:cNvPr id="64" name="マスの線 11"/>
             <p:cNvCxnSpPr/>
             <p:nvPr/>
           </p:nvCxnSpPr>
@@ -5784,7 +5749,7 @@
         </p:cxnSp>
         <p:cxnSp>
           <p:nvCxnSpPr>
-            <p:cNvPr id="66" name="マスの線 12"/>
+            <p:cNvPr id="65" name="マスの線 12"/>
             <p:cNvCxnSpPr/>
             <p:nvPr/>
           </p:nvCxnSpPr>
@@ -5820,7 +5785,7 @@
         </p:cxnSp>
         <p:cxnSp>
           <p:nvCxnSpPr>
-            <p:cNvPr id="67" name="マスの線 13"/>
+            <p:cNvPr id="66" name="マスの線 13"/>
             <p:cNvCxnSpPr/>
             <p:nvPr/>
           </p:nvCxnSpPr>
@@ -5856,7 +5821,7 @@
         </p:cxnSp>
         <p:cxnSp>
           <p:nvCxnSpPr>
-            <p:cNvPr id="68" name="マスの線 14"/>
+            <p:cNvPr id="67" name="マスの線 14"/>
             <p:cNvCxnSpPr/>
             <p:nvPr/>
           </p:nvCxnSpPr>
@@ -5893,7 +5858,7 @@
       </p:grpSp>
       <p:grpSp>
         <p:nvGrpSpPr>
-          <p:cNvPr id="69" name="5行目"/>
+          <p:cNvPr id="68" name="5行目"/>
           <p:cNvGrpSpPr/>
           <p:nvPr/>
         </p:nvGrpSpPr>
@@ -5907,7 +5872,7 @@
         </p:grpSpPr>
         <p:sp>
           <p:nvSpPr>
-            <p:cNvPr id="70" name="外わく"/>
+            <p:cNvPr id="69" name="外わく"/>
             <p:cNvSpPr/>
             <p:nvPr/>
           </p:nvSpPr>
@@ -5951,7 +5916,7 @@
         </p:sp>
         <p:cxnSp>
           <p:nvCxnSpPr>
-            <p:cNvPr id="71" name="マスの線 1"/>
+            <p:cNvPr id="70" name="マスの線 1"/>
             <p:cNvCxnSpPr/>
             <p:nvPr/>
           </p:nvCxnSpPr>
@@ -5987,7 +5952,7 @@
         </p:cxnSp>
         <p:cxnSp>
           <p:nvCxnSpPr>
-            <p:cNvPr id="72" name="マスの線 2"/>
+            <p:cNvPr id="71" name="マスの線 2"/>
             <p:cNvCxnSpPr/>
             <p:nvPr/>
           </p:nvCxnSpPr>
@@ -6023,7 +5988,7 @@
         </p:cxnSp>
         <p:cxnSp>
           <p:nvCxnSpPr>
-            <p:cNvPr id="73" name="マスの線 3"/>
+            <p:cNvPr id="72" name="マスの線 3"/>
             <p:cNvCxnSpPr/>
             <p:nvPr/>
           </p:nvCxnSpPr>
@@ -6059,7 +6024,7 @@
         </p:cxnSp>
         <p:cxnSp>
           <p:nvCxnSpPr>
-            <p:cNvPr id="74" name="マスの線 4"/>
+            <p:cNvPr id="73" name="マスの線 4"/>
             <p:cNvCxnSpPr/>
             <p:nvPr/>
           </p:nvCxnSpPr>
@@ -6095,7 +6060,7 @@
         </p:cxnSp>
         <p:cxnSp>
           <p:nvCxnSpPr>
-            <p:cNvPr id="75" name="マスの線 5"/>
+            <p:cNvPr id="74" name="マスの線 5"/>
             <p:cNvCxnSpPr/>
             <p:nvPr/>
           </p:nvCxnSpPr>
@@ -6131,7 +6096,7 @@
         </p:cxnSp>
         <p:cxnSp>
           <p:nvCxnSpPr>
-            <p:cNvPr id="76" name="マスの線 6"/>
+            <p:cNvPr id="75" name="マスの線 6"/>
             <p:cNvCxnSpPr/>
             <p:nvPr/>
           </p:nvCxnSpPr>
@@ -6167,7 +6132,7 @@
         </p:cxnSp>
         <p:cxnSp>
           <p:nvCxnSpPr>
-            <p:cNvPr id="77" name="マスの線 7"/>
+            <p:cNvPr id="76" name="マスの線 7"/>
             <p:cNvCxnSpPr/>
             <p:nvPr/>
           </p:nvCxnSpPr>
@@ -6203,7 +6168,7 @@
         </p:cxnSp>
         <p:cxnSp>
           <p:nvCxnSpPr>
-            <p:cNvPr id="78" name="マスの線 8"/>
+            <p:cNvPr id="77" name="マスの線 8"/>
             <p:cNvCxnSpPr/>
             <p:nvPr/>
           </p:nvCxnSpPr>
@@ -6239,7 +6204,7 @@
         </p:cxnSp>
         <p:cxnSp>
           <p:nvCxnSpPr>
-            <p:cNvPr id="79" name="マスの線 9"/>
+            <p:cNvPr id="78" name="マスの線 9"/>
             <p:cNvCxnSpPr/>
             <p:nvPr/>
           </p:nvCxnSpPr>
@@ -6275,7 +6240,7 @@
         </p:cxnSp>
         <p:cxnSp>
           <p:nvCxnSpPr>
-            <p:cNvPr id="80" name="マスの線 10"/>
+            <p:cNvPr id="79" name="マスの線 10"/>
             <p:cNvCxnSpPr/>
             <p:nvPr/>
           </p:nvCxnSpPr>
@@ -6311,7 +6276,7 @@
         </p:cxnSp>
         <p:cxnSp>
           <p:nvCxnSpPr>
-            <p:cNvPr id="81" name="マスの線 11"/>
+            <p:cNvPr id="80" name="マスの線 11"/>
             <p:cNvCxnSpPr/>
             <p:nvPr/>
           </p:nvCxnSpPr>
@@ -6347,7 +6312,7 @@
         </p:cxnSp>
         <p:cxnSp>
           <p:nvCxnSpPr>
-            <p:cNvPr id="82" name="マスの線 12"/>
+            <p:cNvPr id="81" name="マスの線 12"/>
             <p:cNvCxnSpPr/>
             <p:nvPr/>
           </p:nvCxnSpPr>
@@ -6383,7 +6348,7 @@
         </p:cxnSp>
         <p:cxnSp>
           <p:nvCxnSpPr>
-            <p:cNvPr id="83" name="マスの線 13"/>
+            <p:cNvPr id="82" name="マスの線 13"/>
             <p:cNvCxnSpPr/>
             <p:nvPr/>
           </p:nvCxnSpPr>
@@ -6419,7 +6384,7 @@
         </p:cxnSp>
         <p:cxnSp>
           <p:nvCxnSpPr>
-            <p:cNvPr id="84" name="マスの線 14"/>
+            <p:cNvPr id="83" name="マスの線 14"/>
             <p:cNvCxnSpPr/>
             <p:nvPr/>
           </p:nvCxnSpPr>
@@ -6456,7 +6421,7 @@
       </p:grpSp>
       <p:grpSp>
         <p:nvGrpSpPr>
-          <p:cNvPr id="85" name="6行目"/>
+          <p:cNvPr id="84" name="6行目"/>
           <p:cNvGrpSpPr/>
           <p:nvPr/>
         </p:nvGrpSpPr>
@@ -6470,7 +6435,7 @@
         </p:grpSpPr>
         <p:sp>
           <p:nvSpPr>
-            <p:cNvPr id="86" name="外わく"/>
+            <p:cNvPr id="85" name="外わく"/>
             <p:cNvSpPr/>
             <p:nvPr/>
           </p:nvSpPr>
@@ -6514,7 +6479,7 @@
         </p:sp>
         <p:cxnSp>
           <p:nvCxnSpPr>
-            <p:cNvPr id="87" name="マスの線 1"/>
+            <p:cNvPr id="86" name="マスの線 1"/>
             <p:cNvCxnSpPr/>
             <p:nvPr/>
           </p:nvCxnSpPr>
@@ -6550,7 +6515,7 @@
         </p:cxnSp>
         <p:cxnSp>
           <p:nvCxnSpPr>
-            <p:cNvPr id="88" name="マスの線 2"/>
+            <p:cNvPr id="87" name="マスの線 2"/>
             <p:cNvCxnSpPr/>
             <p:nvPr/>
           </p:nvCxnSpPr>
@@ -6586,7 +6551,7 @@
         </p:cxnSp>
         <p:cxnSp>
           <p:nvCxnSpPr>
-            <p:cNvPr id="89" name="マスの線 3"/>
+            <p:cNvPr id="88" name="マスの線 3"/>
             <p:cNvCxnSpPr/>
             <p:nvPr/>
           </p:nvCxnSpPr>
@@ -6622,7 +6587,7 @@
         </p:cxnSp>
         <p:cxnSp>
           <p:nvCxnSpPr>
-            <p:cNvPr id="90" name="マスの線 4"/>
+            <p:cNvPr id="89" name="マスの線 4"/>
             <p:cNvCxnSpPr/>
             <p:nvPr/>
           </p:nvCxnSpPr>
@@ -6658,7 +6623,7 @@
         </p:cxnSp>
         <p:cxnSp>
           <p:nvCxnSpPr>
-            <p:cNvPr id="91" name="マスの線 5"/>
+            <p:cNvPr id="90" name="マスの線 5"/>
             <p:cNvCxnSpPr/>
             <p:nvPr/>
           </p:nvCxnSpPr>
@@ -6694,7 +6659,7 @@
         </p:cxnSp>
         <p:cxnSp>
           <p:nvCxnSpPr>
-            <p:cNvPr id="92" name="マスの線 6"/>
+            <p:cNvPr id="91" name="マスの線 6"/>
             <p:cNvCxnSpPr/>
             <p:nvPr/>
           </p:nvCxnSpPr>
@@ -6730,7 +6695,7 @@
         </p:cxnSp>
         <p:cxnSp>
           <p:nvCxnSpPr>
-            <p:cNvPr id="93" name="マスの線 7"/>
+            <p:cNvPr id="92" name="マスの線 7"/>
             <p:cNvCxnSpPr/>
             <p:nvPr/>
           </p:nvCxnSpPr>
@@ -6766,7 +6731,7 @@
         </p:cxnSp>
         <p:cxnSp>
           <p:nvCxnSpPr>
-            <p:cNvPr id="94" name="マスの線 8"/>
+            <p:cNvPr id="93" name="マスの線 8"/>
             <p:cNvCxnSpPr/>
             <p:nvPr/>
           </p:nvCxnSpPr>
@@ -6802,7 +6767,7 @@
         </p:cxnSp>
         <p:cxnSp>
           <p:nvCxnSpPr>
-            <p:cNvPr id="95" name="マスの線 9"/>
+            <p:cNvPr id="94" name="マスの線 9"/>
             <p:cNvCxnSpPr/>
             <p:nvPr/>
           </p:nvCxnSpPr>
@@ -6838,7 +6803,7 @@
         </p:cxnSp>
         <p:cxnSp>
           <p:nvCxnSpPr>
-            <p:cNvPr id="96" name="マスの線 10"/>
+            <p:cNvPr id="95" name="マスの線 10"/>
             <p:cNvCxnSpPr/>
             <p:nvPr/>
           </p:nvCxnSpPr>
@@ -6874,7 +6839,7 @@
         </p:cxnSp>
         <p:cxnSp>
           <p:nvCxnSpPr>
-            <p:cNvPr id="97" name="マスの線 11"/>
+            <p:cNvPr id="96" name="マスの線 11"/>
             <p:cNvCxnSpPr/>
             <p:nvPr/>
           </p:nvCxnSpPr>
@@ -6910,7 +6875,7 @@
         </p:cxnSp>
         <p:cxnSp>
           <p:nvCxnSpPr>
-            <p:cNvPr id="98" name="マスの線 12"/>
+            <p:cNvPr id="97" name="マスの線 12"/>
             <p:cNvCxnSpPr/>
             <p:nvPr/>
           </p:nvCxnSpPr>
@@ -6946,7 +6911,7 @@
         </p:cxnSp>
         <p:cxnSp>
           <p:nvCxnSpPr>
-            <p:cNvPr id="99" name="マスの線 13"/>
+            <p:cNvPr id="98" name="マスの線 13"/>
             <p:cNvCxnSpPr/>
             <p:nvPr/>
           </p:nvCxnSpPr>
@@ -6982,7 +6947,7 @@
         </p:cxnSp>
         <p:cxnSp>
           <p:nvCxnSpPr>
-            <p:cNvPr id="100" name="マスの線 14"/>
+            <p:cNvPr id="99" name="マスの線 14"/>
             <p:cNvCxnSpPr/>
             <p:nvPr/>
           </p:nvCxnSpPr>
@@ -7019,7 +6984,7 @@
       </p:grpSp>
       <p:grpSp>
         <p:nvGrpSpPr>
-          <p:cNvPr id="101" name="7行目"/>
+          <p:cNvPr id="100" name="7行目"/>
           <p:cNvGrpSpPr/>
           <p:nvPr/>
         </p:nvGrpSpPr>
@@ -7033,7 +6998,7 @@
         </p:grpSpPr>
         <p:sp>
           <p:nvSpPr>
-            <p:cNvPr id="102" name="外わく"/>
+            <p:cNvPr id="101" name="外わく"/>
             <p:cNvSpPr/>
             <p:nvPr/>
           </p:nvSpPr>
@@ -7077,7 +7042,7 @@
         </p:sp>
         <p:cxnSp>
           <p:nvCxnSpPr>
-            <p:cNvPr id="103" name="マスの線 1"/>
+            <p:cNvPr id="102" name="マスの線 1"/>
             <p:cNvCxnSpPr/>
             <p:nvPr/>
           </p:nvCxnSpPr>
@@ -7113,7 +7078,7 @@
         </p:cxnSp>
         <p:cxnSp>
           <p:nvCxnSpPr>
-            <p:cNvPr id="104" name="マスの線 2"/>
+            <p:cNvPr id="103" name="マスの線 2"/>
             <p:cNvCxnSpPr/>
             <p:nvPr/>
           </p:nvCxnSpPr>
@@ -7149,7 +7114,7 @@
         </p:cxnSp>
         <p:cxnSp>
           <p:nvCxnSpPr>
-            <p:cNvPr id="105" name="マスの線 3"/>
+            <p:cNvPr id="104" name="マスの線 3"/>
             <p:cNvCxnSpPr/>
             <p:nvPr/>
           </p:nvCxnSpPr>
@@ -7185,7 +7150,7 @@
         </p:cxnSp>
         <p:cxnSp>
           <p:nvCxnSpPr>
-            <p:cNvPr id="106" name="マスの線 4"/>
+            <p:cNvPr id="105" name="マスの線 4"/>
             <p:cNvCxnSpPr/>
             <p:nvPr/>
           </p:nvCxnSpPr>
@@ -7221,7 +7186,7 @@
         </p:cxnSp>
         <p:cxnSp>
           <p:nvCxnSpPr>
-            <p:cNvPr id="107" name="マスの線 5"/>
+            <p:cNvPr id="106" name="マスの線 5"/>
             <p:cNvCxnSpPr/>
             <p:nvPr/>
           </p:nvCxnSpPr>
@@ -7257,7 +7222,7 @@
         </p:cxnSp>
         <p:cxnSp>
           <p:nvCxnSpPr>
-            <p:cNvPr id="108" name="マスの線 6"/>
+            <p:cNvPr id="107" name="マスの線 6"/>
             <p:cNvCxnSpPr/>
             <p:nvPr/>
           </p:nvCxnSpPr>
@@ -7293,7 +7258,7 @@
         </p:cxnSp>
         <p:cxnSp>
           <p:nvCxnSpPr>
-            <p:cNvPr id="109" name="マスの線 7"/>
+            <p:cNvPr id="108" name="マスの線 7"/>
             <p:cNvCxnSpPr/>
             <p:nvPr/>
           </p:nvCxnSpPr>
@@ -7329,7 +7294,7 @@
         </p:cxnSp>
         <p:cxnSp>
           <p:nvCxnSpPr>
-            <p:cNvPr id="110" name="マスの線 8"/>
+            <p:cNvPr id="109" name="マスの線 8"/>
             <p:cNvCxnSpPr/>
             <p:nvPr/>
           </p:nvCxnSpPr>
@@ -7365,7 +7330,7 @@
         </p:cxnSp>
         <p:cxnSp>
           <p:nvCxnSpPr>
-            <p:cNvPr id="111" name="マスの線 9"/>
+            <p:cNvPr id="110" name="マスの線 9"/>
             <p:cNvCxnSpPr/>
             <p:nvPr/>
           </p:nvCxnSpPr>
@@ -7401,7 +7366,7 @@
         </p:cxnSp>
         <p:cxnSp>
           <p:nvCxnSpPr>
-            <p:cNvPr id="112" name="マスの線 10"/>
+            <p:cNvPr id="111" name="マスの線 10"/>
             <p:cNvCxnSpPr/>
             <p:nvPr/>
           </p:nvCxnSpPr>
@@ -7437,7 +7402,7 @@
         </p:cxnSp>
         <p:cxnSp>
           <p:nvCxnSpPr>
-            <p:cNvPr id="113" name="マスの線 11"/>
+            <p:cNvPr id="112" name="マスの線 11"/>
             <p:cNvCxnSpPr/>
             <p:nvPr/>
           </p:nvCxnSpPr>
@@ -7473,7 +7438,7 @@
         </p:cxnSp>
         <p:cxnSp>
           <p:nvCxnSpPr>
-            <p:cNvPr id="114" name="マスの線 12"/>
+            <p:cNvPr id="113" name="マスの線 12"/>
             <p:cNvCxnSpPr/>
             <p:nvPr/>
           </p:nvCxnSpPr>
@@ -7509,7 +7474,7 @@
         </p:cxnSp>
         <p:cxnSp>
           <p:nvCxnSpPr>
-            <p:cNvPr id="115" name="マスの線 13"/>
+            <p:cNvPr id="114" name="マスの線 13"/>
             <p:cNvCxnSpPr/>
             <p:nvPr/>
           </p:nvCxnSpPr>
@@ -7545,7 +7510,7 @@
         </p:cxnSp>
         <p:cxnSp>
           <p:nvCxnSpPr>
-            <p:cNvPr id="116" name="マスの線 14"/>
+            <p:cNvPr id="115" name="マスの線 14"/>
             <p:cNvCxnSpPr/>
             <p:nvPr/>
           </p:nvCxnSpPr>
@@ -7582,7 +7547,7 @@
       </p:grpSp>
       <p:grpSp>
         <p:nvGrpSpPr>
-          <p:cNvPr id="117" name="8行目"/>
+          <p:cNvPr id="116" name="8行目"/>
           <p:cNvGrpSpPr/>
           <p:nvPr/>
         </p:nvGrpSpPr>
@@ -7596,7 +7561,7 @@
         </p:grpSpPr>
         <p:sp>
           <p:nvSpPr>
-            <p:cNvPr id="118" name="外わく"/>
+            <p:cNvPr id="117" name="外わく"/>
             <p:cNvSpPr/>
             <p:nvPr/>
           </p:nvSpPr>
@@ -7640,7 +7605,7 @@
         </p:sp>
         <p:cxnSp>
           <p:nvCxnSpPr>
-            <p:cNvPr id="119" name="マスの線 1"/>
+            <p:cNvPr id="118" name="マスの線 1"/>
             <p:cNvCxnSpPr/>
             <p:nvPr/>
           </p:nvCxnSpPr>
@@ -7676,7 +7641,7 @@
         </p:cxnSp>
         <p:cxnSp>
           <p:nvCxnSpPr>
-            <p:cNvPr id="120" name="マスの線 2"/>
+            <p:cNvPr id="119" name="マスの線 2"/>
             <p:cNvCxnSpPr/>
             <p:nvPr/>
           </p:nvCxnSpPr>
@@ -7712,7 +7677,7 @@
         </p:cxnSp>
         <p:cxnSp>
           <p:nvCxnSpPr>
-            <p:cNvPr id="121" name="マスの線 3"/>
+            <p:cNvPr id="120" name="マスの線 3"/>
             <p:cNvCxnSpPr/>
             <p:nvPr/>
           </p:nvCxnSpPr>
@@ -7748,7 +7713,7 @@
         </p:cxnSp>
         <p:cxnSp>
           <p:nvCxnSpPr>
-            <p:cNvPr id="122" name="マスの線 4"/>
+            <p:cNvPr id="121" name="マスの線 4"/>
             <p:cNvCxnSpPr/>
             <p:nvPr/>
           </p:nvCxnSpPr>
@@ -7784,7 +7749,7 @@
         </p:cxnSp>
         <p:cxnSp>
           <p:nvCxnSpPr>
-            <p:cNvPr id="123" name="マスの線 5"/>
+            <p:cNvPr id="122" name="マスの線 5"/>
             <p:cNvCxnSpPr/>
             <p:nvPr/>
           </p:nvCxnSpPr>
@@ -7820,7 +7785,7 @@
         </p:cxnSp>
         <p:cxnSp>
           <p:nvCxnSpPr>
-            <p:cNvPr id="124" name="マスの線 6"/>
+            <p:cNvPr id="123" name="マスの線 6"/>
             <p:cNvCxnSpPr/>
             <p:nvPr/>
           </p:nvCxnSpPr>
@@ -7856,7 +7821,7 @@
         </p:cxnSp>
         <p:cxnSp>
           <p:nvCxnSpPr>
-            <p:cNvPr id="125" name="マスの線 7"/>
+            <p:cNvPr id="124" name="マスの線 7"/>
             <p:cNvCxnSpPr/>
             <p:nvPr/>
           </p:nvCxnSpPr>
@@ -7892,7 +7857,7 @@
         </p:cxnSp>
         <p:cxnSp>
           <p:nvCxnSpPr>
-            <p:cNvPr id="126" name="マスの線 8"/>
+            <p:cNvPr id="125" name="マスの線 8"/>
             <p:cNvCxnSpPr/>
             <p:nvPr/>
           </p:nvCxnSpPr>
@@ -7928,7 +7893,7 @@
         </p:cxnSp>
         <p:cxnSp>
           <p:nvCxnSpPr>
-            <p:cNvPr id="127" name="マスの線 9"/>
+            <p:cNvPr id="126" name="マスの線 9"/>
             <p:cNvCxnSpPr/>
             <p:nvPr/>
           </p:nvCxnSpPr>
@@ -7964,7 +7929,7 @@
         </p:cxnSp>
         <p:cxnSp>
           <p:nvCxnSpPr>
-            <p:cNvPr id="128" name="マスの線 10"/>
+            <p:cNvPr id="127" name="マスの線 10"/>
             <p:cNvCxnSpPr/>
             <p:nvPr/>
           </p:nvCxnSpPr>
@@ -8000,7 +7965,7 @@
         </p:cxnSp>
         <p:cxnSp>
           <p:nvCxnSpPr>
-            <p:cNvPr id="129" name="マスの線 11"/>
+            <p:cNvPr id="128" name="マスの線 11"/>
             <p:cNvCxnSpPr/>
             <p:nvPr/>
           </p:nvCxnSpPr>
@@ -8036,7 +8001,7 @@
         </p:cxnSp>
         <p:cxnSp>
           <p:nvCxnSpPr>
-            <p:cNvPr id="130" name="マスの線 12"/>
+            <p:cNvPr id="129" name="マスの線 12"/>
             <p:cNvCxnSpPr/>
             <p:nvPr/>
           </p:nvCxnSpPr>
@@ -8072,7 +8037,7 @@
         </p:cxnSp>
         <p:cxnSp>
           <p:nvCxnSpPr>
-            <p:cNvPr id="131" name="マスの線 13"/>
+            <p:cNvPr id="130" name="マスの線 13"/>
             <p:cNvCxnSpPr/>
             <p:nvPr/>
           </p:nvCxnSpPr>
@@ -8108,7 +8073,7 @@
         </p:cxnSp>
         <p:cxnSp>
           <p:nvCxnSpPr>
-            <p:cNvPr id="132" name="マスの線 14"/>
+            <p:cNvPr id="131" name="マスの線 14"/>
             <p:cNvCxnSpPr/>
             <p:nvPr/>
           </p:nvCxnSpPr>
@@ -8145,7 +8110,7 @@
       </p:grpSp>
       <p:grpSp>
         <p:nvGrpSpPr>
-          <p:cNvPr id="133" name="9行目"/>
+          <p:cNvPr id="132" name="9行目"/>
           <p:cNvGrpSpPr/>
           <p:nvPr/>
         </p:nvGrpSpPr>
@@ -8159,7 +8124,7 @@
         </p:grpSpPr>
         <p:sp>
           <p:nvSpPr>
-            <p:cNvPr id="134" name="外わく"/>
+            <p:cNvPr id="133" name="外わく"/>
             <p:cNvSpPr/>
             <p:nvPr/>
           </p:nvSpPr>
@@ -8203,7 +8168,7 @@
         </p:sp>
         <p:cxnSp>
           <p:nvCxnSpPr>
-            <p:cNvPr id="135" name="マスの線 1"/>
+            <p:cNvPr id="134" name="マスの線 1"/>
             <p:cNvCxnSpPr/>
             <p:nvPr/>
           </p:nvCxnSpPr>
@@ -8239,7 +8204,7 @@
         </p:cxnSp>
         <p:cxnSp>
           <p:nvCxnSpPr>
-            <p:cNvPr id="136" name="マスの線 2"/>
+            <p:cNvPr id="135" name="マスの線 2"/>
             <p:cNvCxnSpPr/>
             <p:nvPr/>
           </p:nvCxnSpPr>
@@ -8275,7 +8240,7 @@
         </p:cxnSp>
         <p:cxnSp>
           <p:nvCxnSpPr>
-            <p:cNvPr id="137" name="マスの線 3"/>
+            <p:cNvPr id="136" name="マスの線 3"/>
             <p:cNvCxnSpPr/>
             <p:nvPr/>
           </p:nvCxnSpPr>
@@ -8311,7 +8276,7 @@
         </p:cxnSp>
         <p:cxnSp>
           <p:nvCxnSpPr>
-            <p:cNvPr id="138" name="マスの線 4"/>
+            <p:cNvPr id="137" name="マスの線 4"/>
             <p:cNvCxnSpPr/>
             <p:nvPr/>
           </p:nvCxnSpPr>
@@ -8347,7 +8312,7 @@
         </p:cxnSp>
         <p:cxnSp>
           <p:nvCxnSpPr>
-            <p:cNvPr id="139" name="マスの線 5"/>
+            <p:cNvPr id="138" name="マスの線 5"/>
             <p:cNvCxnSpPr/>
             <p:nvPr/>
           </p:nvCxnSpPr>
@@ -8383,7 +8348,7 @@
         </p:cxnSp>
         <p:cxnSp>
           <p:nvCxnSpPr>
-            <p:cNvPr id="140" name="マスの線 6"/>
+            <p:cNvPr id="139" name="マスの線 6"/>
             <p:cNvCxnSpPr/>
             <p:nvPr/>
           </p:nvCxnSpPr>
@@ -8419,7 +8384,7 @@
         </p:cxnSp>
         <p:cxnSp>
           <p:nvCxnSpPr>
-            <p:cNvPr id="141" name="マスの線 7"/>
+            <p:cNvPr id="140" name="マスの線 7"/>
             <p:cNvCxnSpPr/>
             <p:nvPr/>
           </p:nvCxnSpPr>
@@ -8455,7 +8420,7 @@
         </p:cxnSp>
         <p:cxnSp>
           <p:nvCxnSpPr>
-            <p:cNvPr id="142" name="マスの線 8"/>
+            <p:cNvPr id="141" name="マスの線 8"/>
             <p:cNvCxnSpPr/>
             <p:nvPr/>
           </p:nvCxnSpPr>
@@ -8491,7 +8456,7 @@
         </p:cxnSp>
         <p:cxnSp>
           <p:nvCxnSpPr>
-            <p:cNvPr id="143" name="マスの線 9"/>
+            <p:cNvPr id="142" name="マスの線 9"/>
             <p:cNvCxnSpPr/>
             <p:nvPr/>
           </p:nvCxnSpPr>
@@ -8527,7 +8492,7 @@
         </p:cxnSp>
         <p:cxnSp>
           <p:nvCxnSpPr>
-            <p:cNvPr id="144" name="マスの線 10"/>
+            <p:cNvPr id="143" name="マスの線 10"/>
             <p:cNvCxnSpPr/>
             <p:nvPr/>
           </p:nvCxnSpPr>
@@ -8563,7 +8528,7 @@
         </p:cxnSp>
         <p:cxnSp>
           <p:nvCxnSpPr>
-            <p:cNvPr id="145" name="マスの線 11"/>
+            <p:cNvPr id="144" name="マスの線 11"/>
             <p:cNvCxnSpPr/>
             <p:nvPr/>
           </p:nvCxnSpPr>
@@ -8599,7 +8564,7 @@
         </p:cxnSp>
         <p:cxnSp>
           <p:nvCxnSpPr>
-            <p:cNvPr id="146" name="マスの線 12"/>
+            <p:cNvPr id="145" name="マスの線 12"/>
             <p:cNvCxnSpPr/>
             <p:nvPr/>
           </p:nvCxnSpPr>
@@ -8635,7 +8600,7 @@
         </p:cxnSp>
         <p:cxnSp>
           <p:nvCxnSpPr>
-            <p:cNvPr id="147" name="マスの線 13"/>
+            <p:cNvPr id="146" name="マスの線 13"/>
             <p:cNvCxnSpPr/>
             <p:nvPr/>
           </p:nvCxnSpPr>
@@ -8671,7 +8636,7 @@
         </p:cxnSp>
         <p:cxnSp>
           <p:nvCxnSpPr>
-            <p:cNvPr id="148" name="マスの線 14"/>
+            <p:cNvPr id="147" name="マスの線 14"/>
             <p:cNvCxnSpPr/>
             <p:nvPr/>
           </p:nvCxnSpPr>
@@ -8708,7 +8673,7 @@
       </p:grpSp>
       <p:grpSp>
         <p:nvGrpSpPr>
-          <p:cNvPr id="149" name="10行目"/>
+          <p:cNvPr id="148" name="10行目"/>
           <p:cNvGrpSpPr/>
           <p:nvPr/>
         </p:nvGrpSpPr>
@@ -8722,7 +8687,7 @@
         </p:grpSpPr>
         <p:sp>
           <p:nvSpPr>
-            <p:cNvPr id="150" name="外わく"/>
+            <p:cNvPr id="149" name="外わく"/>
             <p:cNvSpPr/>
             <p:nvPr/>
           </p:nvSpPr>
@@ -8766,7 +8731,7 @@
         </p:sp>
         <p:cxnSp>
           <p:nvCxnSpPr>
-            <p:cNvPr id="151" name="マスの線 1"/>
+            <p:cNvPr id="150" name="マスの線 1"/>
             <p:cNvCxnSpPr/>
             <p:nvPr/>
           </p:nvCxnSpPr>
@@ -8802,7 +8767,7 @@
         </p:cxnSp>
         <p:cxnSp>
           <p:nvCxnSpPr>
-            <p:cNvPr id="152" name="マスの線 2"/>
+            <p:cNvPr id="151" name="マスの線 2"/>
             <p:cNvCxnSpPr/>
             <p:nvPr/>
           </p:nvCxnSpPr>
@@ -8838,7 +8803,7 @@
         </p:cxnSp>
         <p:cxnSp>
           <p:nvCxnSpPr>
-            <p:cNvPr id="153" name="マスの線 3"/>
+            <p:cNvPr id="152" name="マスの線 3"/>
             <p:cNvCxnSpPr/>
             <p:nvPr/>
           </p:nvCxnSpPr>
@@ -8874,7 +8839,7 @@
         </p:cxnSp>
         <p:cxnSp>
           <p:nvCxnSpPr>
-            <p:cNvPr id="154" name="マスの線 4"/>
+            <p:cNvPr id="153" name="マスの線 4"/>
             <p:cNvCxnSpPr/>
             <p:nvPr/>
           </p:nvCxnSpPr>
@@ -8910,7 +8875,7 @@
         </p:cxnSp>
         <p:cxnSp>
           <p:nvCxnSpPr>
-            <p:cNvPr id="155" name="マスの線 5"/>
+            <p:cNvPr id="154" name="マスの線 5"/>
             <p:cNvCxnSpPr/>
             <p:nvPr/>
           </p:nvCxnSpPr>
@@ -8946,7 +8911,7 @@
         </p:cxnSp>
         <p:cxnSp>
           <p:nvCxnSpPr>
-            <p:cNvPr id="156" name="マスの線 6"/>
+            <p:cNvPr id="155" name="マスの線 6"/>
             <p:cNvCxnSpPr/>
             <p:nvPr/>
           </p:nvCxnSpPr>
@@ -8982,7 +8947,7 @@
         </p:cxnSp>
         <p:cxnSp>
           <p:nvCxnSpPr>
-            <p:cNvPr id="157" name="マスの線 7"/>
+            <p:cNvPr id="156" name="マスの線 7"/>
             <p:cNvCxnSpPr/>
             <p:nvPr/>
           </p:nvCxnSpPr>
@@ -9018,7 +8983,7 @@
         </p:cxnSp>
         <p:cxnSp>
           <p:nvCxnSpPr>
-            <p:cNvPr id="158" name="マスの線 8"/>
+            <p:cNvPr id="157" name="マスの線 8"/>
             <p:cNvCxnSpPr/>
             <p:nvPr/>
           </p:nvCxnSpPr>
@@ -9054,7 +9019,7 @@
         </p:cxnSp>
         <p:cxnSp>
           <p:nvCxnSpPr>
-            <p:cNvPr id="159" name="マスの線 9"/>
+            <p:cNvPr id="158" name="マスの線 9"/>
             <p:cNvCxnSpPr/>
             <p:nvPr/>
           </p:nvCxnSpPr>
@@ -9090,7 +9055,7 @@
         </p:cxnSp>
         <p:cxnSp>
           <p:nvCxnSpPr>
-            <p:cNvPr id="160" name="マスの線 10"/>
+            <p:cNvPr id="159" name="マスの線 10"/>
             <p:cNvCxnSpPr/>
             <p:nvPr/>
           </p:nvCxnSpPr>
@@ -9126,7 +9091,7 @@
         </p:cxnSp>
         <p:cxnSp>
           <p:nvCxnSpPr>
-            <p:cNvPr id="161" name="マスの線 11"/>
+            <p:cNvPr id="160" name="マスの線 11"/>
             <p:cNvCxnSpPr/>
             <p:nvPr/>
           </p:nvCxnSpPr>
@@ -9162,7 +9127,7 @@
         </p:cxnSp>
         <p:cxnSp>
           <p:nvCxnSpPr>
-            <p:cNvPr id="162" name="マスの線 12"/>
+            <p:cNvPr id="161" name="マスの線 12"/>
             <p:cNvCxnSpPr/>
             <p:nvPr/>
           </p:nvCxnSpPr>
@@ -9198,7 +9163,7 @@
         </p:cxnSp>
         <p:cxnSp>
           <p:nvCxnSpPr>
-            <p:cNvPr id="163" name="マスの線 13"/>
+            <p:cNvPr id="162" name="マスの線 13"/>
             <p:cNvCxnSpPr/>
             <p:nvPr/>
           </p:nvCxnSpPr>
@@ -9234,7 +9199,7 @@
         </p:cxnSp>
         <p:cxnSp>
           <p:nvCxnSpPr>
-            <p:cNvPr id="164" name="マスの線 14"/>
+            <p:cNvPr id="163" name="マスの線 14"/>
             <p:cNvCxnSpPr/>
             <p:nvPr/>
           </p:nvCxnSpPr>
@@ -9271,7 +9236,7 @@
       </p:grpSp>
       <p:grpSp>
         <p:nvGrpSpPr>
-          <p:cNvPr id="165" name="11行目"/>
+          <p:cNvPr id="164" name="11行目"/>
           <p:cNvGrpSpPr/>
           <p:nvPr/>
         </p:nvGrpSpPr>
@@ -9285,7 +9250,7 @@
         </p:grpSpPr>
         <p:sp>
           <p:nvSpPr>
-            <p:cNvPr id="166" name="外わく"/>
+            <p:cNvPr id="165" name="外わく"/>
             <p:cNvSpPr/>
             <p:nvPr/>
           </p:nvSpPr>
@@ -9329,7 +9294,7 @@
         </p:sp>
         <p:cxnSp>
           <p:nvCxnSpPr>
-            <p:cNvPr id="167" name="マスの線 1"/>
+            <p:cNvPr id="166" name="マスの線 1"/>
             <p:cNvCxnSpPr/>
             <p:nvPr/>
           </p:nvCxnSpPr>
@@ -9365,7 +9330,7 @@
         </p:cxnSp>
         <p:cxnSp>
           <p:nvCxnSpPr>
-            <p:cNvPr id="168" name="マスの線 2"/>
+            <p:cNvPr id="167" name="マスの線 2"/>
             <p:cNvCxnSpPr/>
             <p:nvPr/>
           </p:nvCxnSpPr>
@@ -9401,7 +9366,7 @@
         </p:cxnSp>
         <p:cxnSp>
           <p:nvCxnSpPr>
-            <p:cNvPr id="169" name="マスの線 3"/>
+            <p:cNvPr id="168" name="マスの線 3"/>
             <p:cNvCxnSpPr/>
             <p:nvPr/>
           </p:nvCxnSpPr>
@@ -9437,7 +9402,7 @@
         </p:cxnSp>
         <p:cxnSp>
           <p:nvCxnSpPr>
-            <p:cNvPr id="170" name="マスの線 4"/>
+            <p:cNvPr id="169" name="マスの線 4"/>
             <p:cNvCxnSpPr/>
             <p:nvPr/>
           </p:nvCxnSpPr>
@@ -9473,7 +9438,7 @@
         </p:cxnSp>
         <p:cxnSp>
           <p:nvCxnSpPr>
-            <p:cNvPr id="171" name="マスの線 5"/>
+            <p:cNvPr id="170" name="マスの線 5"/>
             <p:cNvCxnSpPr/>
             <p:nvPr/>
           </p:nvCxnSpPr>
@@ -9509,7 +9474,7 @@
         </p:cxnSp>
         <p:cxnSp>
           <p:nvCxnSpPr>
-            <p:cNvPr id="172" name="マスの線 6"/>
+            <p:cNvPr id="171" name="マスの線 6"/>
             <p:cNvCxnSpPr/>
             <p:nvPr/>
           </p:nvCxnSpPr>
@@ -9545,7 +9510,7 @@
         </p:cxnSp>
         <p:cxnSp>
           <p:nvCxnSpPr>
-            <p:cNvPr id="173" name="マスの線 7"/>
+            <p:cNvPr id="172" name="マスの線 7"/>
             <p:cNvCxnSpPr/>
             <p:nvPr/>
           </p:nvCxnSpPr>
@@ -9581,7 +9546,7 @@
         </p:cxnSp>
         <p:cxnSp>
           <p:nvCxnSpPr>
-            <p:cNvPr id="174" name="マスの線 8"/>
+            <p:cNvPr id="173" name="マスの線 8"/>
             <p:cNvCxnSpPr/>
             <p:nvPr/>
           </p:nvCxnSpPr>
@@ -9617,7 +9582,7 @@
         </p:cxnSp>
         <p:cxnSp>
           <p:nvCxnSpPr>
-            <p:cNvPr id="175" name="マスの線 9"/>
+            <p:cNvPr id="174" name="マスの線 9"/>
             <p:cNvCxnSpPr/>
             <p:nvPr/>
           </p:nvCxnSpPr>
@@ -9653,7 +9618,7 @@
         </p:cxnSp>
         <p:cxnSp>
           <p:nvCxnSpPr>
-            <p:cNvPr id="176" name="マスの線 10"/>
+            <p:cNvPr id="175" name="マスの線 10"/>
             <p:cNvCxnSpPr/>
             <p:nvPr/>
           </p:nvCxnSpPr>
@@ -9689,7 +9654,7 @@
         </p:cxnSp>
         <p:cxnSp>
           <p:nvCxnSpPr>
-            <p:cNvPr id="177" name="マスの線 11"/>
+            <p:cNvPr id="176" name="マスの線 11"/>
             <p:cNvCxnSpPr/>
             <p:nvPr/>
           </p:nvCxnSpPr>
@@ -9725,7 +9690,7 @@
         </p:cxnSp>
         <p:cxnSp>
           <p:nvCxnSpPr>
-            <p:cNvPr id="178" name="マスの線 12"/>
+            <p:cNvPr id="177" name="マスの線 12"/>
             <p:cNvCxnSpPr/>
             <p:nvPr/>
           </p:nvCxnSpPr>
@@ -9761,7 +9726,7 @@
         </p:cxnSp>
         <p:cxnSp>
           <p:nvCxnSpPr>
-            <p:cNvPr id="179" name="マスの線 13"/>
+            <p:cNvPr id="178" name="マスの線 13"/>
             <p:cNvCxnSpPr/>
             <p:nvPr/>
           </p:nvCxnSpPr>
@@ -9797,7 +9762,7 @@
         </p:cxnSp>
         <p:cxnSp>
           <p:nvCxnSpPr>
-            <p:cNvPr id="180" name="マスの線 14"/>
+            <p:cNvPr id="179" name="マスの線 14"/>
             <p:cNvCxnSpPr/>
             <p:nvPr/>
           </p:nvCxnSpPr>
@@ -9834,7 +9799,7 @@
       </p:grpSp>
       <p:grpSp>
         <p:nvGrpSpPr>
-          <p:cNvPr id="181" name="12行目"/>
+          <p:cNvPr id="180" name="12行目"/>
           <p:cNvGrpSpPr/>
           <p:nvPr/>
         </p:nvGrpSpPr>
@@ -9848,7 +9813,7 @@
         </p:grpSpPr>
         <p:sp>
           <p:nvSpPr>
-            <p:cNvPr id="182" name="外わく"/>
+            <p:cNvPr id="181" name="外わく"/>
             <p:cNvSpPr/>
             <p:nvPr/>
           </p:nvSpPr>
@@ -9892,7 +9857,7 @@
         </p:sp>
         <p:cxnSp>
           <p:nvCxnSpPr>
-            <p:cNvPr id="183" name="マスの線 1"/>
+            <p:cNvPr id="182" name="マスの線 1"/>
             <p:cNvCxnSpPr/>
             <p:nvPr/>
           </p:nvCxnSpPr>
@@ -9928,7 +9893,7 @@
         </p:cxnSp>
         <p:cxnSp>
           <p:nvCxnSpPr>
-            <p:cNvPr id="184" name="マスの線 2"/>
+            <p:cNvPr id="183" name="マスの線 2"/>
             <p:cNvCxnSpPr/>
             <p:nvPr/>
           </p:nvCxnSpPr>
@@ -9964,7 +9929,7 @@
         </p:cxnSp>
         <p:cxnSp>
           <p:nvCxnSpPr>
-            <p:cNvPr id="185" name="マスの線 3"/>
+            <p:cNvPr id="184" name="マスの線 3"/>
             <p:cNvCxnSpPr/>
             <p:nvPr/>
           </p:nvCxnSpPr>
@@ -10000,7 +9965,7 @@
         </p:cxnSp>
         <p:cxnSp>
           <p:nvCxnSpPr>
-            <p:cNvPr id="186" name="マスの線 4"/>
+            <p:cNvPr id="185" name="マスの線 4"/>
             <p:cNvCxnSpPr/>
             <p:nvPr/>
           </p:nvCxnSpPr>
@@ -10036,7 +10001,7 @@
         </p:cxnSp>
         <p:cxnSp>
           <p:nvCxnSpPr>
-            <p:cNvPr id="187" name="マスの線 5"/>
+            <p:cNvPr id="186" name="マスの線 5"/>
             <p:cNvCxnSpPr/>
             <p:nvPr/>
           </p:nvCxnSpPr>
@@ -10072,7 +10037,7 @@
         </p:cxnSp>
         <p:cxnSp>
           <p:nvCxnSpPr>
-            <p:cNvPr id="188" name="マスの線 6"/>
+            <p:cNvPr id="187" name="マスの線 6"/>
             <p:cNvCxnSpPr/>
             <p:nvPr/>
           </p:nvCxnSpPr>
@@ -10108,7 +10073,7 @@
         </p:cxnSp>
         <p:cxnSp>
           <p:nvCxnSpPr>
-            <p:cNvPr id="189" name="マスの線 7"/>
+            <p:cNvPr id="188" name="マスの線 7"/>
             <p:cNvCxnSpPr/>
             <p:nvPr/>
           </p:nvCxnSpPr>
@@ -10144,7 +10109,7 @@
         </p:cxnSp>
         <p:cxnSp>
           <p:nvCxnSpPr>
-            <p:cNvPr id="190" name="マスの線 8"/>
+            <p:cNvPr id="189" name="マスの線 8"/>
             <p:cNvCxnSpPr/>
             <p:nvPr/>
           </p:nvCxnSpPr>
@@ -10180,7 +10145,7 @@
         </p:cxnSp>
         <p:cxnSp>
           <p:nvCxnSpPr>
-            <p:cNvPr id="191" name="マスの線 9"/>
+            <p:cNvPr id="190" name="マスの線 9"/>
             <p:cNvCxnSpPr/>
             <p:nvPr/>
           </p:nvCxnSpPr>
@@ -10216,7 +10181,7 @@
         </p:cxnSp>
         <p:cxnSp>
           <p:nvCxnSpPr>
-            <p:cNvPr id="192" name="マスの線 10"/>
+            <p:cNvPr id="191" name="マスの線 10"/>
             <p:cNvCxnSpPr/>
             <p:nvPr/>
           </p:nvCxnSpPr>
@@ -10252,7 +10217,7 @@
         </p:cxnSp>
         <p:cxnSp>
           <p:nvCxnSpPr>
-            <p:cNvPr id="193" name="マスの線 11"/>
+            <p:cNvPr id="192" name="マスの線 11"/>
             <p:cNvCxnSpPr/>
             <p:nvPr/>
           </p:nvCxnSpPr>
@@ -10288,7 +10253,7 @@
         </p:cxnSp>
         <p:cxnSp>
           <p:nvCxnSpPr>
-            <p:cNvPr id="194" name="マスの線 12"/>
+            <p:cNvPr id="193" name="マスの線 12"/>
             <p:cNvCxnSpPr/>
             <p:nvPr/>
           </p:nvCxnSpPr>
@@ -10324,7 +10289,7 @@
         </p:cxnSp>
         <p:cxnSp>
           <p:nvCxnSpPr>
-            <p:cNvPr id="195" name="マスの線 13"/>
+            <p:cNvPr id="194" name="マスの線 13"/>
             <p:cNvCxnSpPr/>
             <p:nvPr/>
           </p:nvCxnSpPr>
@@ -10360,7 +10325,7 @@
         </p:cxnSp>
         <p:cxnSp>
           <p:nvCxnSpPr>
-            <p:cNvPr id="196" name="マスの線 14"/>
+            <p:cNvPr id="195" name="マスの線 14"/>
             <p:cNvCxnSpPr/>
             <p:nvPr/>
           </p:nvCxnSpPr>
@@ -10397,7 +10362,7 @@
       </p:grpSp>
       <p:grpSp>
         <p:nvGrpSpPr>
-          <p:cNvPr id="197" name="13行目"/>
+          <p:cNvPr id="196" name="13行目"/>
           <p:cNvGrpSpPr/>
           <p:nvPr/>
         </p:nvGrpSpPr>
@@ -10411,7 +10376,7 @@
         </p:grpSpPr>
         <p:sp>
           <p:nvSpPr>
-            <p:cNvPr id="198" name="外わく"/>
+            <p:cNvPr id="197" name="外わく"/>
             <p:cNvSpPr/>
             <p:nvPr/>
           </p:nvSpPr>
@@ -10455,7 +10420,7 @@
         </p:sp>
         <p:cxnSp>
           <p:nvCxnSpPr>
-            <p:cNvPr id="199" name="マスの線 1"/>
+            <p:cNvPr id="198" name="マスの線 1"/>
             <p:cNvCxnSpPr/>
             <p:nvPr/>
           </p:nvCxnSpPr>
@@ -10491,7 +10456,7 @@
         </p:cxnSp>
         <p:cxnSp>
           <p:nvCxnSpPr>
-            <p:cNvPr id="200" name="マスの線 2"/>
+            <p:cNvPr id="199" name="マスの線 2"/>
             <p:cNvCxnSpPr/>
             <p:nvPr/>
           </p:nvCxnSpPr>
@@ -10527,7 +10492,7 @@
         </p:cxnSp>
         <p:cxnSp>
           <p:nvCxnSpPr>
-            <p:cNvPr id="201" name="マスの線 3"/>
+            <p:cNvPr id="200" name="マスの線 3"/>
             <p:cNvCxnSpPr/>
             <p:nvPr/>
           </p:nvCxnSpPr>
@@ -10563,7 +10528,7 @@
         </p:cxnSp>
         <p:cxnSp>
           <p:nvCxnSpPr>
-            <p:cNvPr id="202" name="マスの線 4"/>
+            <p:cNvPr id="201" name="マスの線 4"/>
             <p:cNvCxnSpPr/>
             <p:nvPr/>
           </p:nvCxnSpPr>
@@ -10599,7 +10564,7 @@
         </p:cxnSp>
         <p:cxnSp>
           <p:nvCxnSpPr>
-            <p:cNvPr id="203" name="マスの線 5"/>
+            <p:cNvPr id="202" name="マスの線 5"/>
             <p:cNvCxnSpPr/>
             <p:nvPr/>
           </p:nvCxnSpPr>
@@ -10635,7 +10600,7 @@
         </p:cxnSp>
         <p:cxnSp>
           <p:nvCxnSpPr>
-            <p:cNvPr id="204" name="マスの線 6"/>
+            <p:cNvPr id="203" name="マスの線 6"/>
             <p:cNvCxnSpPr/>
             <p:nvPr/>
           </p:nvCxnSpPr>
@@ -10671,7 +10636,7 @@
         </p:cxnSp>
         <p:cxnSp>
           <p:nvCxnSpPr>
-            <p:cNvPr id="205" name="マスの線 7"/>
+            <p:cNvPr id="204" name="マスの線 7"/>
             <p:cNvCxnSpPr/>
             <p:nvPr/>
           </p:nvCxnSpPr>
@@ -10707,7 +10672,7 @@
         </p:cxnSp>
         <p:cxnSp>
           <p:nvCxnSpPr>
-            <p:cNvPr id="206" name="マスの線 8"/>
+            <p:cNvPr id="205" name="マスの線 8"/>
             <p:cNvCxnSpPr/>
             <p:nvPr/>
           </p:nvCxnSpPr>
@@ -10743,7 +10708,7 @@
         </p:cxnSp>
         <p:cxnSp>
           <p:nvCxnSpPr>
-            <p:cNvPr id="207" name="マスの線 9"/>
+            <p:cNvPr id="206" name="マスの線 9"/>
             <p:cNvCxnSpPr/>
             <p:nvPr/>
           </p:nvCxnSpPr>
@@ -10779,7 +10744,7 @@
         </p:cxnSp>
         <p:cxnSp>
           <p:nvCxnSpPr>
-            <p:cNvPr id="208" name="マスの線 10"/>
+            <p:cNvPr id="207" name="マスの線 10"/>
             <p:cNvCxnSpPr/>
             <p:nvPr/>
           </p:nvCxnSpPr>
@@ -10815,7 +10780,7 @@
         </p:cxnSp>
         <p:cxnSp>
           <p:nvCxnSpPr>
-            <p:cNvPr id="209" name="マスの線 11"/>
+            <p:cNvPr id="208" name="マスの線 11"/>
             <p:cNvCxnSpPr/>
             <p:nvPr/>
           </p:nvCxnSpPr>
@@ -10851,7 +10816,7 @@
         </p:cxnSp>
         <p:cxnSp>
           <p:nvCxnSpPr>
-            <p:cNvPr id="210" name="マスの線 12"/>
+            <p:cNvPr id="209" name="マスの線 12"/>
             <p:cNvCxnSpPr/>
             <p:nvPr/>
           </p:nvCxnSpPr>
@@ -10887,7 +10852,7 @@
         </p:cxnSp>
         <p:cxnSp>
           <p:nvCxnSpPr>
-            <p:cNvPr id="211" name="マスの線 13"/>
+            <p:cNvPr id="210" name="マスの線 13"/>
             <p:cNvCxnSpPr/>
             <p:nvPr/>
           </p:nvCxnSpPr>
@@ -10923,7 +10888,7 @@
         </p:cxnSp>
         <p:cxnSp>
           <p:nvCxnSpPr>
-            <p:cNvPr id="212" name="マスの線 14"/>
+            <p:cNvPr id="211" name="マスの線 14"/>
             <p:cNvCxnSpPr/>
             <p:nvPr/>
           </p:nvCxnSpPr>
@@ -10960,7 +10925,7 @@
       </p:grpSp>
       <p:grpSp>
         <p:nvGrpSpPr>
-          <p:cNvPr id="213" name="14行目"/>
+          <p:cNvPr id="212" name="14行目"/>
           <p:cNvGrpSpPr/>
           <p:nvPr/>
         </p:nvGrpSpPr>
@@ -10974,7 +10939,7 @@
         </p:grpSpPr>
         <p:sp>
           <p:nvSpPr>
-            <p:cNvPr id="214" name="外わく"/>
+            <p:cNvPr id="213" name="外わく"/>
             <p:cNvSpPr/>
             <p:nvPr/>
           </p:nvSpPr>
@@ -11018,7 +10983,7 @@
         </p:sp>
         <p:cxnSp>
           <p:nvCxnSpPr>
-            <p:cNvPr id="215" name="マスの線 1"/>
+            <p:cNvPr id="214" name="マスの線 1"/>
             <p:cNvCxnSpPr/>
             <p:nvPr/>
           </p:nvCxnSpPr>
@@ -11054,7 +11019,7 @@
         </p:cxnSp>
         <p:cxnSp>
           <p:nvCxnSpPr>
-            <p:cNvPr id="216" name="マスの線 2"/>
+            <p:cNvPr id="215" name="マスの線 2"/>
             <p:cNvCxnSpPr/>
             <p:nvPr/>
           </p:nvCxnSpPr>
@@ -11090,7 +11055,7 @@
         </p:cxnSp>
         <p:cxnSp>
           <p:nvCxnSpPr>
-            <p:cNvPr id="217" name="マスの線 3"/>
+            <p:cNvPr id="216" name="マスの線 3"/>
             <p:cNvCxnSpPr/>
             <p:nvPr/>
           </p:nvCxnSpPr>
@@ -11126,7 +11091,7 @@
         </p:cxnSp>
         <p:cxnSp>
           <p:nvCxnSpPr>
-            <p:cNvPr id="218" name="マスの線 4"/>
+            <p:cNvPr id="217" name="マスの線 4"/>
             <p:cNvCxnSpPr/>
             <p:nvPr/>
           </p:nvCxnSpPr>
@@ -11162,7 +11127,7 @@
         </p:cxnSp>
         <p:cxnSp>
           <p:nvCxnSpPr>
-            <p:cNvPr id="219" name="マスの線 5"/>
+            <p:cNvPr id="218" name="マスの線 5"/>
             <p:cNvCxnSpPr/>
             <p:nvPr/>
           </p:nvCxnSpPr>
@@ -11198,7 +11163,7 @@
         </p:cxnSp>
         <p:cxnSp>
           <p:nvCxnSpPr>
-            <p:cNvPr id="220" name="マスの線 6"/>
+            <p:cNvPr id="219" name="マスの線 6"/>
             <p:cNvCxnSpPr/>
             <p:nvPr/>
           </p:nvCxnSpPr>
@@ -11234,7 +11199,7 @@
         </p:cxnSp>
         <p:cxnSp>
           <p:nvCxnSpPr>
-            <p:cNvPr id="221" name="マスの線 7"/>
+            <p:cNvPr id="220" name="マスの線 7"/>
             <p:cNvCxnSpPr/>
             <p:nvPr/>
           </p:nvCxnSpPr>
@@ -11270,7 +11235,7 @@
         </p:cxnSp>
         <p:cxnSp>
           <p:nvCxnSpPr>
-            <p:cNvPr id="222" name="マスの線 8"/>
+            <p:cNvPr id="221" name="マスの線 8"/>
             <p:cNvCxnSpPr/>
             <p:nvPr/>
           </p:nvCxnSpPr>
@@ -11306,7 +11271,7 @@
         </p:cxnSp>
         <p:cxnSp>
           <p:nvCxnSpPr>
-            <p:cNvPr id="223" name="マスの線 9"/>
+            <p:cNvPr id="222" name="マスの線 9"/>
             <p:cNvCxnSpPr/>
             <p:nvPr/>
           </p:nvCxnSpPr>
@@ -11342,7 +11307,7 @@
         </p:cxnSp>
         <p:cxnSp>
           <p:nvCxnSpPr>
-            <p:cNvPr id="224" name="マスの線 10"/>
+            <p:cNvPr id="223" name="マスの線 10"/>
             <p:cNvCxnSpPr/>
             <p:nvPr/>
           </p:nvCxnSpPr>
@@ -11378,7 +11343,7 @@
         </p:cxnSp>
         <p:cxnSp>
           <p:nvCxnSpPr>
-            <p:cNvPr id="225" name="マスの線 11"/>
+            <p:cNvPr id="224" name="マスの線 11"/>
             <p:cNvCxnSpPr/>
             <p:nvPr/>
           </p:nvCxnSpPr>
@@ -11414,7 +11379,7 @@
         </p:cxnSp>
         <p:cxnSp>
           <p:nvCxnSpPr>
-            <p:cNvPr id="226" name="マスの線 12"/>
+            <p:cNvPr id="225" name="マスの線 12"/>
             <p:cNvCxnSpPr/>
             <p:nvPr/>
           </p:nvCxnSpPr>
@@ -11450,7 +11415,7 @@
         </p:cxnSp>
         <p:cxnSp>
           <p:nvCxnSpPr>
-            <p:cNvPr id="227" name="マスの線 13"/>
+            <p:cNvPr id="226" name="マスの線 13"/>
             <p:cNvCxnSpPr/>
             <p:nvPr/>
           </p:nvCxnSpPr>
@@ -11486,7 +11451,7 @@
         </p:cxnSp>
         <p:cxnSp>
           <p:nvCxnSpPr>
-            <p:cNvPr id="228" name="マスの線 14"/>
+            <p:cNvPr id="227" name="マスの線 14"/>
             <p:cNvCxnSpPr/>
             <p:nvPr/>
           </p:nvCxnSpPr>
@@ -11523,7 +11488,7 @@
       </p:grpSp>
       <p:pic>
         <p:nvPicPr>
-          <p:cNvPr id="229" name="さし絵（消してもかまいません）" descr="_tmp_ill.png"/>
+          <p:cNvPr id="228" name="さし絵（消してもかまいません）" descr="_tmp_ill.png"/>
           <p:cNvPicPr>
             <a:picLocks noChangeAspect="1"/>
           </p:cNvPicPr>
@@ -11547,7 +11512,7 @@
       </p:pic>
       <p:sp>
         <p:nvSpPr>
-          <p:cNvPr id="230" name="紙の説明（消してもかまいません）"/>
+          <p:cNvPr id="229" name="紙の説明（消してもかまいません）"/>
           <p:cNvSpPr txBox="1"/>
           <p:nvPr/>
         </p:nvSpPr>
@@ -11582,7 +11547,7 @@
       </p:sp>
       <p:sp>
         <p:nvSpPr>
-          <p:cNvPr id="231" name="クレジット"/>
+          <p:cNvPr id="230" name="クレジット"/>
           <p:cNvSpPr txBox="1"/>
           <p:nvPr/>
         </p:nvSpPr>
